--- a/wwhf26/Bloodhound-Kube-v1.pptx
+++ b/wwhf26/Bloodhound-Kube-v1.pptx
@@ -17,6 +17,7 @@
     <p:sldId id="262" r:id="rId10"/>
     <p:sldId id="263" r:id="rId11"/>
     <p:sldId id="264" r:id="rId12"/>
+    <p:sldId id="265" r:id="rId13"/>
   </p:sldIdLst>
   <p:sldSz cx="12192000" cy="6858000"/>
   <p:notesSz cx="6858000" cy="12192000"/>
@@ -372,7 +373,7 @@
             <a:pPr indent="0" algn="r">
               <a:buNone/>
             </a:pPr>
-            <a:fld id="{1C38A5E6-7D2B-4CDC-89EB-34A97D2B1A54}" type="slidenum">
+            <a:fld id="{B49DF566-5DDD-4FF2-B791-52BABB54405B}" type="slidenum">
               <a:rPr lang="en-US" sz="1400" b="0" u="none" strike="noStrike">
                 <a:solidFill>
                   <a:srgbClr val="000000"/>
@@ -419,7 +420,7 @@
       </p:grpSpPr>
       <p:sp>
         <p:nvSpPr>
-          <p:cNvPr id="261" name="PlaceHolder 1"/>
+          <p:cNvPr id="282" name="PlaceHolder 1"/>
           <p:cNvSpPr>
             <a:spLocks noGrp="1"/>
           </p:cNvSpPr>
@@ -430,7 +431,7 @@
         <p:spPr>
           <a:xfrm>
             <a:off x="685800" y="1143000"/>
-            <a:ext cx="5486040" cy="3085920"/>
+            <a:ext cx="5485680" cy="3085560"/>
           </a:xfrm>
           <a:prstGeom prst="rect">
             <a:avLst/>
@@ -442,7 +443,7 @@
       </p:sp>
       <p:sp>
         <p:nvSpPr>
-          <p:cNvPr id="262" name="PlaceHolder 2"/>
+          <p:cNvPr id="283" name="PlaceHolder 2"/>
           <p:cNvSpPr>
             <a:spLocks noGrp="1"/>
           </p:cNvSpPr>
@@ -453,7 +454,7 @@
         <p:spPr>
           <a:xfrm>
             <a:off x="685800" y="4400640"/>
-            <a:ext cx="5485320" cy="3599280"/>
+            <a:ext cx="5484960" cy="3598920"/>
           </a:xfrm>
           <a:prstGeom prst="rect">
             <a:avLst/>
@@ -484,7 +485,7 @@
       </p:sp>
       <p:sp>
         <p:nvSpPr>
-          <p:cNvPr id="263" name="PlaceHolder 3"/>
+          <p:cNvPr id="284" name="PlaceHolder 3"/>
           <p:cNvSpPr>
             <a:spLocks noGrp="1"/>
           </p:cNvSpPr>
@@ -495,7 +496,7 @@
         <p:spPr>
           <a:xfrm>
             <a:off x="3884760" y="8685360"/>
-            <a:ext cx="2970720" cy="457560"/>
+            <a:ext cx="2970360" cy="457200"/>
           </a:xfrm>
           <a:prstGeom prst="rect">
             <a:avLst/>
@@ -539,7 +540,7 @@
                 <a:tab pos="0" algn="l"/>
               </a:tabLst>
             </a:pPr>
-            <a:fld id="{D3F713BE-4942-48D5-A070-E228A7F8B458}" type="slidenum">
+            <a:fld id="{9C75CF20-4E31-4760-8876-E04406F8F4CD}" type="slidenum">
               <a:rPr lang="en-US" sz="1200" b="0" u="none" strike="noStrike">
                 <a:solidFill>
                   <a:schemeClr val="dk1"/>
@@ -549,7 +550,174 @@
                 <a:latin typeface="IBM Plex Sans"/>
                 <a:ea typeface="+mn-ea"/>
               </a:rPr>
-              <a:t>9</a:t>
+              <a:t>10</a:t>
+            </a:fld>
+            <a:endParaRPr lang="en-US" sz="1200" b="0" u="none" strike="noStrike">
+              <a:solidFill>
+                <a:srgbClr val="000000"/>
+              </a:solidFill>
+              <a:effectLst/>
+              <a:uFillTx/>
+              <a:latin typeface="Times New Roman"/>
+            </a:endParaRPr>
+          </a:p>
+        </p:txBody>
+      </p:sp>
+    </p:spTree>
+  </p:cSld>
+</p:notes>
+</file>
+
+<file path=ppt/notesSlides/notesSlide10.xml><?xml version="1.0" encoding="utf-8"?>
+<p:notes xmlns:a="http://schemas.openxmlformats.org/drawingml/2006/main" xmlns:p="http://schemas.openxmlformats.org/presentationml/2006/main" xmlns:r="http://schemas.openxmlformats.org/officeDocument/2006/relationships" xmlns:p14="http://schemas.microsoft.com/office/powerpoint/2010/main" xmlns:p15="http://schemas.microsoft.com/office/powerpoint/2012/main" xmlns:mc="http://schemas.openxmlformats.org/markup-compatibility/2006">
+  <p:cSld>
+    <p:spTree>
+      <p:nvGrpSpPr>
+        <p:cNvPr id="1" name=""/>
+        <p:cNvGrpSpPr/>
+        <p:nvPr/>
+      </p:nvGrpSpPr>
+      <p:grpSpPr>
+        <a:xfrm>
+          <a:off x="0" y="0"/>
+          <a:ext cx="0" cy="0"/>
+          <a:chOff x="0" y="0"/>
+          <a:chExt cx="0" cy="0"/>
+        </a:xfrm>
+      </p:grpSpPr>
+      <p:sp>
+        <p:nvSpPr>
+          <p:cNvPr id="309" name="PlaceHolder 1"/>
+          <p:cNvSpPr>
+            <a:spLocks noGrp="1"/>
+          </p:cNvSpPr>
+          <p:nvPr>
+            <p:ph type="sldImg"/>
+          </p:nvPr>
+        </p:nvSpPr>
+        <p:spPr>
+          <a:xfrm>
+            <a:off x="685800" y="1143000"/>
+            <a:ext cx="5484960" cy="3084840"/>
+          </a:xfrm>
+          <a:prstGeom prst="rect">
+            <a:avLst/>
+          </a:prstGeom>
+          <a:ln w="0">
+            <a:noFill/>
+          </a:ln>
+        </p:spPr>
+      </p:sp>
+      <p:sp>
+        <p:nvSpPr>
+          <p:cNvPr id="310" name="PlaceHolder 2"/>
+          <p:cNvSpPr>
+            <a:spLocks noGrp="1"/>
+          </p:cNvSpPr>
+          <p:nvPr>
+            <p:ph type="body"/>
+          </p:nvPr>
+        </p:nvSpPr>
+        <p:spPr>
+          <a:xfrm>
+            <a:off x="685800" y="4400640"/>
+            <a:ext cx="5484960" cy="3598920"/>
+          </a:xfrm>
+          <a:prstGeom prst="rect">
+            <a:avLst/>
+          </a:prstGeom>
+          <a:noFill/>
+          <a:ln w="0">
+            <a:noFill/>
+          </a:ln>
+        </p:spPr>
+        <p:txBody>
+          <a:bodyPr lIns="91440" tIns="45720" rIns="91440" bIns="45720" anchor="t">
+            <a:noAutofit/>
+          </a:bodyPr>
+          <a:p>
+            <a:pPr indent="0" algn="l">
+              <a:buNone/>
+            </a:pPr>
+            <a:endParaRPr lang="en-US" sz="1800" b="0" u="none" strike="noStrike">
+              <a:solidFill>
+                <a:srgbClr val="000000"/>
+              </a:solidFill>
+              <a:effectLst/>
+              <a:uFillTx/>
+              <a:latin typeface="Arial"/>
+            </a:endParaRPr>
+          </a:p>
+        </p:txBody>
+      </p:sp>
+      <p:sp>
+        <p:nvSpPr>
+          <p:cNvPr id="311" name="PlaceHolder 3"/>
+          <p:cNvSpPr>
+            <a:spLocks noGrp="1"/>
+          </p:cNvSpPr>
+          <p:nvPr>
+            <p:ph type="sldNum" idx="13"/>
+          </p:nvPr>
+        </p:nvSpPr>
+        <p:spPr>
+          <a:xfrm>
+            <a:off x="3884760" y="8685360"/>
+            <a:ext cx="2970360" cy="457200"/>
+          </a:xfrm>
+          <a:prstGeom prst="rect">
+            <a:avLst/>
+          </a:prstGeom>
+          <a:noFill/>
+          <a:ln w="0">
+            <a:noFill/>
+          </a:ln>
+        </p:spPr>
+        <p:txBody>
+          <a:bodyPr lIns="91440" tIns="45720" rIns="91440" bIns="45720" anchor="b">
+            <a:noAutofit/>
+          </a:bodyPr>
+          <a:lstStyle>
+            <a:lvl1pPr indent="0" algn="r" defTabSz="914400">
+              <a:lnSpc>
+                <a:spcPct val="100000"/>
+              </a:lnSpc>
+              <a:buNone/>
+              <a:tabLst>
+                <a:tab pos="0" algn="l"/>
+              </a:tabLst>
+              <a:defRPr lang="en-US" sz="1200" b="0" u="none" strike="noStrike">
+                <a:solidFill>
+                  <a:schemeClr val="dk1"/>
+                </a:solidFill>
+                <a:effectLst/>
+                <a:uFillTx/>
+                <a:latin typeface="IBM Plex Sans"/>
+                <a:ea typeface="+mn-ea"/>
+              </a:defRPr>
+            </a:lvl1pPr>
+          </a:lstStyle>
+          <a:p>
+            <a:pPr indent="0" algn="r" defTabSz="914400">
+              <a:lnSpc>
+                <a:spcPct val="100000"/>
+              </a:lnSpc>
+              <a:buNone/>
+              <a:tabLst>
+                <a:tab pos="0" algn="l"/>
+              </a:tabLst>
+            </a:pPr>
+            <a:fld id="{8B0FFFBA-CE4A-423A-A618-AB8F90457E58}" type="slidenum">
+              <a:rPr lang="en-US" sz="1200" b="0" u="none" strike="noStrike">
+                <a:solidFill>
+                  <a:schemeClr val="dk1"/>
+                </a:solidFill>
+                <a:effectLst/>
+                <a:uFillTx/>
+                <a:latin typeface="IBM Plex Sans"/>
+                <a:ea typeface="+mn-ea"/>
+              </a:rPr>
+              <a:t>&lt;number&gt;</a:t>
             </a:fld>
             <a:endParaRPr lang="en-US" sz="1200" b="0" u="none" strike="noStrike">
               <a:solidFill>
@@ -586,7 +754,7 @@
       </p:grpSpPr>
       <p:sp>
         <p:nvSpPr>
-          <p:cNvPr id="264" name="PlaceHolder 1"/>
+          <p:cNvPr id="285" name="PlaceHolder 1"/>
           <p:cNvSpPr>
             <a:spLocks noGrp="1"/>
           </p:cNvSpPr>
@@ -597,7 +765,7 @@
         <p:spPr>
           <a:xfrm>
             <a:off x="685800" y="1143000"/>
-            <a:ext cx="5486040" cy="3085920"/>
+            <a:ext cx="5485680" cy="3085560"/>
           </a:xfrm>
           <a:prstGeom prst="rect">
             <a:avLst/>
@@ -609,7 +777,7 @@
       </p:sp>
       <p:sp>
         <p:nvSpPr>
-          <p:cNvPr id="265" name="PlaceHolder 2"/>
+          <p:cNvPr id="286" name="PlaceHolder 2"/>
           <p:cNvSpPr>
             <a:spLocks noGrp="1"/>
           </p:cNvSpPr>
@@ -620,7 +788,7 @@
         <p:spPr>
           <a:xfrm>
             <a:off x="685800" y="4400640"/>
-            <a:ext cx="5485320" cy="3599280"/>
+            <a:ext cx="5484960" cy="3598920"/>
           </a:xfrm>
           <a:prstGeom prst="rect">
             <a:avLst/>
@@ -651,7 +819,7 @@
       </p:sp>
       <p:sp>
         <p:nvSpPr>
-          <p:cNvPr id="266" name="PlaceHolder 3"/>
+          <p:cNvPr id="287" name="PlaceHolder 3"/>
           <p:cNvSpPr>
             <a:spLocks noGrp="1"/>
           </p:cNvSpPr>
@@ -662,7 +830,7 @@
         <p:spPr>
           <a:xfrm>
             <a:off x="3884760" y="8685360"/>
-            <a:ext cx="2970720" cy="457560"/>
+            <a:ext cx="2970360" cy="457200"/>
           </a:xfrm>
           <a:prstGeom prst="rect">
             <a:avLst/>
@@ -706,7 +874,7 @@
                 <a:tab pos="0" algn="l"/>
               </a:tabLst>
             </a:pPr>
-            <a:fld id="{4C19BDE0-AD8A-4C6E-9E83-A470697F9861}" type="slidenum">
+            <a:fld id="{39672724-A632-4769-955F-A8F6D50BB8BA}" type="slidenum">
               <a:rPr lang="en-US" sz="1200" b="0" u="none" strike="noStrike">
                 <a:solidFill>
                   <a:schemeClr val="dk1"/>
@@ -716,7 +884,7 @@
                 <a:latin typeface="IBM Plex Sans"/>
                 <a:ea typeface="+mn-ea"/>
               </a:rPr>
-              <a:t>9</a:t>
+              <a:t>10</a:t>
             </a:fld>
             <a:endParaRPr lang="en-US" sz="1200" b="0" u="none" strike="noStrike">
               <a:solidFill>
@@ -753,7 +921,7 @@
       </p:grpSpPr>
       <p:sp>
         <p:nvSpPr>
-          <p:cNvPr id="267" name="PlaceHolder 1"/>
+          <p:cNvPr id="288" name="PlaceHolder 1"/>
           <p:cNvSpPr>
             <a:spLocks noGrp="1"/>
           </p:cNvSpPr>
@@ -764,7 +932,7 @@
         <p:spPr>
           <a:xfrm>
             <a:off x="685800" y="1143000"/>
-            <a:ext cx="5486040" cy="3085920"/>
+            <a:ext cx="5485680" cy="3085560"/>
           </a:xfrm>
           <a:prstGeom prst="rect">
             <a:avLst/>
@@ -776,7 +944,7 @@
       </p:sp>
       <p:sp>
         <p:nvSpPr>
-          <p:cNvPr id="268" name="PlaceHolder 2"/>
+          <p:cNvPr id="289" name="PlaceHolder 2"/>
           <p:cNvSpPr>
             <a:spLocks noGrp="1"/>
           </p:cNvSpPr>
@@ -787,7 +955,7 @@
         <p:spPr>
           <a:xfrm>
             <a:off x="685800" y="4400640"/>
-            <a:ext cx="5485320" cy="3599280"/>
+            <a:ext cx="5484960" cy="3598920"/>
           </a:xfrm>
           <a:prstGeom prst="rect">
             <a:avLst/>
@@ -818,7 +986,7 @@
       </p:sp>
       <p:sp>
         <p:nvSpPr>
-          <p:cNvPr id="269" name="PlaceHolder 3"/>
+          <p:cNvPr id="290" name="PlaceHolder 3"/>
           <p:cNvSpPr>
             <a:spLocks noGrp="1"/>
           </p:cNvSpPr>
@@ -829,7 +997,7 @@
         <p:spPr>
           <a:xfrm>
             <a:off x="3884760" y="8685360"/>
-            <a:ext cx="2970720" cy="457560"/>
+            <a:ext cx="2970360" cy="457200"/>
           </a:xfrm>
           <a:prstGeom prst="rect">
             <a:avLst/>
@@ -873,7 +1041,7 @@
                 <a:tab pos="0" algn="l"/>
               </a:tabLst>
             </a:pPr>
-            <a:fld id="{F1F83DF6-387D-4CC7-AE8F-1513DA2F19D1}" type="slidenum">
+            <a:fld id="{95A163FF-9A07-49BE-8D1A-BE030606DDB8}" type="slidenum">
               <a:rPr lang="en-US" sz="1200" b="0" u="none" strike="noStrike">
                 <a:solidFill>
                   <a:schemeClr val="dk1"/>
@@ -883,7 +1051,7 @@
                 <a:latin typeface="IBM Plex Sans"/>
                 <a:ea typeface="+mn-ea"/>
               </a:rPr>
-              <a:t>9</a:t>
+              <a:t>10</a:t>
             </a:fld>
             <a:endParaRPr lang="en-US" sz="1200" b="0" u="none" strike="noStrike">
               <a:solidFill>
@@ -920,7 +1088,7 @@
       </p:grpSpPr>
       <p:sp>
         <p:nvSpPr>
-          <p:cNvPr id="270" name="PlaceHolder 1"/>
+          <p:cNvPr id="291" name="PlaceHolder 1"/>
           <p:cNvSpPr>
             <a:spLocks noGrp="1"/>
           </p:cNvSpPr>
@@ -931,7 +1099,7 @@
         <p:spPr>
           <a:xfrm>
             <a:off x="685800" y="1143000"/>
-            <a:ext cx="5486040" cy="3085920"/>
+            <a:ext cx="5485680" cy="3085560"/>
           </a:xfrm>
           <a:prstGeom prst="rect">
             <a:avLst/>
@@ -943,7 +1111,7 @@
       </p:sp>
       <p:sp>
         <p:nvSpPr>
-          <p:cNvPr id="271" name="PlaceHolder 2"/>
+          <p:cNvPr id="292" name="PlaceHolder 2"/>
           <p:cNvSpPr>
             <a:spLocks noGrp="1"/>
           </p:cNvSpPr>
@@ -954,7 +1122,7 @@
         <p:spPr>
           <a:xfrm>
             <a:off x="685800" y="4400640"/>
-            <a:ext cx="5485320" cy="3599280"/>
+            <a:ext cx="5484960" cy="3598920"/>
           </a:xfrm>
           <a:prstGeom prst="rect">
             <a:avLst/>
@@ -985,7 +1153,7 @@
       </p:sp>
       <p:sp>
         <p:nvSpPr>
-          <p:cNvPr id="272" name="PlaceHolder 3"/>
+          <p:cNvPr id="293" name="PlaceHolder 3"/>
           <p:cNvSpPr>
             <a:spLocks noGrp="1"/>
           </p:cNvSpPr>
@@ -996,7 +1164,7 @@
         <p:spPr>
           <a:xfrm>
             <a:off x="3884760" y="8685360"/>
-            <a:ext cx="2970720" cy="457560"/>
+            <a:ext cx="2970360" cy="457200"/>
           </a:xfrm>
           <a:prstGeom prst="rect">
             <a:avLst/>
@@ -1040,7 +1208,7 @@
                 <a:tab pos="0" algn="l"/>
               </a:tabLst>
             </a:pPr>
-            <a:fld id="{DC76E58E-EC50-40C4-92A1-A60D2FF844BF}" type="slidenum">
+            <a:fld id="{E71C6485-EFAE-4F9C-A939-3693565DA5C6}" type="slidenum">
               <a:rPr lang="en-US" sz="1200" b="0" u="none" strike="noStrike">
                 <a:solidFill>
                   <a:schemeClr val="dk1"/>
@@ -1050,7 +1218,7 @@
                 <a:latin typeface="IBM Plex Sans"/>
                 <a:ea typeface="+mn-ea"/>
               </a:rPr>
-              <a:t>&lt;number&gt;</a:t>
+              <a:t>10</a:t>
             </a:fld>
             <a:endParaRPr lang="en-US" sz="1200" b="0" u="none" strike="noStrike">
               <a:solidFill>
@@ -1087,7 +1255,7 @@
       </p:grpSpPr>
       <p:sp>
         <p:nvSpPr>
-          <p:cNvPr id="273" name="PlaceHolder 1"/>
+          <p:cNvPr id="294" name="PlaceHolder 1"/>
           <p:cNvSpPr>
             <a:spLocks noGrp="1"/>
           </p:cNvSpPr>
@@ -1098,7 +1266,7 @@
         <p:spPr>
           <a:xfrm>
             <a:off x="685800" y="1143000"/>
-            <a:ext cx="5486040" cy="3085920"/>
+            <a:ext cx="5485680" cy="3085560"/>
           </a:xfrm>
           <a:prstGeom prst="rect">
             <a:avLst/>
@@ -1110,7 +1278,7 @@
       </p:sp>
       <p:sp>
         <p:nvSpPr>
-          <p:cNvPr id="274" name="PlaceHolder 2"/>
+          <p:cNvPr id="295" name="PlaceHolder 2"/>
           <p:cNvSpPr>
             <a:spLocks noGrp="1"/>
           </p:cNvSpPr>
@@ -1121,7 +1289,7 @@
         <p:spPr>
           <a:xfrm>
             <a:off x="685800" y="4400640"/>
-            <a:ext cx="5485320" cy="3599280"/>
+            <a:ext cx="5484960" cy="3598920"/>
           </a:xfrm>
           <a:prstGeom prst="rect">
             <a:avLst/>
@@ -1152,7 +1320,7 @@
       </p:sp>
       <p:sp>
         <p:nvSpPr>
-          <p:cNvPr id="275" name="PlaceHolder 3"/>
+          <p:cNvPr id="296" name="PlaceHolder 3"/>
           <p:cNvSpPr>
             <a:spLocks noGrp="1"/>
           </p:cNvSpPr>
@@ -1163,7 +1331,7 @@
         <p:spPr>
           <a:xfrm>
             <a:off x="3884760" y="8685360"/>
-            <a:ext cx="2970720" cy="457560"/>
+            <a:ext cx="2970360" cy="457200"/>
           </a:xfrm>
           <a:prstGeom prst="rect">
             <a:avLst/>
@@ -1207,7 +1375,7 @@
                 <a:tab pos="0" algn="l"/>
               </a:tabLst>
             </a:pPr>
-            <a:fld id="{6AA0E891-7CF8-4201-8359-517D89366639}" type="slidenum">
+            <a:fld id="{5764FBD9-45DC-486D-8010-A7B660CCAAFD}" type="slidenum">
               <a:rPr lang="en-US" sz="1200" b="0" u="none" strike="noStrike">
                 <a:solidFill>
                   <a:schemeClr val="dk1"/>
@@ -1217,7 +1385,7 @@
                 <a:latin typeface="IBM Plex Sans"/>
                 <a:ea typeface="+mn-ea"/>
               </a:rPr>
-              <a:t>&lt;number&gt;</a:t>
+              <a:t>10</a:t>
             </a:fld>
             <a:endParaRPr lang="en-US" sz="1200" b="0" u="none" strike="noStrike">
               <a:solidFill>
@@ -1254,7 +1422,7 @@
       </p:grpSpPr>
       <p:sp>
         <p:nvSpPr>
-          <p:cNvPr id="276" name="PlaceHolder 1"/>
+          <p:cNvPr id="297" name="PlaceHolder 1"/>
           <p:cNvSpPr>
             <a:spLocks noGrp="1"/>
           </p:cNvSpPr>
@@ -1265,7 +1433,7 @@
         <p:spPr>
           <a:xfrm>
             <a:off x="685800" y="1143000"/>
-            <a:ext cx="5485320" cy="3085200"/>
+            <a:ext cx="5485680" cy="3085560"/>
           </a:xfrm>
           <a:prstGeom prst="rect">
             <a:avLst/>
@@ -1277,7 +1445,7 @@
       </p:sp>
       <p:sp>
         <p:nvSpPr>
-          <p:cNvPr id="277" name="PlaceHolder 2"/>
+          <p:cNvPr id="298" name="PlaceHolder 2"/>
           <p:cNvSpPr>
             <a:spLocks noGrp="1"/>
           </p:cNvSpPr>
@@ -1288,7 +1456,7 @@
         <p:spPr>
           <a:xfrm>
             <a:off x="685800" y="4400640"/>
-            <a:ext cx="5485320" cy="3599280"/>
+            <a:ext cx="5484960" cy="3598920"/>
           </a:xfrm>
           <a:prstGeom prst="rect">
             <a:avLst/>
@@ -1304,26 +1472,9 @@
           </a:bodyPr>
           <a:p>
             <a:pPr indent="0" algn="l">
-              <a:lnSpc>
-                <a:spcPct val="100000"/>
-              </a:lnSpc>
               <a:buNone/>
-              <a:tabLst>
-                <a:tab pos="0" algn="l"/>
-              </a:tabLst>
             </a:pPr>
-            <a:r>
-              <a:rPr lang="en-US" sz="2000" b="0" u="none" strike="noStrike">
-                <a:solidFill>
-                  <a:srgbClr val="000000"/>
-                </a:solidFill>
-                <a:effectLst/>
-                <a:uFillTx/>
-                <a:latin typeface="Arial"/>
-              </a:rPr>
-              <a:t>In case of the demo gods striking me down</a:t>
-            </a:r>
-            <a:endParaRPr lang="en-US" sz="2000" b="0" u="none" strike="noStrike">
+            <a:endParaRPr lang="en-US" sz="1800" b="0" u="none" strike="noStrike">
               <a:solidFill>
                 <a:srgbClr val="000000"/>
               </a:solidFill>
@@ -1336,7 +1487,7 @@
       </p:sp>
       <p:sp>
         <p:nvSpPr>
-          <p:cNvPr id="278" name="PlaceHolder 3"/>
+          <p:cNvPr id="299" name="PlaceHolder 3"/>
           <p:cNvSpPr>
             <a:spLocks noGrp="1"/>
           </p:cNvSpPr>
@@ -1347,7 +1498,7 @@
         <p:spPr>
           <a:xfrm>
             <a:off x="3884760" y="8685360"/>
-            <a:ext cx="2970720" cy="457560"/>
+            <a:ext cx="2970360" cy="457200"/>
           </a:xfrm>
           <a:prstGeom prst="rect">
             <a:avLst/>
@@ -1391,7 +1542,7 @@
                 <a:tab pos="0" algn="l"/>
               </a:tabLst>
             </a:pPr>
-            <a:fld id="{4D2FB848-5814-4F3E-AADA-9E2DC6E85C3C}" type="slidenum">
+            <a:fld id="{D3119376-3E34-4882-A1C4-33D488D01573}" type="slidenum">
               <a:rPr lang="en-US" sz="1200" b="0" u="none" strike="noStrike">
                 <a:solidFill>
                   <a:schemeClr val="dk1"/>
@@ -1401,7 +1552,7 @@
                 <a:latin typeface="IBM Plex Sans"/>
                 <a:ea typeface="+mn-ea"/>
               </a:rPr>
-              <a:t>&lt;number&gt;</a:t>
+              <a:t>10</a:t>
             </a:fld>
             <a:endParaRPr lang="en-US" sz="1200" b="0" u="none" strike="noStrike">
               <a:solidFill>
@@ -1438,7 +1589,7 @@
       </p:grpSpPr>
       <p:sp>
         <p:nvSpPr>
-          <p:cNvPr id="279" name="PlaceHolder 1"/>
+          <p:cNvPr id="300" name="PlaceHolder 1"/>
           <p:cNvSpPr>
             <a:spLocks noGrp="1"/>
           </p:cNvSpPr>
@@ -1449,7 +1600,7 @@
         <p:spPr>
           <a:xfrm>
             <a:off x="685800" y="1143000"/>
-            <a:ext cx="5486040" cy="3085920"/>
+            <a:ext cx="5484960" cy="3084840"/>
           </a:xfrm>
           <a:prstGeom prst="rect">
             <a:avLst/>
@@ -1461,7 +1612,7 @@
       </p:sp>
       <p:sp>
         <p:nvSpPr>
-          <p:cNvPr id="280" name="PlaceHolder 2"/>
+          <p:cNvPr id="301" name="PlaceHolder 2"/>
           <p:cNvSpPr>
             <a:spLocks noGrp="1"/>
           </p:cNvSpPr>
@@ -1472,7 +1623,7 @@
         <p:spPr>
           <a:xfrm>
             <a:off x="685800" y="4400640"/>
-            <a:ext cx="5485320" cy="3599280"/>
+            <a:ext cx="5484960" cy="3598920"/>
           </a:xfrm>
           <a:prstGeom prst="rect">
             <a:avLst/>
@@ -1488,9 +1639,26 @@
           </a:bodyPr>
           <a:p>
             <a:pPr indent="0" algn="l">
+              <a:lnSpc>
+                <a:spcPct val="100000"/>
+              </a:lnSpc>
               <a:buNone/>
+              <a:tabLst>
+                <a:tab pos="0" algn="l"/>
+              </a:tabLst>
             </a:pPr>
-            <a:endParaRPr lang="en-US" sz="1800" b="0" u="none" strike="noStrike">
+            <a:r>
+              <a:rPr lang="en-US" sz="2000" b="0" u="none" strike="noStrike">
+                <a:solidFill>
+                  <a:srgbClr val="000000"/>
+                </a:solidFill>
+                <a:effectLst/>
+                <a:uFillTx/>
+                <a:latin typeface="Arial"/>
+              </a:rPr>
+              <a:t>In case of the demo gods striking me down</a:t>
+            </a:r>
+            <a:endParaRPr lang="en-US" sz="2000" b="0" u="none" strike="noStrike">
               <a:solidFill>
                 <a:srgbClr val="000000"/>
               </a:solidFill>
@@ -1503,7 +1671,7 @@
       </p:sp>
       <p:sp>
         <p:nvSpPr>
-          <p:cNvPr id="281" name="PlaceHolder 3"/>
+          <p:cNvPr id="302" name="PlaceHolder 3"/>
           <p:cNvSpPr>
             <a:spLocks noGrp="1"/>
           </p:cNvSpPr>
@@ -1514,7 +1682,7 @@
         <p:spPr>
           <a:xfrm>
             <a:off x="3884760" y="8685360"/>
-            <a:ext cx="2970720" cy="457560"/>
+            <a:ext cx="2970360" cy="457200"/>
           </a:xfrm>
           <a:prstGeom prst="rect">
             <a:avLst/>
@@ -1558,7 +1726,7 @@
                 <a:tab pos="0" algn="l"/>
               </a:tabLst>
             </a:pPr>
-            <a:fld id="{3D1F07DF-021E-479A-AA1A-3A45059031B2}" type="slidenum">
+            <a:fld id="{A3378DCD-D6AC-4D1E-98BE-72AB7977E02C}" type="slidenum">
               <a:rPr lang="en-US" sz="1200" b="0" u="none" strike="noStrike">
                 <a:solidFill>
                   <a:schemeClr val="dk1"/>
@@ -1568,7 +1736,7 @@
                 <a:latin typeface="IBM Plex Sans"/>
                 <a:ea typeface="+mn-ea"/>
               </a:rPr>
-              <a:t>&lt;number&gt;</a:t>
+              <a:t>10</a:t>
             </a:fld>
             <a:endParaRPr lang="en-US" sz="1200" b="0" u="none" strike="noStrike">
               <a:solidFill>
@@ -1605,7 +1773,7 @@
       </p:grpSpPr>
       <p:sp>
         <p:nvSpPr>
-          <p:cNvPr id="282" name="PlaceHolder 1"/>
+          <p:cNvPr id="303" name="PlaceHolder 1"/>
           <p:cNvSpPr>
             <a:spLocks noGrp="1"/>
           </p:cNvSpPr>
@@ -1616,7 +1784,7 @@
         <p:spPr>
           <a:xfrm>
             <a:off x="685800" y="1143000"/>
-            <a:ext cx="5486040" cy="3085920"/>
+            <a:ext cx="5485680" cy="3085560"/>
           </a:xfrm>
           <a:prstGeom prst="rect">
             <a:avLst/>
@@ -1628,7 +1796,7 @@
       </p:sp>
       <p:sp>
         <p:nvSpPr>
-          <p:cNvPr id="283" name="PlaceHolder 2"/>
+          <p:cNvPr id="304" name="PlaceHolder 2"/>
           <p:cNvSpPr>
             <a:spLocks noGrp="1"/>
           </p:cNvSpPr>
@@ -1639,7 +1807,7 @@
         <p:spPr>
           <a:xfrm>
             <a:off x="685800" y="4400640"/>
-            <a:ext cx="5485320" cy="3599280"/>
+            <a:ext cx="5484960" cy="3598920"/>
           </a:xfrm>
           <a:prstGeom prst="rect">
             <a:avLst/>
@@ -1670,7 +1838,7 @@
       </p:sp>
       <p:sp>
         <p:nvSpPr>
-          <p:cNvPr id="284" name="PlaceHolder 3"/>
+          <p:cNvPr id="305" name="PlaceHolder 3"/>
           <p:cNvSpPr>
             <a:spLocks noGrp="1"/>
           </p:cNvSpPr>
@@ -1681,7 +1849,7 @@
         <p:spPr>
           <a:xfrm>
             <a:off x="3884760" y="8685360"/>
-            <a:ext cx="2970720" cy="457560"/>
+            <a:ext cx="2970360" cy="457200"/>
           </a:xfrm>
           <a:prstGeom prst="rect">
             <a:avLst/>
@@ -1725,7 +1893,7 @@
                 <a:tab pos="0" algn="l"/>
               </a:tabLst>
             </a:pPr>
-            <a:fld id="{AA781654-CF05-4886-B4B9-4CF6CBBD4F31}" type="slidenum">
+            <a:fld id="{994DE0CE-112F-4D66-8522-8511C31699ED}" type="slidenum">
               <a:rPr lang="en-US" sz="1200" b="0" u="none" strike="noStrike">
                 <a:solidFill>
                   <a:schemeClr val="dk1"/>
@@ -1735,7 +1903,7 @@
                 <a:latin typeface="IBM Plex Sans"/>
                 <a:ea typeface="+mn-ea"/>
               </a:rPr>
-              <a:t>&lt;number&gt;</a:t>
+              <a:t>10</a:t>
             </a:fld>
             <a:endParaRPr lang="en-US" sz="1200" b="0" u="none" strike="noStrike">
               <a:solidFill>
@@ -1772,7 +1940,7 @@
       </p:grpSpPr>
       <p:sp>
         <p:nvSpPr>
-          <p:cNvPr id="285" name="PlaceHolder 1"/>
+          <p:cNvPr id="306" name="PlaceHolder 1"/>
           <p:cNvSpPr>
             <a:spLocks noGrp="1"/>
           </p:cNvSpPr>
@@ -1783,7 +1951,7 @@
         <p:spPr>
           <a:xfrm>
             <a:off x="685800" y="1143000"/>
-            <a:ext cx="5485320" cy="3085200"/>
+            <a:ext cx="5485680" cy="3085560"/>
           </a:xfrm>
           <a:prstGeom prst="rect">
             <a:avLst/>
@@ -1795,7 +1963,7 @@
       </p:sp>
       <p:sp>
         <p:nvSpPr>
-          <p:cNvPr id="286" name="PlaceHolder 2"/>
+          <p:cNvPr id="307" name="PlaceHolder 2"/>
           <p:cNvSpPr>
             <a:spLocks noGrp="1"/>
           </p:cNvSpPr>
@@ -1806,7 +1974,7 @@
         <p:spPr>
           <a:xfrm>
             <a:off x="685800" y="4400640"/>
-            <a:ext cx="5485320" cy="3599280"/>
+            <a:ext cx="5484960" cy="3598920"/>
           </a:xfrm>
           <a:prstGeom prst="rect">
             <a:avLst/>
@@ -1837,7 +2005,7 @@
       </p:sp>
       <p:sp>
         <p:nvSpPr>
-          <p:cNvPr id="287" name="PlaceHolder 3"/>
+          <p:cNvPr id="308" name="PlaceHolder 3"/>
           <p:cNvSpPr>
             <a:spLocks noGrp="1"/>
           </p:cNvSpPr>
@@ -1848,7 +2016,7 @@
         <p:spPr>
           <a:xfrm>
             <a:off x="3884760" y="8685360"/>
-            <a:ext cx="2970720" cy="457560"/>
+            <a:ext cx="2970360" cy="457200"/>
           </a:xfrm>
           <a:prstGeom prst="rect">
             <a:avLst/>
@@ -1892,7 +2060,7 @@
                 <a:tab pos="0" algn="l"/>
               </a:tabLst>
             </a:pPr>
-            <a:fld id="{1A6360EA-95E7-46EF-B5D7-54F0DEE50756}" type="slidenum">
+            <a:fld id="{02A69785-1B4E-479A-9305-5387E5BF3CBF}" type="slidenum">
               <a:rPr lang="en-US" sz="1200" b="0" u="none" strike="noStrike">
                 <a:solidFill>
                   <a:schemeClr val="dk1"/>
@@ -1902,7 +2070,7 @@
                 <a:latin typeface="IBM Plex Sans"/>
                 <a:ea typeface="+mn-ea"/>
               </a:rPr>
-              <a:t>&lt;number&gt;</a:t>
+              <a:t>10</a:t>
             </a:fld>
             <a:endParaRPr lang="en-US" sz="1200" b="0" u="none" strike="noStrike">
               <a:solidFill>
@@ -1986,7 +2154,7 @@
         <p:spPr>
           <a:xfrm>
             <a:off x="609480" y="273600"/>
-            <a:ext cx="10971720" cy="1144080"/>
+            <a:ext cx="10971360" cy="1143720"/>
           </a:xfrm>
           <a:prstGeom prst="rect">
             <a:avLst/>
@@ -2064,7 +2232,7 @@
         <p:spPr>
           <a:xfrm>
             <a:off x="609480" y="1604520"/>
-            <a:ext cx="10971720" cy="3976560"/>
+            <a:ext cx="10971360" cy="3976200"/>
           </a:xfrm>
           <a:prstGeom prst="rect">
             <a:avLst/>
@@ -2550,7 +2718,7 @@
         <p:spPr>
           <a:xfrm>
             <a:off x="0" y="0"/>
-            <a:ext cx="12191040" cy="6856920"/>
+            <a:ext cx="12190680" cy="6856560"/>
           </a:xfrm>
           <a:prstGeom prst="rect">
             <a:avLst/>
@@ -2570,7 +2738,7 @@
         <p:spPr>
           <a:xfrm>
             <a:off x="0" y="0"/>
-            <a:ext cx="5607360" cy="6856920"/>
+            <a:ext cx="5607000" cy="6856560"/>
           </a:xfrm>
           <a:prstGeom prst="rect">
             <a:avLst/>
@@ -2619,7 +2787,7 @@
         <p:spPr>
           <a:xfrm>
             <a:off x="411480" y="3291840"/>
-            <a:ext cx="2934360" cy="485640"/>
+            <a:ext cx="3037680" cy="485640"/>
           </a:xfrm>
           <a:prstGeom prst="rect">
             <a:avLst/>
@@ -2687,7 +2855,7 @@
         <p:spPr>
           <a:xfrm>
             <a:off x="411480" y="3776760"/>
-            <a:ext cx="4206600" cy="303120"/>
+            <a:ext cx="4206240" cy="303120"/>
           </a:xfrm>
           <a:prstGeom prst="rect">
             <a:avLst/>
@@ -2801,7 +2969,7 @@
         <p:spPr>
           <a:xfrm>
             <a:off x="457560" y="4114440"/>
-            <a:ext cx="2284920" cy="11520"/>
+            <a:ext cx="2284560" cy="11160"/>
           </a:xfrm>
           <a:prstGeom prst="rect">
             <a:avLst/>
@@ -2837,6 +3005,1189 @@
               <a:effectLst/>
               <a:uFillTx/>
               <a:latin typeface="IBM Plex Sans"/>
+            </a:endParaRPr>
+          </a:p>
+        </p:txBody>
+      </p:sp>
+    </p:spTree>
+  </p:cSld>
+  <mc:AlternateContent>
+    <mc:Choice Requires="p14">
+      <p:transition spd="slow" p14:dur="2000"/>
+    </mc:Choice>
+    <mc:Fallback>
+      <p:transition spd="slow"/>
+    </mc:Fallback>
+  </mc:AlternateContent>
+</p:sld>
+</file>
+
+<file path=ppt/slides/slide10.xml><?xml version="1.0" encoding="utf-8"?>
+<p:sld xmlns:a="http://schemas.openxmlformats.org/drawingml/2006/main" xmlns:p="http://schemas.openxmlformats.org/presentationml/2006/main" xmlns:r="http://schemas.openxmlformats.org/officeDocument/2006/relationships" xmlns:p14="http://schemas.microsoft.com/office/powerpoint/2010/main" xmlns:p15="http://schemas.microsoft.com/office/powerpoint/2012/main" xmlns:mc="http://schemas.openxmlformats.org/markup-compatibility/2006" show="0">
+  <p:cSld>
+    <p:bg>
+      <p:bgPr>
+        <a:solidFill>
+          <a:srgbClr val="050505"/>
+        </a:solidFill>
+      </p:bgPr>
+    </p:bg>
+    <p:spTree>
+      <p:nvGrpSpPr>
+        <p:cNvPr id="1" name=""/>
+        <p:cNvGrpSpPr/>
+        <p:nvPr/>
+      </p:nvGrpSpPr>
+      <p:grpSpPr>
+        <a:xfrm>
+          <a:off x="0" y="0"/>
+          <a:ext cx="0" cy="0"/>
+          <a:chOff x="0" y="0"/>
+          <a:chExt cx="0" cy="0"/>
+        </a:xfrm>
+      </p:grpSpPr>
+      <p:sp>
+        <p:nvSpPr>
+          <p:cNvPr id="258" name="Shape 19"/>
+          <p:cNvSpPr/>
+          <p:nvPr/>
+        </p:nvSpPr>
+        <p:spPr>
+          <a:xfrm>
+            <a:off x="0" y="-11160"/>
+            <a:ext cx="12190320" cy="6856560"/>
+          </a:xfrm>
+          <a:prstGeom prst="rect">
+            <a:avLst/>
+          </a:prstGeom>
+          <a:solidFill>
+            <a:srgbClr val="050505"/>
+          </a:solidFill>
+          <a:ln w="12700">
+            <a:solidFill>
+              <a:srgbClr val="050505">
+                <a:alpha val="0"/>
+              </a:srgbClr>
+            </a:solidFill>
+            <a:round/>
+          </a:ln>
+        </p:spPr>
+        <p:style>
+          <a:lnRef idx="0"/>
+          <a:fillRef idx="0"/>
+          <a:effectRef idx="0"/>
+          <a:fontRef idx="minor"/>
+        </p:style>
+        <p:txBody>
+          <a:bodyPr lIns="90000" tIns="45000" rIns="90000" bIns="45000" anchor="t">
+            <a:noAutofit/>
+          </a:bodyPr>
+          <a:p>
+            <a:endParaRPr lang="en-US" sz="1800" b="0" u="none" strike="noStrike">
+              <a:solidFill>
+                <a:srgbClr val="FFFFFF"/>
+              </a:solidFill>
+              <a:effectLst/>
+              <a:uFillTx/>
+              <a:latin typeface="Arial"/>
+            </a:endParaRPr>
+          </a:p>
+        </p:txBody>
+      </p:sp>
+      <p:sp>
+        <p:nvSpPr>
+          <p:cNvPr id="259" name="Shape 61"/>
+          <p:cNvSpPr/>
+          <p:nvPr/>
+        </p:nvSpPr>
+        <p:spPr>
+          <a:xfrm>
+            <a:off x="18360" y="18360"/>
+            <a:ext cx="12153600" cy="6819840"/>
+          </a:xfrm>
+          <a:prstGeom prst="rect">
+            <a:avLst/>
+          </a:prstGeom>
+          <a:noFill/>
+          <a:ln w="15240">
+            <a:solidFill>
+              <a:srgbClr val="1E2024">
+                <a:alpha val="92000"/>
+              </a:srgbClr>
+            </a:solidFill>
+            <a:round/>
+          </a:ln>
+        </p:spPr>
+        <p:style>
+          <a:lnRef idx="0"/>
+          <a:fillRef idx="0"/>
+          <a:effectRef idx="0"/>
+          <a:fontRef idx="minor"/>
+        </p:style>
+        <p:txBody>
+          <a:bodyPr lIns="90000" tIns="45000" rIns="90000" bIns="45000" anchor="t">
+            <a:noAutofit/>
+          </a:bodyPr>
+          <a:p>
+            <a:endParaRPr lang="en-US" sz="1800" b="0" u="none" strike="noStrike">
+              <a:solidFill>
+                <a:srgbClr val="FFFFFF"/>
+              </a:solidFill>
+              <a:effectLst/>
+              <a:uFillTx/>
+              <a:latin typeface="Arial"/>
+            </a:endParaRPr>
+          </a:p>
+        </p:txBody>
+      </p:sp>
+      <p:sp>
+        <p:nvSpPr>
+          <p:cNvPr id="260" name="Shape 62"/>
+          <p:cNvSpPr/>
+          <p:nvPr/>
+        </p:nvSpPr>
+        <p:spPr>
+          <a:xfrm flipH="1">
+            <a:off x="4389120" y="228600"/>
+            <a:ext cx="2926080" cy="6309360"/>
+          </a:xfrm>
+          <a:prstGeom prst="line">
+            <a:avLst/>
+          </a:prstGeom>
+          <a:ln w="6350">
+            <a:solidFill>
+              <a:srgbClr val="22262A">
+                <a:alpha val="28000"/>
+              </a:srgbClr>
+            </a:solidFill>
+            <a:round/>
+          </a:ln>
+        </p:spPr>
+        <p:style>
+          <a:lnRef idx="0"/>
+          <a:fillRef idx="0"/>
+          <a:effectRef idx="0"/>
+          <a:fontRef idx="minor"/>
+        </p:style>
+        <p:txBody>
+          <a:bodyPr lIns="90000" tIns="45000" rIns="90000" bIns="45000" anchor="t" anchorCtr="1">
+            <a:noAutofit/>
+          </a:bodyPr>
+          <a:p>
+            <a:endParaRPr lang="en-US" sz="1800" b="0" u="none" strike="noStrike">
+              <a:solidFill>
+                <a:srgbClr val="FFFFFF"/>
+              </a:solidFill>
+              <a:effectLst/>
+              <a:uFillTx/>
+              <a:latin typeface="Arial"/>
+            </a:endParaRPr>
+          </a:p>
+        </p:txBody>
+      </p:sp>
+      <p:sp>
+        <p:nvSpPr>
+          <p:cNvPr id="261" name="Shape 63"/>
+          <p:cNvSpPr/>
+          <p:nvPr/>
+        </p:nvSpPr>
+        <p:spPr>
+          <a:xfrm flipH="1">
+            <a:off x="4983480" y="228600"/>
+            <a:ext cx="2926080" cy="6309360"/>
+          </a:xfrm>
+          <a:prstGeom prst="line">
+            <a:avLst/>
+          </a:prstGeom>
+          <a:ln w="6350">
+            <a:solidFill>
+              <a:srgbClr val="22262A">
+                <a:alpha val="28000"/>
+              </a:srgbClr>
+            </a:solidFill>
+            <a:round/>
+          </a:ln>
+        </p:spPr>
+        <p:style>
+          <a:lnRef idx="0"/>
+          <a:fillRef idx="0"/>
+          <a:effectRef idx="0"/>
+          <a:fontRef idx="minor"/>
+        </p:style>
+        <p:txBody>
+          <a:bodyPr lIns="90000" tIns="45000" rIns="90000" bIns="45000" anchor="t" anchorCtr="1">
+            <a:noAutofit/>
+          </a:bodyPr>
+          <a:p>
+            <a:endParaRPr lang="en-US" sz="1800" b="0" u="none" strike="noStrike">
+              <a:solidFill>
+                <a:srgbClr val="FFFFFF"/>
+              </a:solidFill>
+              <a:effectLst/>
+              <a:uFillTx/>
+              <a:latin typeface="Arial"/>
+            </a:endParaRPr>
+          </a:p>
+        </p:txBody>
+      </p:sp>
+      <p:sp>
+        <p:nvSpPr>
+          <p:cNvPr id="262" name="Shape 64"/>
+          <p:cNvSpPr/>
+          <p:nvPr/>
+        </p:nvSpPr>
+        <p:spPr>
+          <a:xfrm flipH="1">
+            <a:off x="5577840" y="228600"/>
+            <a:ext cx="2926080" cy="6309360"/>
+          </a:xfrm>
+          <a:prstGeom prst="line">
+            <a:avLst/>
+          </a:prstGeom>
+          <a:ln w="6350">
+            <a:solidFill>
+              <a:srgbClr val="22262A">
+                <a:alpha val="28000"/>
+              </a:srgbClr>
+            </a:solidFill>
+            <a:round/>
+          </a:ln>
+        </p:spPr>
+        <p:style>
+          <a:lnRef idx="0"/>
+          <a:fillRef idx="0"/>
+          <a:effectRef idx="0"/>
+          <a:fontRef idx="minor"/>
+        </p:style>
+        <p:txBody>
+          <a:bodyPr lIns="90000" tIns="45000" rIns="90000" bIns="45000" anchor="t" anchorCtr="1">
+            <a:noAutofit/>
+          </a:bodyPr>
+          <a:p>
+            <a:endParaRPr lang="en-US" sz="1800" b="0" u="none" strike="noStrike">
+              <a:solidFill>
+                <a:srgbClr val="FFFFFF"/>
+              </a:solidFill>
+              <a:effectLst/>
+              <a:uFillTx/>
+              <a:latin typeface="Arial"/>
+            </a:endParaRPr>
+          </a:p>
+        </p:txBody>
+      </p:sp>
+      <p:sp>
+        <p:nvSpPr>
+          <p:cNvPr id="263" name="Shape 65"/>
+          <p:cNvSpPr/>
+          <p:nvPr/>
+        </p:nvSpPr>
+        <p:spPr>
+          <a:xfrm flipH="1">
+            <a:off x="6172200" y="228600"/>
+            <a:ext cx="2926080" cy="6309360"/>
+          </a:xfrm>
+          <a:prstGeom prst="line">
+            <a:avLst/>
+          </a:prstGeom>
+          <a:ln w="6350">
+            <a:solidFill>
+              <a:srgbClr val="22262A">
+                <a:alpha val="28000"/>
+              </a:srgbClr>
+            </a:solidFill>
+            <a:round/>
+          </a:ln>
+        </p:spPr>
+        <p:style>
+          <a:lnRef idx="0"/>
+          <a:fillRef idx="0"/>
+          <a:effectRef idx="0"/>
+          <a:fontRef idx="minor"/>
+        </p:style>
+        <p:txBody>
+          <a:bodyPr lIns="90000" tIns="45000" rIns="90000" bIns="45000" anchor="t" anchorCtr="1">
+            <a:noAutofit/>
+          </a:bodyPr>
+          <a:p>
+            <a:endParaRPr lang="en-US" sz="1800" b="0" u="none" strike="noStrike">
+              <a:solidFill>
+                <a:srgbClr val="FFFFFF"/>
+              </a:solidFill>
+              <a:effectLst/>
+              <a:uFillTx/>
+              <a:latin typeface="Arial"/>
+            </a:endParaRPr>
+          </a:p>
+        </p:txBody>
+      </p:sp>
+      <p:sp>
+        <p:nvSpPr>
+          <p:cNvPr id="264" name="Shape 66"/>
+          <p:cNvSpPr/>
+          <p:nvPr/>
+        </p:nvSpPr>
+        <p:spPr>
+          <a:xfrm flipH="1">
+            <a:off x="6766560" y="228600"/>
+            <a:ext cx="2926080" cy="6309360"/>
+          </a:xfrm>
+          <a:prstGeom prst="line">
+            <a:avLst/>
+          </a:prstGeom>
+          <a:ln w="6350">
+            <a:solidFill>
+              <a:srgbClr val="22262A">
+                <a:alpha val="28000"/>
+              </a:srgbClr>
+            </a:solidFill>
+            <a:round/>
+          </a:ln>
+        </p:spPr>
+        <p:style>
+          <a:lnRef idx="0"/>
+          <a:fillRef idx="0"/>
+          <a:effectRef idx="0"/>
+          <a:fontRef idx="minor"/>
+        </p:style>
+        <p:txBody>
+          <a:bodyPr lIns="90000" tIns="45000" rIns="90000" bIns="45000" anchor="t" anchorCtr="1">
+            <a:noAutofit/>
+          </a:bodyPr>
+          <a:p>
+            <a:endParaRPr lang="en-US" sz="1800" b="0" u="none" strike="noStrike">
+              <a:solidFill>
+                <a:srgbClr val="FFFFFF"/>
+              </a:solidFill>
+              <a:effectLst/>
+              <a:uFillTx/>
+              <a:latin typeface="Arial"/>
+            </a:endParaRPr>
+          </a:p>
+        </p:txBody>
+      </p:sp>
+      <p:sp>
+        <p:nvSpPr>
+          <p:cNvPr id="265" name="Shape 67"/>
+          <p:cNvSpPr/>
+          <p:nvPr/>
+        </p:nvSpPr>
+        <p:spPr>
+          <a:xfrm flipH="1">
+            <a:off x="7360920" y="228600"/>
+            <a:ext cx="2926080" cy="6309360"/>
+          </a:xfrm>
+          <a:prstGeom prst="line">
+            <a:avLst/>
+          </a:prstGeom>
+          <a:ln w="6350">
+            <a:solidFill>
+              <a:srgbClr val="22262A">
+                <a:alpha val="28000"/>
+              </a:srgbClr>
+            </a:solidFill>
+            <a:round/>
+          </a:ln>
+        </p:spPr>
+        <p:style>
+          <a:lnRef idx="0"/>
+          <a:fillRef idx="0"/>
+          <a:effectRef idx="0"/>
+          <a:fontRef idx="minor"/>
+        </p:style>
+        <p:txBody>
+          <a:bodyPr lIns="90000" tIns="45000" rIns="90000" bIns="45000" anchor="t" anchorCtr="1">
+            <a:noAutofit/>
+          </a:bodyPr>
+          <a:p>
+            <a:endParaRPr lang="en-US" sz="1800" b="0" u="none" strike="noStrike">
+              <a:solidFill>
+                <a:srgbClr val="FFFFFF"/>
+              </a:solidFill>
+              <a:effectLst/>
+              <a:uFillTx/>
+              <a:latin typeface="Arial"/>
+            </a:endParaRPr>
+          </a:p>
+        </p:txBody>
+      </p:sp>
+      <p:sp>
+        <p:nvSpPr>
+          <p:cNvPr id="266" name="Shape 68"/>
+          <p:cNvSpPr/>
+          <p:nvPr/>
+        </p:nvSpPr>
+        <p:spPr>
+          <a:xfrm flipH="1">
+            <a:off x="7955280" y="228600"/>
+            <a:ext cx="2926080" cy="6309360"/>
+          </a:xfrm>
+          <a:prstGeom prst="line">
+            <a:avLst/>
+          </a:prstGeom>
+          <a:ln w="6350">
+            <a:solidFill>
+              <a:srgbClr val="22262A">
+                <a:alpha val="28000"/>
+              </a:srgbClr>
+            </a:solidFill>
+            <a:round/>
+          </a:ln>
+        </p:spPr>
+        <p:style>
+          <a:lnRef idx="0"/>
+          <a:fillRef idx="0"/>
+          <a:effectRef idx="0"/>
+          <a:fontRef idx="minor"/>
+        </p:style>
+        <p:txBody>
+          <a:bodyPr lIns="90000" tIns="45000" rIns="90000" bIns="45000" anchor="t" anchorCtr="1">
+            <a:noAutofit/>
+          </a:bodyPr>
+          <a:p>
+            <a:endParaRPr lang="en-US" sz="1800" b="0" u="none" strike="noStrike">
+              <a:solidFill>
+                <a:srgbClr val="FFFFFF"/>
+              </a:solidFill>
+              <a:effectLst/>
+              <a:uFillTx/>
+              <a:latin typeface="Arial"/>
+            </a:endParaRPr>
+          </a:p>
+        </p:txBody>
+      </p:sp>
+      <p:sp>
+        <p:nvSpPr>
+          <p:cNvPr id="267" name="Shape 69"/>
+          <p:cNvSpPr/>
+          <p:nvPr/>
+        </p:nvSpPr>
+        <p:spPr>
+          <a:xfrm flipH="1">
+            <a:off x="8549640" y="228600"/>
+            <a:ext cx="2926080" cy="6309360"/>
+          </a:xfrm>
+          <a:prstGeom prst="line">
+            <a:avLst/>
+          </a:prstGeom>
+          <a:ln w="6350">
+            <a:solidFill>
+              <a:srgbClr val="22262A">
+                <a:alpha val="28000"/>
+              </a:srgbClr>
+            </a:solidFill>
+            <a:round/>
+          </a:ln>
+        </p:spPr>
+        <p:style>
+          <a:lnRef idx="0"/>
+          <a:fillRef idx="0"/>
+          <a:effectRef idx="0"/>
+          <a:fontRef idx="minor"/>
+        </p:style>
+        <p:txBody>
+          <a:bodyPr lIns="90000" tIns="45000" rIns="90000" bIns="45000" anchor="t" anchorCtr="1">
+            <a:noAutofit/>
+          </a:bodyPr>
+          <a:p>
+            <a:endParaRPr lang="en-US" sz="1800" b="0" u="none" strike="noStrike">
+              <a:solidFill>
+                <a:srgbClr val="FFFFFF"/>
+              </a:solidFill>
+              <a:effectLst/>
+              <a:uFillTx/>
+              <a:latin typeface="Arial"/>
+            </a:endParaRPr>
+          </a:p>
+        </p:txBody>
+      </p:sp>
+      <p:sp>
+        <p:nvSpPr>
+          <p:cNvPr id="268" name="Shape 70"/>
+          <p:cNvSpPr/>
+          <p:nvPr/>
+        </p:nvSpPr>
+        <p:spPr>
+          <a:xfrm flipH="1">
+            <a:off x="9144000" y="228600"/>
+            <a:ext cx="2926080" cy="6309360"/>
+          </a:xfrm>
+          <a:prstGeom prst="line">
+            <a:avLst/>
+          </a:prstGeom>
+          <a:ln w="6350">
+            <a:solidFill>
+              <a:srgbClr val="22262A">
+                <a:alpha val="28000"/>
+              </a:srgbClr>
+            </a:solidFill>
+            <a:round/>
+          </a:ln>
+        </p:spPr>
+        <p:style>
+          <a:lnRef idx="0"/>
+          <a:fillRef idx="0"/>
+          <a:effectRef idx="0"/>
+          <a:fontRef idx="minor"/>
+        </p:style>
+        <p:txBody>
+          <a:bodyPr lIns="90000" tIns="45000" rIns="90000" bIns="45000" anchor="t" anchorCtr="1">
+            <a:noAutofit/>
+          </a:bodyPr>
+          <a:p>
+            <a:endParaRPr lang="en-US" sz="1800" b="0" u="none" strike="noStrike">
+              <a:solidFill>
+                <a:srgbClr val="FFFFFF"/>
+              </a:solidFill>
+              <a:effectLst/>
+              <a:uFillTx/>
+              <a:latin typeface="Arial"/>
+            </a:endParaRPr>
+          </a:p>
+        </p:txBody>
+      </p:sp>
+      <p:sp>
+        <p:nvSpPr>
+          <p:cNvPr id="269" name="Shape 71"/>
+          <p:cNvSpPr/>
+          <p:nvPr/>
+        </p:nvSpPr>
+        <p:spPr>
+          <a:xfrm>
+            <a:off x="6949440" y="640080"/>
+            <a:ext cx="4937760" cy="45720"/>
+          </a:xfrm>
+          <a:prstGeom prst="line">
+            <a:avLst/>
+          </a:prstGeom>
+          <a:ln w="4445">
+            <a:solidFill>
+              <a:srgbClr val="22262A">
+                <a:alpha val="22000"/>
+              </a:srgbClr>
+            </a:solidFill>
+            <a:round/>
+          </a:ln>
+        </p:spPr>
+        <p:style>
+          <a:lnRef idx="0"/>
+          <a:fillRef idx="0"/>
+          <a:effectRef idx="0"/>
+          <a:fontRef idx="minor"/>
+        </p:style>
+        <p:txBody>
+          <a:bodyPr lIns="90000" tIns="720" rIns="90000" bIns="720" anchor="t" anchorCtr="1">
+            <a:noAutofit/>
+          </a:bodyPr>
+          <a:p>
+            <a:endParaRPr lang="en-US" sz="1800" b="0" u="none" strike="noStrike">
+              <a:solidFill>
+                <a:srgbClr val="FFFFFF"/>
+              </a:solidFill>
+              <a:effectLst/>
+              <a:uFillTx/>
+              <a:latin typeface="Arial"/>
+            </a:endParaRPr>
+          </a:p>
+        </p:txBody>
+      </p:sp>
+      <p:sp>
+        <p:nvSpPr>
+          <p:cNvPr id="270" name="Shape 72"/>
+          <p:cNvSpPr/>
+          <p:nvPr/>
+        </p:nvSpPr>
+        <p:spPr>
+          <a:xfrm>
+            <a:off x="6949440" y="1371600"/>
+            <a:ext cx="4937760" cy="45720"/>
+          </a:xfrm>
+          <a:prstGeom prst="line">
+            <a:avLst/>
+          </a:prstGeom>
+          <a:ln w="4445">
+            <a:solidFill>
+              <a:srgbClr val="22262A">
+                <a:alpha val="22000"/>
+              </a:srgbClr>
+            </a:solidFill>
+            <a:round/>
+          </a:ln>
+        </p:spPr>
+        <p:style>
+          <a:lnRef idx="0"/>
+          <a:fillRef idx="0"/>
+          <a:effectRef idx="0"/>
+          <a:fontRef idx="minor"/>
+        </p:style>
+        <p:txBody>
+          <a:bodyPr lIns="90000" tIns="720" rIns="90000" bIns="720" anchor="t" anchorCtr="1">
+            <a:noAutofit/>
+          </a:bodyPr>
+          <a:p>
+            <a:endParaRPr lang="en-US" sz="1800" b="0" u="none" strike="noStrike">
+              <a:solidFill>
+                <a:srgbClr val="FFFFFF"/>
+              </a:solidFill>
+              <a:effectLst/>
+              <a:uFillTx/>
+              <a:latin typeface="Arial"/>
+            </a:endParaRPr>
+          </a:p>
+        </p:txBody>
+      </p:sp>
+      <p:sp>
+        <p:nvSpPr>
+          <p:cNvPr id="271" name="Shape 73"/>
+          <p:cNvSpPr/>
+          <p:nvPr/>
+        </p:nvSpPr>
+        <p:spPr>
+          <a:xfrm>
+            <a:off x="6949440" y="2103120"/>
+            <a:ext cx="4937760" cy="45720"/>
+          </a:xfrm>
+          <a:prstGeom prst="line">
+            <a:avLst/>
+          </a:prstGeom>
+          <a:ln w="4445">
+            <a:solidFill>
+              <a:srgbClr val="22262A">
+                <a:alpha val="22000"/>
+              </a:srgbClr>
+            </a:solidFill>
+            <a:round/>
+          </a:ln>
+        </p:spPr>
+        <p:style>
+          <a:lnRef idx="0"/>
+          <a:fillRef idx="0"/>
+          <a:effectRef idx="0"/>
+          <a:fontRef idx="minor"/>
+        </p:style>
+        <p:txBody>
+          <a:bodyPr lIns="90000" tIns="720" rIns="90000" bIns="720" anchor="t" anchorCtr="1">
+            <a:noAutofit/>
+          </a:bodyPr>
+          <a:p>
+            <a:endParaRPr lang="en-US" sz="1800" b="0" u="none" strike="noStrike">
+              <a:solidFill>
+                <a:srgbClr val="FFFFFF"/>
+              </a:solidFill>
+              <a:effectLst/>
+              <a:uFillTx/>
+              <a:latin typeface="Arial"/>
+            </a:endParaRPr>
+          </a:p>
+        </p:txBody>
+      </p:sp>
+      <p:sp>
+        <p:nvSpPr>
+          <p:cNvPr id="272" name="Shape 74"/>
+          <p:cNvSpPr/>
+          <p:nvPr/>
+        </p:nvSpPr>
+        <p:spPr>
+          <a:xfrm>
+            <a:off x="6949440" y="2834640"/>
+            <a:ext cx="4937760" cy="45720"/>
+          </a:xfrm>
+          <a:prstGeom prst="line">
+            <a:avLst/>
+          </a:prstGeom>
+          <a:ln w="4445">
+            <a:solidFill>
+              <a:srgbClr val="22262A">
+                <a:alpha val="22000"/>
+              </a:srgbClr>
+            </a:solidFill>
+            <a:round/>
+          </a:ln>
+        </p:spPr>
+        <p:style>
+          <a:lnRef idx="0"/>
+          <a:fillRef idx="0"/>
+          <a:effectRef idx="0"/>
+          <a:fontRef idx="minor"/>
+        </p:style>
+        <p:txBody>
+          <a:bodyPr lIns="90000" tIns="720" rIns="90000" bIns="720" anchor="t" anchorCtr="1">
+            <a:noAutofit/>
+          </a:bodyPr>
+          <a:p>
+            <a:endParaRPr lang="en-US" sz="1800" b="0" u="none" strike="noStrike">
+              <a:solidFill>
+                <a:srgbClr val="FFFFFF"/>
+              </a:solidFill>
+              <a:effectLst/>
+              <a:uFillTx/>
+              <a:latin typeface="Arial"/>
+            </a:endParaRPr>
+          </a:p>
+        </p:txBody>
+      </p:sp>
+      <p:sp>
+        <p:nvSpPr>
+          <p:cNvPr id="273" name="Shape 75"/>
+          <p:cNvSpPr/>
+          <p:nvPr/>
+        </p:nvSpPr>
+        <p:spPr>
+          <a:xfrm>
+            <a:off x="6949440" y="3566160"/>
+            <a:ext cx="4937760" cy="45720"/>
+          </a:xfrm>
+          <a:prstGeom prst="line">
+            <a:avLst/>
+          </a:prstGeom>
+          <a:ln w="4445">
+            <a:solidFill>
+              <a:srgbClr val="22262A">
+                <a:alpha val="22000"/>
+              </a:srgbClr>
+            </a:solidFill>
+            <a:round/>
+          </a:ln>
+        </p:spPr>
+        <p:style>
+          <a:lnRef idx="0"/>
+          <a:fillRef idx="0"/>
+          <a:effectRef idx="0"/>
+          <a:fontRef idx="minor"/>
+        </p:style>
+        <p:txBody>
+          <a:bodyPr lIns="90000" tIns="720" rIns="90000" bIns="720" anchor="t" anchorCtr="1">
+            <a:noAutofit/>
+          </a:bodyPr>
+          <a:p>
+            <a:endParaRPr lang="en-US" sz="1800" b="0" u="none" strike="noStrike">
+              <a:solidFill>
+                <a:srgbClr val="FFFFFF"/>
+              </a:solidFill>
+              <a:effectLst/>
+              <a:uFillTx/>
+              <a:latin typeface="Arial"/>
+            </a:endParaRPr>
+          </a:p>
+        </p:txBody>
+      </p:sp>
+      <p:sp>
+        <p:nvSpPr>
+          <p:cNvPr id="274" name="Shape 76"/>
+          <p:cNvSpPr/>
+          <p:nvPr/>
+        </p:nvSpPr>
+        <p:spPr>
+          <a:xfrm>
+            <a:off x="6949440" y="4297680"/>
+            <a:ext cx="4937760" cy="45720"/>
+          </a:xfrm>
+          <a:prstGeom prst="line">
+            <a:avLst/>
+          </a:prstGeom>
+          <a:ln w="4445">
+            <a:solidFill>
+              <a:srgbClr val="22262A">
+                <a:alpha val="22000"/>
+              </a:srgbClr>
+            </a:solidFill>
+            <a:round/>
+          </a:ln>
+        </p:spPr>
+        <p:style>
+          <a:lnRef idx="0"/>
+          <a:fillRef idx="0"/>
+          <a:effectRef idx="0"/>
+          <a:fontRef idx="minor"/>
+        </p:style>
+        <p:txBody>
+          <a:bodyPr lIns="90000" tIns="720" rIns="90000" bIns="720" anchor="t" anchorCtr="1">
+            <a:noAutofit/>
+          </a:bodyPr>
+          <a:p>
+            <a:endParaRPr lang="en-US" sz="1800" b="0" u="none" strike="noStrike">
+              <a:solidFill>
+                <a:srgbClr val="FFFFFF"/>
+              </a:solidFill>
+              <a:effectLst/>
+              <a:uFillTx/>
+              <a:latin typeface="Arial"/>
+            </a:endParaRPr>
+          </a:p>
+        </p:txBody>
+      </p:sp>
+      <p:sp>
+        <p:nvSpPr>
+          <p:cNvPr id="275" name="Shape 77"/>
+          <p:cNvSpPr/>
+          <p:nvPr/>
+        </p:nvSpPr>
+        <p:spPr>
+          <a:xfrm>
+            <a:off x="6949440" y="5029200"/>
+            <a:ext cx="4937760" cy="45720"/>
+          </a:xfrm>
+          <a:prstGeom prst="line">
+            <a:avLst/>
+          </a:prstGeom>
+          <a:ln w="4445">
+            <a:solidFill>
+              <a:srgbClr val="22262A">
+                <a:alpha val="22000"/>
+              </a:srgbClr>
+            </a:solidFill>
+            <a:round/>
+          </a:ln>
+        </p:spPr>
+        <p:style>
+          <a:lnRef idx="0"/>
+          <a:fillRef idx="0"/>
+          <a:effectRef idx="0"/>
+          <a:fontRef idx="minor"/>
+        </p:style>
+        <p:txBody>
+          <a:bodyPr lIns="90000" tIns="720" rIns="90000" bIns="720" anchor="t" anchorCtr="1">
+            <a:noAutofit/>
+          </a:bodyPr>
+          <a:p>
+            <a:endParaRPr lang="en-US" sz="1800" b="0" u="none" strike="noStrike">
+              <a:solidFill>
+                <a:srgbClr val="FFFFFF"/>
+              </a:solidFill>
+              <a:effectLst/>
+              <a:uFillTx/>
+              <a:latin typeface="Arial"/>
+            </a:endParaRPr>
+          </a:p>
+        </p:txBody>
+      </p:sp>
+      <p:sp>
+        <p:nvSpPr>
+          <p:cNvPr id="276" name="Shape 78"/>
+          <p:cNvSpPr/>
+          <p:nvPr/>
+        </p:nvSpPr>
+        <p:spPr>
+          <a:xfrm>
+            <a:off x="6949440" y="5760720"/>
+            <a:ext cx="4937760" cy="45720"/>
+          </a:xfrm>
+          <a:prstGeom prst="line">
+            <a:avLst/>
+          </a:prstGeom>
+          <a:ln w="4445">
+            <a:solidFill>
+              <a:srgbClr val="22262A">
+                <a:alpha val="22000"/>
+              </a:srgbClr>
+            </a:solidFill>
+            <a:round/>
+          </a:ln>
+        </p:spPr>
+        <p:style>
+          <a:lnRef idx="0"/>
+          <a:fillRef idx="0"/>
+          <a:effectRef idx="0"/>
+          <a:fontRef idx="minor"/>
+        </p:style>
+        <p:txBody>
+          <a:bodyPr lIns="90000" tIns="720" rIns="90000" bIns="720" anchor="t" anchorCtr="1">
+            <a:noAutofit/>
+          </a:bodyPr>
+          <a:p>
+            <a:endParaRPr lang="en-US" sz="1800" b="0" u="none" strike="noStrike">
+              <a:solidFill>
+                <a:srgbClr val="FFFFFF"/>
+              </a:solidFill>
+              <a:effectLst/>
+              <a:uFillTx/>
+              <a:latin typeface="Arial"/>
+            </a:endParaRPr>
+          </a:p>
+        </p:txBody>
+      </p:sp>
+      <p:sp>
+        <p:nvSpPr>
+          <p:cNvPr id="277" name="Text 7"/>
+          <p:cNvSpPr/>
+          <p:nvPr/>
+        </p:nvSpPr>
+        <p:spPr>
+          <a:xfrm>
+            <a:off x="255960" y="6455520"/>
+            <a:ext cx="410040" cy="163080"/>
+          </a:xfrm>
+          <a:prstGeom prst="rect">
+            <a:avLst/>
+          </a:prstGeom>
+          <a:noFill/>
+          <a:ln w="0">
+            <a:noFill/>
+          </a:ln>
+        </p:spPr>
+        <p:style>
+          <a:lnRef idx="0"/>
+          <a:fillRef idx="0"/>
+          <a:effectRef idx="0"/>
+          <a:fontRef idx="minor"/>
+        </p:style>
+        <p:txBody>
+          <a:bodyPr lIns="0" tIns="0" rIns="0" bIns="0" anchor="ctr">
+            <a:noAutofit/>
+          </a:bodyPr>
+          <a:p>
+            <a:pPr defTabSz="914400">
+              <a:lnSpc>
+                <a:spcPct val="100000"/>
+              </a:lnSpc>
+              <a:tabLst>
+                <a:tab pos="0" algn="l"/>
+              </a:tabLst>
+            </a:pPr>
+            <a:r>
+              <a:rPr lang="en-US" sz="650" b="0" u="none" strike="noStrike">
+                <a:solidFill>
+                  <a:srgbClr val="8F949A"/>
+                </a:solidFill>
+                <a:effectLst/>
+                <a:uFillTx/>
+                <a:latin typeface="IBM Plex Sans"/>
+                <a:ea typeface="Aptos"/>
+              </a:rPr>
+              <a:t>06</a:t>
+            </a:r>
+            <a:endParaRPr lang="en-US" sz="650" b="0" u="none" strike="noStrike">
+              <a:solidFill>
+                <a:srgbClr val="FFFFFF"/>
+              </a:solidFill>
+              <a:effectLst/>
+              <a:uFillTx/>
+              <a:latin typeface="Arial"/>
+            </a:endParaRPr>
+          </a:p>
+        </p:txBody>
+      </p:sp>
+      <p:sp>
+        <p:nvSpPr>
+          <p:cNvPr id="278" name="Text 8"/>
+          <p:cNvSpPr/>
+          <p:nvPr/>
+        </p:nvSpPr>
+        <p:spPr>
+          <a:xfrm>
+            <a:off x="9829800" y="6455520"/>
+            <a:ext cx="2055960" cy="163080"/>
+          </a:xfrm>
+          <a:prstGeom prst="rect">
+            <a:avLst/>
+          </a:prstGeom>
+          <a:noFill/>
+          <a:ln w="0">
+            <a:noFill/>
+          </a:ln>
+        </p:spPr>
+        <p:style>
+          <a:lnRef idx="0"/>
+          <a:fillRef idx="0"/>
+          <a:effectRef idx="0"/>
+          <a:fontRef idx="minor"/>
+        </p:style>
+        <p:txBody>
+          <a:bodyPr lIns="0" tIns="0" rIns="0" bIns="0" anchor="ctr">
+            <a:noAutofit/>
+          </a:bodyPr>
+          <a:p>
+            <a:pPr algn="r" defTabSz="914400">
+              <a:lnSpc>
+                <a:spcPct val="100000"/>
+              </a:lnSpc>
+              <a:tabLst>
+                <a:tab pos="0" algn="l"/>
+              </a:tabLst>
+            </a:pPr>
+            <a:r>
+              <a:rPr lang="en-US" sz="650" b="0" u="none" strike="noStrike">
+                <a:solidFill>
+                  <a:srgbClr val="8F949A"/>
+                </a:solidFill>
+                <a:effectLst/>
+                <a:uFillTx/>
+                <a:latin typeface="IBM Plex Sans"/>
+                <a:ea typeface="Aptos"/>
+              </a:rPr>
+              <a:t>BLOODHOUND-KUBE</a:t>
+            </a:r>
+            <a:endParaRPr lang="en-US" sz="650" b="0" u="none" strike="noStrike">
+              <a:solidFill>
+                <a:srgbClr val="FFFFFF"/>
+              </a:solidFill>
+              <a:effectLst/>
+              <a:uFillTx/>
+              <a:latin typeface="Arial"/>
+            </a:endParaRPr>
+          </a:p>
+        </p:txBody>
+      </p:sp>
+      <p:sp>
+        <p:nvSpPr>
+          <p:cNvPr id="279" name="Text 9"/>
+          <p:cNvSpPr/>
+          <p:nvPr/>
+        </p:nvSpPr>
+        <p:spPr>
+          <a:xfrm>
+            <a:off x="576000" y="384120"/>
+            <a:ext cx="7130880" cy="410040"/>
+          </a:xfrm>
+          <a:prstGeom prst="rect">
+            <a:avLst/>
+          </a:prstGeom>
+          <a:noFill/>
+          <a:ln w="0">
+            <a:noFill/>
+          </a:ln>
+        </p:spPr>
+        <p:style>
+          <a:lnRef idx="0"/>
+          <a:fillRef idx="0"/>
+          <a:effectRef idx="0"/>
+          <a:fontRef idx="minor"/>
+        </p:style>
+        <p:txBody>
+          <a:bodyPr lIns="0" tIns="0" rIns="0" bIns="0" anchor="ctr">
+            <a:normAutofit lnSpcReduction="9999"/>
+          </a:bodyPr>
+          <a:p>
+            <a:pPr defTabSz="914400">
+              <a:lnSpc>
+                <a:spcPct val="100000"/>
+              </a:lnSpc>
+              <a:tabLst>
+                <a:tab pos="0" algn="l"/>
+              </a:tabLst>
+            </a:pPr>
+            <a:r>
+              <a:rPr lang="en-US" sz="2800" b="1" u="none" strike="noStrike">
+                <a:solidFill>
+                  <a:srgbClr val="F2F3F5"/>
+                </a:solidFill>
+                <a:effectLst/>
+                <a:uFillTx/>
+                <a:latin typeface="IBM Plex Sans"/>
+                <a:ea typeface="Aptos Display"/>
+              </a:rPr>
+              <a:t>PlaceHolder</a:t>
+            </a:r>
+            <a:endParaRPr lang="en-US" sz="2800" b="0" u="none" strike="noStrike">
+              <a:solidFill>
+                <a:srgbClr val="FFFFFF"/>
+              </a:solidFill>
+              <a:effectLst/>
+              <a:uFillTx/>
+              <a:latin typeface="Arial"/>
+            </a:endParaRPr>
+          </a:p>
+        </p:txBody>
+      </p:sp>
+      <p:sp>
+        <p:nvSpPr>
+          <p:cNvPr id="280" name="Shape 79"/>
+          <p:cNvSpPr/>
+          <p:nvPr/>
+        </p:nvSpPr>
+        <p:spPr>
+          <a:xfrm>
+            <a:off x="576000" y="932400"/>
+            <a:ext cx="914400" cy="360"/>
+          </a:xfrm>
+          <a:prstGeom prst="line">
+            <a:avLst/>
+          </a:prstGeom>
+          <a:ln w="27940">
+            <a:solidFill>
+              <a:srgbClr val="E53935"/>
+            </a:solidFill>
+            <a:round/>
+          </a:ln>
+        </p:spPr>
+        <p:style>
+          <a:lnRef idx="0"/>
+          <a:fillRef idx="0"/>
+          <a:effectRef idx="0"/>
+          <a:fontRef idx="minor"/>
+        </p:style>
+        <p:txBody>
+          <a:bodyPr lIns="90000" tIns="-44640" rIns="90000" bIns="-44640" anchor="t" anchorCtr="1">
+            <a:noAutofit/>
+          </a:bodyPr>
+          <a:p>
+            <a:endParaRPr lang="en-US" sz="1800" b="0" u="none" strike="noStrike">
+              <a:solidFill>
+                <a:srgbClr val="FFFFFF"/>
+              </a:solidFill>
+              <a:effectLst/>
+              <a:uFillTx/>
+              <a:latin typeface="Arial"/>
+            </a:endParaRPr>
+          </a:p>
+        </p:txBody>
+      </p:sp>
+      <p:sp>
+        <p:nvSpPr>
+          <p:cNvPr id="281" name="Text 11"/>
+          <p:cNvSpPr/>
+          <p:nvPr/>
+        </p:nvSpPr>
+        <p:spPr>
+          <a:xfrm>
+            <a:off x="1627560" y="896040"/>
+            <a:ext cx="8959680" cy="199800"/>
+          </a:xfrm>
+          <a:prstGeom prst="rect">
+            <a:avLst/>
+          </a:prstGeom>
+          <a:noFill/>
+          <a:ln w="0">
+            <a:noFill/>
+          </a:ln>
+        </p:spPr>
+        <p:style>
+          <a:lnRef idx="0"/>
+          <a:fillRef idx="0"/>
+          <a:effectRef idx="0"/>
+          <a:fontRef idx="minor"/>
+        </p:style>
+        <p:txBody>
+          <a:bodyPr lIns="0" tIns="0" rIns="0" bIns="0" anchor="ctr">
+            <a:normAutofit/>
+          </a:bodyPr>
+          <a:p>
+            <a:pPr defTabSz="914400">
+              <a:lnSpc>
+                <a:spcPct val="100000"/>
+              </a:lnSpc>
+              <a:tabLst>
+                <a:tab pos="0" algn="l"/>
+              </a:tabLst>
+            </a:pPr>
+            <a:r>
+              <a:rPr lang="en-US" sz="950" b="0" u="none" strike="noStrike">
+                <a:solidFill>
+                  <a:srgbClr val="A6AAB0"/>
+                </a:solidFill>
+                <a:effectLst/>
+                <a:uFillTx/>
+                <a:latin typeface="IBM Plex Sans"/>
+                <a:ea typeface="Aptos"/>
+              </a:rPr>
+              <a:t>Keep the live demo narrow: one environment, one path, one clear conclusion.</a:t>
+            </a:r>
+            <a:endParaRPr lang="en-US" sz="950" b="0" u="none" strike="noStrike">
+              <a:solidFill>
+                <a:srgbClr val="FFFFFF"/>
+              </a:solidFill>
+              <a:effectLst/>
+              <a:uFillTx/>
+              <a:latin typeface="Arial"/>
             </a:endParaRPr>
           </a:p>
         </p:txBody>
@@ -2887,7 +4238,7 @@
         <p:spPr>
           <a:xfrm>
             <a:off x="18360" y="18360"/>
-            <a:ext cx="12153960" cy="6820200"/>
+            <a:ext cx="12153600" cy="6819840"/>
           </a:xfrm>
           <a:prstGeom prst="rect">
             <a:avLst/>
@@ -3698,7 +5049,7 @@
         <p:spPr>
           <a:xfrm>
             <a:off x="255960" y="6455520"/>
-            <a:ext cx="410400" cy="163440"/>
+            <a:ext cx="410040" cy="163080"/>
           </a:xfrm>
           <a:prstGeom prst="rect">
             <a:avLst/>
@@ -3759,7 +5110,7 @@
         <p:spPr>
           <a:xfrm>
             <a:off x="576000" y="384120"/>
-            <a:ext cx="7131240" cy="410400"/>
+            <a:ext cx="7130880" cy="410040"/>
           </a:xfrm>
           <a:prstGeom prst="rect">
             <a:avLst/>
@@ -3863,7 +5214,7 @@
         <p:spPr>
           <a:xfrm>
             <a:off x="649800" y="1435680"/>
-            <a:ext cx="163440" cy="163440"/>
+            <a:ext cx="163080" cy="163080"/>
           </a:xfrm>
           <a:prstGeom prst="rect">
             <a:avLst/>
@@ -3904,7 +5255,7 @@
         <p:spPr>
           <a:xfrm>
             <a:off x="555840" y="1024200"/>
-            <a:ext cx="7739640" cy="574920"/>
+            <a:ext cx="7739280" cy="574560"/>
           </a:xfrm>
           <a:prstGeom prst="rect">
             <a:avLst/>
@@ -3995,7 +5346,7 @@
         <p:spPr>
           <a:xfrm>
             <a:off x="685800" y="3218760"/>
-            <a:ext cx="163440" cy="163440"/>
+            <a:ext cx="163080" cy="163080"/>
           </a:xfrm>
           <a:prstGeom prst="rect">
             <a:avLst/>
@@ -4039,8 +5390,8 @@
         </p:blipFill>
         <p:spPr>
           <a:xfrm rot="4200">
-            <a:off x="8400600" y="968760"/>
-            <a:ext cx="3194280" cy="4789440"/>
+            <a:off x="8400240" y="968760"/>
+            <a:ext cx="3193920" cy="4789080"/>
           </a:xfrm>
           <a:prstGeom prst="rect">
             <a:avLst/>
@@ -4049,6 +5400,11 @@
           <a:ln w="0">
             <a:noFill/>
           </a:ln>
+          <a:effectLst>
+            <a:outerShdw dist="101823" dir="2700000" rotWithShape="0">
+              <a:srgbClr val="808080"/>
+            </a:outerShdw>
+          </a:effectLst>
         </p:spPr>
       </p:pic>
       <p:sp>
@@ -4060,7 +5416,7 @@
         <p:spPr>
           <a:xfrm>
             <a:off x="510840" y="2143080"/>
-            <a:ext cx="4822560" cy="2327760"/>
+            <a:ext cx="4822200" cy="1278360"/>
           </a:xfrm>
           <a:prstGeom prst="rect">
             <a:avLst/>
@@ -4173,7 +5529,7 @@
         <p:spPr>
           <a:xfrm>
             <a:off x="627840" y="3495960"/>
-            <a:ext cx="2991240" cy="2991240"/>
+            <a:ext cx="2990880" cy="2990880"/>
           </a:xfrm>
           <a:prstGeom prst="rect">
             <a:avLst/>
@@ -4230,7 +5586,7 @@
         <p:spPr>
           <a:xfrm>
             <a:off x="18360" y="18360"/>
-            <a:ext cx="12153960" cy="6820200"/>
+            <a:ext cx="12153600" cy="6819840"/>
           </a:xfrm>
           <a:prstGeom prst="rect">
             <a:avLst/>
@@ -5041,7 +6397,7 @@
         <p:spPr>
           <a:xfrm>
             <a:off x="255960" y="6455520"/>
-            <a:ext cx="410400" cy="163440"/>
+            <a:ext cx="410040" cy="163080"/>
           </a:xfrm>
           <a:prstGeom prst="rect">
             <a:avLst/>
@@ -5102,7 +6458,7 @@
         <p:spPr>
           <a:xfrm>
             <a:off x="576000" y="384120"/>
-            <a:ext cx="7131240" cy="410400"/>
+            <a:ext cx="7130880" cy="410040"/>
           </a:xfrm>
           <a:prstGeom prst="rect">
             <a:avLst/>
@@ -5206,7 +6562,7 @@
         <p:spPr>
           <a:xfrm>
             <a:off x="1627560" y="794520"/>
-            <a:ext cx="8960040" cy="200160"/>
+            <a:ext cx="8959680" cy="199800"/>
           </a:xfrm>
           <a:prstGeom prst="rect">
             <a:avLst/>
@@ -5224,17 +6580,9 @@
         </p:style>
         <p:txBody>
           <a:bodyPr lIns="0" tIns="0" rIns="0" bIns="0" anchor="ctr">
-            <a:normAutofit fontScale="70000" lnSpcReduction="19999"/>
-          </a:bodyPr>
-          <a:p>
-            <a:pPr defTabSz="914400">
-              <a:lnSpc>
-                <a:spcPct val="100000"/>
-              </a:lnSpc>
-              <a:tabLst>
-                <a:tab pos="0" algn="l"/>
-              </a:tabLst>
-            </a:pPr>
+            <a:normAutofit fontScale="55000" lnSpcReduction="19999"/>
+          </a:bodyPr>
+          <a:p>
             <a:endParaRPr lang="en-US" sz="1800" b="0" u="none" strike="noStrike">
               <a:solidFill>
                 <a:srgbClr val="FFFFFF"/>
@@ -5255,7 +6603,7 @@
         <p:spPr>
           <a:xfrm>
             <a:off x="685800" y="1435680"/>
-            <a:ext cx="163440" cy="163440"/>
+            <a:ext cx="163080" cy="163080"/>
           </a:xfrm>
           <a:prstGeom prst="rect">
             <a:avLst/>
@@ -5296,7 +6644,7 @@
         <p:spPr>
           <a:xfrm>
             <a:off x="280080" y="1367280"/>
-            <a:ext cx="11606760" cy="4952520"/>
+            <a:ext cx="11606400" cy="4952160"/>
           </a:xfrm>
           <a:prstGeom prst="rect">
             <a:avLst/>
@@ -5521,19 +6869,7 @@
                 <a:latin typeface="IBM Plex Sans"/>
                 <a:ea typeface="Aptos"/>
               </a:rPr>
-              <a:t>kubectl and raw YAML don’t</a:t>
-            </a:r>
-            <a:r>
-              <a:rPr lang="en-US" sz="2400" b="0" u="none" strike="noStrike">
-                <a:solidFill>
-                  <a:srgbClr val="D4D6DA"/>
-                </a:solidFill>
-                <a:effectLst/>
-                <a:uFillTx/>
-                <a:latin typeface="IBM Plex Sans"/>
-                <a:ea typeface="Aptos"/>
-              </a:rPr>
-              <a:t> show multi-step reachability at scale.</a:t>
+              <a:t>kubectl and raw YAML don’t show multi-step reachability at scale.</a:t>
             </a:r>
             <a:endParaRPr lang="en-US" sz="2400" b="0" u="none" strike="noStrike">
               <a:solidFill>
@@ -5615,7 +6951,7 @@
         <p:spPr>
           <a:xfrm>
             <a:off x="914400" y="2606040"/>
-            <a:ext cx="4845240" cy="574920"/>
+            <a:ext cx="4844880" cy="574560"/>
           </a:xfrm>
           <a:prstGeom prst="rect">
             <a:avLst/>
@@ -5656,7 +6992,7 @@
         <p:spPr>
           <a:xfrm>
             <a:off x="914400" y="3200400"/>
-            <a:ext cx="4845240" cy="574920"/>
+            <a:ext cx="4844880" cy="574560"/>
           </a:xfrm>
           <a:prstGeom prst="rect">
             <a:avLst/>
@@ -5734,7 +7070,7 @@
         <p:spPr>
           <a:xfrm>
             <a:off x="-18360" y="18360"/>
-            <a:ext cx="12190680" cy="6856920"/>
+            <a:ext cx="12190320" cy="6856560"/>
           </a:xfrm>
           <a:prstGeom prst="rect">
             <a:avLst/>
@@ -5782,7 +7118,7 @@
         <p:spPr>
           <a:xfrm>
             <a:off x="18360" y="18360"/>
-            <a:ext cx="12153960" cy="6820200"/>
+            <a:ext cx="12153600" cy="6819840"/>
           </a:xfrm>
           <a:prstGeom prst="rect">
             <a:avLst/>
@@ -6593,7 +7929,7 @@
         <p:spPr>
           <a:xfrm>
             <a:off x="255960" y="6455520"/>
-            <a:ext cx="410400" cy="163440"/>
+            <a:ext cx="410040" cy="163080"/>
           </a:xfrm>
           <a:prstGeom prst="rect">
             <a:avLst/>
@@ -6654,7 +7990,7 @@
         <p:spPr>
           <a:xfrm>
             <a:off x="576000" y="384120"/>
-            <a:ext cx="7131240" cy="410400"/>
+            <a:ext cx="7130880" cy="410040"/>
           </a:xfrm>
           <a:prstGeom prst="rect">
             <a:avLst/>
@@ -6758,7 +8094,7 @@
         <p:spPr>
           <a:xfrm>
             <a:off x="1280160" y="1508760"/>
-            <a:ext cx="529200" cy="529200"/>
+            <a:ext cx="528840" cy="528840"/>
           </a:xfrm>
           <a:prstGeom prst="ellipse">
             <a:avLst/>
@@ -6824,7 +8160,7 @@
         <p:spPr>
           <a:xfrm>
             <a:off x="713160" y="2258640"/>
-            <a:ext cx="1663200" cy="236520"/>
+            <a:ext cx="1662840" cy="236160"/>
           </a:xfrm>
           <a:prstGeom prst="rect">
             <a:avLst/>
@@ -6885,7 +8221,7 @@
         <p:spPr>
           <a:xfrm>
             <a:off x="713160" y="2633400"/>
-            <a:ext cx="1751760" cy="1198800"/>
+            <a:ext cx="1751400" cy="1198440"/>
           </a:xfrm>
           <a:prstGeom prst="rect">
             <a:avLst/>
@@ -6990,7 +8326,7 @@
         <p:spPr>
           <a:xfrm>
             <a:off x="4060080" y="1508760"/>
-            <a:ext cx="529200" cy="529200"/>
+            <a:ext cx="528840" cy="528840"/>
           </a:xfrm>
           <a:prstGeom prst="ellipse">
             <a:avLst/>
@@ -7056,7 +8392,7 @@
         <p:spPr>
           <a:xfrm>
             <a:off x="3493080" y="2258640"/>
-            <a:ext cx="1663200" cy="236520"/>
+            <a:ext cx="1662840" cy="236160"/>
           </a:xfrm>
           <a:prstGeom prst="rect">
             <a:avLst/>
@@ -7117,7 +8453,7 @@
         <p:spPr>
           <a:xfrm>
             <a:off x="3221640" y="2633400"/>
-            <a:ext cx="2266200" cy="1299600"/>
+            <a:ext cx="2265840" cy="1299240"/>
           </a:xfrm>
           <a:prstGeom prst="rect">
             <a:avLst/>
@@ -7222,7 +8558,7 @@
         <p:spPr>
           <a:xfrm>
             <a:off x="6839640" y="1508760"/>
-            <a:ext cx="529200" cy="529200"/>
+            <a:ext cx="528840" cy="528840"/>
           </a:xfrm>
           <a:prstGeom prst="ellipse">
             <a:avLst/>
@@ -7288,7 +8624,7 @@
         <p:spPr>
           <a:xfrm>
             <a:off x="6272640" y="2258640"/>
-            <a:ext cx="1663200" cy="236520"/>
+            <a:ext cx="1662840" cy="236160"/>
           </a:xfrm>
           <a:prstGeom prst="rect">
             <a:avLst/>
@@ -7349,7 +8685,7 @@
         <p:spPr>
           <a:xfrm>
             <a:off x="6073560" y="2599920"/>
-            <a:ext cx="2016720" cy="1501200"/>
+            <a:ext cx="2016360" cy="1500840"/>
           </a:xfrm>
           <a:prstGeom prst="rect">
             <a:avLst/>
@@ -7454,7 +8790,7 @@
         <p:spPr>
           <a:xfrm>
             <a:off x="9619560" y="1508760"/>
-            <a:ext cx="529200" cy="529200"/>
+            <a:ext cx="528840" cy="528840"/>
           </a:xfrm>
           <a:prstGeom prst="ellipse">
             <a:avLst/>
@@ -7520,7 +8856,7 @@
         <p:spPr>
           <a:xfrm>
             <a:off x="9052560" y="2258640"/>
-            <a:ext cx="1663200" cy="236520"/>
+            <a:ext cx="1662840" cy="236160"/>
           </a:xfrm>
           <a:prstGeom prst="rect">
             <a:avLst/>
@@ -7581,7 +8917,7 @@
         <p:spPr>
           <a:xfrm>
             <a:off x="9052560" y="2633400"/>
-            <a:ext cx="1659600" cy="1445400"/>
+            <a:ext cx="1659240" cy="1445040"/>
           </a:xfrm>
           <a:prstGeom prst="rect">
             <a:avLst/>
@@ -7641,8 +8977,8 @@
         </p:nvSpPr>
         <p:spPr>
           <a:xfrm>
-            <a:off x="777240" y="4224600"/>
-            <a:ext cx="10624320" cy="1187640"/>
+            <a:off x="760320" y="4215960"/>
+            <a:ext cx="10623960" cy="1947600"/>
           </a:xfrm>
           <a:prstGeom prst="roundRect">
             <a:avLst>
@@ -7692,7 +9028,7 @@
         <p:spPr>
           <a:xfrm>
             <a:off x="887040" y="4334400"/>
-            <a:ext cx="10404720" cy="180720"/>
+            <a:ext cx="10404360" cy="1829160"/>
           </a:xfrm>
           <a:prstGeom prst="rect">
             <a:avLst/>
@@ -7710,7 +9046,7 @@
         </p:style>
         <p:txBody>
           <a:bodyPr lIns="0" tIns="0" rIns="0" bIns="0" anchor="ctr">
-            <a:normAutofit fontScale="77500" lnSpcReduction="19999"/>
+            <a:normAutofit/>
           </a:bodyPr>
           <a:p>
             <a:pPr defTabSz="914400">
@@ -7742,37 +9078,6 @@
               <a:latin typeface="Arial"/>
             </a:endParaRPr>
           </a:p>
-        </p:txBody>
-      </p:sp>
-      <p:sp>
-        <p:nvSpPr>
-          <p:cNvPr id="108" name="Text 41"/>
-          <p:cNvSpPr/>
-          <p:nvPr/>
-        </p:nvSpPr>
-        <p:spPr>
-          <a:xfrm>
-            <a:off x="887040" y="4531680"/>
-            <a:ext cx="10404720" cy="180720"/>
-          </a:xfrm>
-          <a:prstGeom prst="rect">
-            <a:avLst/>
-          </a:prstGeom>
-          <a:noFill/>
-          <a:ln w="0">
-            <a:noFill/>
-          </a:ln>
-        </p:spPr>
-        <p:style>
-          <a:lnRef idx="0"/>
-          <a:fillRef idx="0"/>
-          <a:effectRef idx="0"/>
-          <a:fontRef idx="minor"/>
-        </p:style>
-        <p:txBody>
-          <a:bodyPr lIns="0" tIns="0" rIns="0" bIns="0" anchor="ctr">
-            <a:normAutofit fontScale="77500" lnSpcReduction="19999"/>
-          </a:bodyPr>
           <a:p>
             <a:pPr defTabSz="914400">
               <a:lnSpc>
@@ -7803,78 +9108,24 @@
               <a:latin typeface="Arial"/>
             </a:endParaRPr>
           </a:p>
-        </p:txBody>
-      </p:sp>
-      <p:sp>
-        <p:nvSpPr>
-          <p:cNvPr id="109" name="Text 42"/>
-          <p:cNvSpPr/>
-          <p:nvPr/>
-        </p:nvSpPr>
-        <p:spPr>
-          <a:xfrm>
-            <a:off x="887040" y="4729320"/>
-            <a:ext cx="10404720" cy="180720"/>
-          </a:xfrm>
-          <a:prstGeom prst="rect">
-            <a:avLst/>
-          </a:prstGeom>
-          <a:noFill/>
-          <a:ln w="0">
-            <a:noFill/>
-          </a:ln>
-        </p:spPr>
-        <p:style>
-          <a:lnRef idx="0"/>
-          <a:fillRef idx="0"/>
-          <a:effectRef idx="0"/>
-          <a:fontRef idx="minor"/>
-        </p:style>
-        <p:txBody>
-          <a:bodyPr lIns="0" tIns="0" rIns="0" bIns="0" anchor="ctr">
-            <a:normAutofit fontScale="47500" lnSpcReduction="19999"/>
-          </a:bodyPr>
-          <a:p>
-            <a:endParaRPr lang="en-US" sz="1100" b="0" u="none" strike="noStrike">
-              <a:solidFill>
-                <a:schemeClr val="dk1"/>
-              </a:solidFill>
-              <a:effectLst/>
-              <a:uFillTx/>
-              <a:latin typeface="IBM Plex Sans"/>
-            </a:endParaRPr>
-          </a:p>
-        </p:txBody>
-      </p:sp>
-      <p:sp>
-        <p:nvSpPr>
-          <p:cNvPr id="110" name="Text 43"/>
-          <p:cNvSpPr/>
-          <p:nvPr/>
-        </p:nvSpPr>
-        <p:spPr>
-          <a:xfrm>
-            <a:off x="887040" y="4926960"/>
-            <a:ext cx="10404720" cy="180720"/>
-          </a:xfrm>
-          <a:prstGeom prst="rect">
-            <a:avLst/>
-          </a:prstGeom>
-          <a:noFill/>
-          <a:ln w="0">
-            <a:noFill/>
-          </a:ln>
-        </p:spPr>
-        <p:style>
-          <a:lnRef idx="0"/>
-          <a:fillRef idx="0"/>
-          <a:effectRef idx="0"/>
-          <a:fontRef idx="minor"/>
-        </p:style>
-        <p:txBody>
-          <a:bodyPr lIns="0" tIns="0" rIns="0" bIns="0" anchor="ctr">
-            <a:normAutofit fontScale="77500" lnSpcReduction="19999"/>
-          </a:bodyPr>
+          <a:p>
+            <a:pPr defTabSz="914400">
+              <a:lnSpc>
+                <a:spcPct val="100000"/>
+              </a:lnSpc>
+              <a:tabLst>
+                <a:tab pos="0" algn="l"/>
+              </a:tabLst>
+            </a:pPr>
+            <a:endParaRPr lang="en-US" sz="1800" b="0" u="none" strike="noStrike">
+              <a:solidFill>
+                <a:srgbClr val="FFFFFF"/>
+              </a:solidFill>
+              <a:effectLst/>
+              <a:uFillTx/>
+              <a:latin typeface="Arial"/>
+            </a:endParaRPr>
+          </a:p>
           <a:p>
             <a:pPr defTabSz="914400">
               <a:lnSpc>
@@ -7905,37 +9156,6 @@
               <a:latin typeface="Arial"/>
             </a:endParaRPr>
           </a:p>
-        </p:txBody>
-      </p:sp>
-      <p:sp>
-        <p:nvSpPr>
-          <p:cNvPr id="111" name="Text 44"/>
-          <p:cNvSpPr/>
-          <p:nvPr/>
-        </p:nvSpPr>
-        <p:spPr>
-          <a:xfrm>
-            <a:off x="887040" y="5124240"/>
-            <a:ext cx="10404720" cy="180720"/>
-          </a:xfrm>
-          <a:prstGeom prst="rect">
-            <a:avLst/>
-          </a:prstGeom>
-          <a:noFill/>
-          <a:ln w="0">
-            <a:noFill/>
-          </a:ln>
-        </p:spPr>
-        <p:style>
-          <a:lnRef idx="0"/>
-          <a:fillRef idx="0"/>
-          <a:effectRef idx="0"/>
-          <a:fontRef idx="minor"/>
-        </p:style>
-        <p:txBody>
-          <a:bodyPr lIns="0" tIns="0" rIns="0" bIns="0" anchor="ctr">
-            <a:normAutofit fontScale="77500" lnSpcReduction="19999"/>
-          </a:bodyPr>
           <a:p>
             <a:pPr defTabSz="914400">
               <a:lnSpc>
@@ -7957,6 +9177,212 @@
               </a:rPr>
               <a:t>./bloodhound-kube collect --redacted --zip --output demo.jsonl</a:t>
             </a:r>
+            <a:endParaRPr lang="en-US" sz="1800" b="0" u="none" strike="noStrike">
+              <a:solidFill>
+                <a:srgbClr val="FFFFFF"/>
+              </a:solidFill>
+              <a:effectLst/>
+              <a:uFillTx/>
+              <a:latin typeface="Arial"/>
+            </a:endParaRPr>
+          </a:p>
+          <a:p>
+            <a:pPr defTabSz="914400">
+              <a:lnSpc>
+                <a:spcPct val="100000"/>
+              </a:lnSpc>
+              <a:tabLst>
+                <a:tab pos="0" algn="l"/>
+              </a:tabLst>
+            </a:pPr>
+            <a:endParaRPr lang="en-US" sz="1800" b="0" u="none" strike="noStrike">
+              <a:solidFill>
+                <a:srgbClr val="FFFFFF"/>
+              </a:solidFill>
+              <a:effectLst/>
+              <a:uFillTx/>
+              <a:latin typeface="Arial"/>
+            </a:endParaRPr>
+          </a:p>
+        </p:txBody>
+      </p:sp>
+      <p:sp>
+        <p:nvSpPr>
+          <p:cNvPr id="108" name="Text 41"/>
+          <p:cNvSpPr/>
+          <p:nvPr/>
+        </p:nvSpPr>
+        <p:spPr>
+          <a:xfrm>
+            <a:off x="797040" y="5029200"/>
+            <a:ext cx="10404360" cy="408960"/>
+          </a:xfrm>
+          <a:prstGeom prst="rect">
+            <a:avLst/>
+          </a:prstGeom>
+          <a:noFill/>
+          <a:ln w="0">
+            <a:noFill/>
+          </a:ln>
+        </p:spPr>
+        <p:style>
+          <a:lnRef idx="0"/>
+          <a:fillRef idx="0"/>
+          <a:effectRef idx="0"/>
+          <a:fontRef idx="minor"/>
+        </p:style>
+        <p:txBody>
+          <a:bodyPr lIns="0" tIns="0" rIns="0" bIns="0" anchor="ctr">
+            <a:normAutofit/>
+          </a:bodyPr>
+          <a:p>
+            <a:pPr defTabSz="914400">
+              <a:lnSpc>
+                <a:spcPct val="100000"/>
+              </a:lnSpc>
+              <a:tabLst>
+                <a:tab pos="0" algn="l"/>
+              </a:tabLst>
+            </a:pPr>
+            <a:endParaRPr lang="en-US" sz="1800" b="0" u="none" strike="noStrike">
+              <a:solidFill>
+                <a:srgbClr val="FFFFFF"/>
+              </a:solidFill>
+              <a:effectLst/>
+              <a:uFillTx/>
+              <a:latin typeface="Arial"/>
+            </a:endParaRPr>
+          </a:p>
+        </p:txBody>
+      </p:sp>
+      <p:sp>
+        <p:nvSpPr>
+          <p:cNvPr id="109" name="Text 42"/>
+          <p:cNvSpPr/>
+          <p:nvPr/>
+        </p:nvSpPr>
+        <p:spPr>
+          <a:xfrm>
+            <a:off x="887040" y="4729320"/>
+            <a:ext cx="10404360" cy="180360"/>
+          </a:xfrm>
+          <a:prstGeom prst="rect">
+            <a:avLst/>
+          </a:prstGeom>
+          <a:noFill/>
+          <a:ln w="0">
+            <a:noFill/>
+          </a:ln>
+        </p:spPr>
+        <p:style>
+          <a:lnRef idx="0"/>
+          <a:fillRef idx="0"/>
+          <a:effectRef idx="0"/>
+          <a:fontRef idx="minor"/>
+        </p:style>
+        <p:txBody>
+          <a:bodyPr lIns="0" tIns="0" rIns="0" bIns="0" anchor="ctr">
+            <a:normAutofit fontScale="47500" lnSpcReduction="19999"/>
+          </a:bodyPr>
+          <a:p>
+            <a:endParaRPr lang="en-US" sz="1100" b="0" u="none" strike="noStrike">
+              <a:solidFill>
+                <a:schemeClr val="dk1"/>
+              </a:solidFill>
+              <a:effectLst/>
+              <a:uFillTx/>
+              <a:latin typeface="IBM Plex Sans"/>
+            </a:endParaRPr>
+          </a:p>
+        </p:txBody>
+      </p:sp>
+      <p:sp>
+        <p:nvSpPr>
+          <p:cNvPr id="110" name="Text 43"/>
+          <p:cNvSpPr/>
+          <p:nvPr/>
+        </p:nvSpPr>
+        <p:spPr>
+          <a:xfrm>
+            <a:off x="797040" y="5486400"/>
+            <a:ext cx="10404360" cy="320040"/>
+          </a:xfrm>
+          <a:prstGeom prst="rect">
+            <a:avLst/>
+          </a:prstGeom>
+          <a:noFill/>
+          <a:ln w="0">
+            <a:noFill/>
+          </a:ln>
+        </p:spPr>
+        <p:style>
+          <a:lnRef idx="0"/>
+          <a:fillRef idx="0"/>
+          <a:effectRef idx="0"/>
+          <a:fontRef idx="minor"/>
+        </p:style>
+        <p:txBody>
+          <a:bodyPr lIns="0" tIns="0" rIns="0" bIns="0" anchor="ctr">
+            <a:normAutofit/>
+          </a:bodyPr>
+          <a:p>
+            <a:pPr defTabSz="914400">
+              <a:lnSpc>
+                <a:spcPct val="100000"/>
+              </a:lnSpc>
+              <a:tabLst>
+                <a:tab pos="0" algn="l"/>
+              </a:tabLst>
+            </a:pPr>
+            <a:endParaRPr lang="en-US" sz="1800" b="0" u="none" strike="noStrike">
+              <a:solidFill>
+                <a:srgbClr val="FFFFFF"/>
+              </a:solidFill>
+              <a:effectLst/>
+              <a:uFillTx/>
+              <a:latin typeface="Arial"/>
+            </a:endParaRPr>
+          </a:p>
+        </p:txBody>
+      </p:sp>
+      <p:sp>
+        <p:nvSpPr>
+          <p:cNvPr id="111" name="Text 44"/>
+          <p:cNvSpPr/>
+          <p:nvPr/>
+        </p:nvSpPr>
+        <p:spPr>
+          <a:xfrm>
+            <a:off x="797040" y="5715000"/>
+            <a:ext cx="10404360" cy="408960"/>
+          </a:xfrm>
+          <a:prstGeom prst="rect">
+            <a:avLst/>
+          </a:prstGeom>
+          <a:noFill/>
+          <a:ln w="0">
+            <a:noFill/>
+          </a:ln>
+        </p:spPr>
+        <p:style>
+          <a:lnRef idx="0"/>
+          <a:fillRef idx="0"/>
+          <a:effectRef idx="0"/>
+          <a:fontRef idx="minor"/>
+        </p:style>
+        <p:txBody>
+          <a:bodyPr lIns="0" tIns="0" rIns="0" bIns="0" anchor="ctr">
+            <a:normAutofit/>
+          </a:bodyPr>
+          <a:p>
+            <a:pPr defTabSz="914400">
+              <a:lnSpc>
+                <a:spcPct val="100000"/>
+              </a:lnSpc>
+              <a:tabLst>
+                <a:tab pos="0" algn="l"/>
+              </a:tabLst>
+            </a:pPr>
             <a:endParaRPr lang="en-US" sz="1800" b="0" u="none" strike="noStrike">
               <a:solidFill>
                 <a:srgbClr val="FFFFFF"/>
@@ -8014,7 +9440,7 @@
         <p:spPr>
           <a:xfrm>
             <a:off x="0" y="0"/>
-            <a:ext cx="12190680" cy="6856920"/>
+            <a:ext cx="12190320" cy="6856560"/>
           </a:xfrm>
           <a:prstGeom prst="rect">
             <a:avLst/>
@@ -8062,7 +9488,7 @@
         <p:spPr>
           <a:xfrm>
             <a:off x="18360" y="18360"/>
-            <a:ext cx="12153960" cy="6820200"/>
+            <a:ext cx="12153600" cy="6819840"/>
           </a:xfrm>
           <a:prstGeom prst="rect">
             <a:avLst/>
@@ -8873,7 +10299,7 @@
         <p:spPr>
           <a:xfrm>
             <a:off x="255960" y="6455520"/>
-            <a:ext cx="410400" cy="163440"/>
+            <a:ext cx="410040" cy="163080"/>
           </a:xfrm>
           <a:prstGeom prst="rect">
             <a:avLst/>
@@ -8934,7 +10360,7 @@
         <p:spPr>
           <a:xfrm>
             <a:off x="576000" y="384120"/>
-            <a:ext cx="7131240" cy="410400"/>
+            <a:ext cx="7130880" cy="410040"/>
           </a:xfrm>
           <a:prstGeom prst="rect">
             <a:avLst/>
@@ -8973,7 +10399,7 @@
                 <a:latin typeface="IBM Plex Sans"/>
                 <a:ea typeface="Aptos Display"/>
               </a:rPr>
-              <a:t>Demo time!</a:t>
+              <a:t>Demo time! (1 of 2)</a:t>
             </a:r>
             <a:endParaRPr lang="en-US" sz="2800" b="0" u="none" strike="noStrike">
               <a:solidFill>
@@ -9031,80 +10457,378 @@
       </p:sp>
       <p:sp>
         <p:nvSpPr>
-          <p:cNvPr id="134" name="Text 24"/>
-          <p:cNvSpPr/>
-          <p:nvPr/>
-        </p:nvSpPr>
-        <p:spPr>
-          <a:xfrm>
-            <a:off x="850320" y="1325880"/>
-            <a:ext cx="392040" cy="392040"/>
-          </a:xfrm>
-          <a:prstGeom prst="ellipse">
-            <a:avLst/>
+          <p:cNvPr id="134" name="Shape 34"/>
+          <p:cNvSpPr/>
+          <p:nvPr/>
+        </p:nvSpPr>
+        <p:spPr>
+          <a:xfrm>
+            <a:off x="457200" y="914400"/>
+            <a:ext cx="11649240" cy="5904000"/>
+          </a:xfrm>
+          <a:prstGeom prst="roundRect">
+            <a:avLst>
+              <a:gd name="adj" fmla="val 1967"/>
+            </a:avLst>
           </a:prstGeom>
           <a:solidFill>
-            <a:srgbClr val="17191C"/>
+            <a:srgbClr val="070809"/>
           </a:solidFill>
-          <a:ln w="15240">
-            <a:solidFill>
-              <a:srgbClr val="555A60"/>
-            </a:solidFill>
-            <a:round/>
-          </a:ln>
-        </p:spPr>
-        <p:style>
-          <a:lnRef idx="0"/>
-          <a:fillRef idx="0"/>
-          <a:effectRef idx="0"/>
-          <a:fontRef idx="minor"/>
-        </p:style>
-        <p:txBody>
-          <a:bodyPr lIns="720" tIns="720" rIns="720" bIns="720" anchor="ctr">
-            <a:normAutofit/>
-          </a:bodyPr>
-          <a:p>
-            <a:pPr algn="ctr" defTabSz="914400">
+          <a:ln w="12700">
+            <a:solidFill>
+              <a:srgbClr val="555A60">
+                <a:alpha val="88000"/>
+              </a:srgbClr>
+            </a:solidFill>
+            <a:round/>
+          </a:ln>
+        </p:spPr>
+        <p:style>
+          <a:lnRef idx="0"/>
+          <a:fillRef idx="0"/>
+          <a:effectRef idx="0"/>
+          <a:fontRef idx="minor"/>
+        </p:style>
+        <p:txBody>
+          <a:bodyPr lIns="90000" tIns="45000" rIns="90000" bIns="45000" anchor="t">
+            <a:noAutofit/>
+          </a:bodyPr>
+          <a:p>
+            <a:pPr defTabSz="914400">
               <a:lnSpc>
                 <a:spcPct val="100000"/>
               </a:lnSpc>
+              <a:spcBef>
+                <a:spcPts val="1191"/>
+              </a:spcBef>
+              <a:spcAft>
+                <a:spcPts val="992"/>
+              </a:spcAft>
               <a:tabLst>
                 <a:tab pos="0" algn="l"/>
               </a:tabLst>
             </a:pPr>
             <a:r>
-              <a:rPr lang="en-US" sz="1300" b="1" u="none" strike="noStrike">
+              <a:rPr lang="en-US" sz="1800" b="0" u="none" strike="noStrike">
                 <a:solidFill>
-                  <a:srgbClr val="F2F3F5"/>
+                  <a:srgbClr val="E7E7E7"/>
                 </a:solidFill>
                 <a:effectLst/>
                 <a:uFillTx/>
                 <a:latin typeface="IBM Plex Sans"/>
-                <a:ea typeface="Aptos"/>
+                <a:ea typeface="DejaVu Sans Mono"/>
               </a:rPr>
-              <a:t>1</a:t>
+              <a:t> # List Kubernetes objects and CRDs</a:t>
             </a:r>
-            <a:endParaRPr lang="en-US" sz="1300" b="0" u="none" strike="noStrike">
-              <a:solidFill>
-                <a:srgbClr val="FFFFFF"/>
-              </a:solidFill>
-              <a:effectLst/>
-              <a:uFillTx/>
-              <a:latin typeface="Arial"/>
-            </a:endParaRPr>
-          </a:p>
-        </p:txBody>
-      </p:sp>
-      <p:sp>
-        <p:nvSpPr>
-          <p:cNvPr id="135" name="Text 25"/>
-          <p:cNvSpPr/>
-          <p:nvPr/>
-        </p:nvSpPr>
-        <p:spPr>
-          <a:xfrm>
-            <a:off x="1463040" y="1316880"/>
-            <a:ext cx="3976560" cy="346320"/>
+            <a:endParaRPr lang="en-US" sz="1800" b="0" u="none" strike="noStrike">
+              <a:solidFill>
+                <a:srgbClr val="FFFFFF"/>
+              </a:solidFill>
+              <a:effectLst/>
+              <a:uFillTx/>
+              <a:latin typeface="Arial"/>
+            </a:endParaRPr>
+          </a:p>
+          <a:p>
+            <a:pPr defTabSz="914400">
+              <a:lnSpc>
+                <a:spcPct val="100000"/>
+              </a:lnSpc>
+              <a:spcBef>
+                <a:spcPts val="1191"/>
+              </a:spcBef>
+              <a:spcAft>
+                <a:spcPts val="992"/>
+              </a:spcAft>
+              <a:tabLst>
+                <a:tab pos="0" algn="l"/>
+              </a:tabLst>
+            </a:pPr>
+            <a:r>
+              <a:rPr lang="en-US" sz="1800" b="0" u="none" strike="noStrike">
+                <a:solidFill>
+                  <a:srgbClr val="E7E7E7"/>
+                </a:solidFill>
+                <a:effectLst/>
+                <a:uFillTx/>
+                <a:latin typeface="IBM Plex Sans"/>
+                <a:ea typeface="DejaVu Sans Mono"/>
+              </a:rPr>
+              <a:t>bloodhound-kube collect –discovery-list</a:t>
+            </a:r>
+            <a:endParaRPr lang="en-US" sz="1800" b="0" u="none" strike="noStrike">
+              <a:solidFill>
+                <a:srgbClr val="FFFFFF"/>
+              </a:solidFill>
+              <a:effectLst/>
+              <a:uFillTx/>
+              <a:latin typeface="Arial"/>
+            </a:endParaRPr>
+          </a:p>
+          <a:p>
+            <a:pPr defTabSz="914400">
+              <a:lnSpc>
+                <a:spcPct val="100000"/>
+              </a:lnSpc>
+              <a:spcBef>
+                <a:spcPts val="1191"/>
+              </a:spcBef>
+              <a:spcAft>
+                <a:spcPts val="992"/>
+              </a:spcAft>
+              <a:tabLst>
+                <a:tab pos="0" algn="l"/>
+              </a:tabLst>
+            </a:pPr>
+            <a:r>
+              <a:rPr lang="en-US" sz="1800" b="0" u="none" strike="noStrike">
+                <a:solidFill>
+                  <a:srgbClr val="E7E7E7"/>
+                </a:solidFill>
+                <a:effectLst/>
+                <a:uFillTx/>
+                <a:latin typeface="IBM Plex Sans"/>
+                <a:ea typeface="DejaVu Sans Mono"/>
+              </a:rPr>
+              <a:t># Collect all from Multiple clusters</a:t>
+            </a:r>
+            <a:endParaRPr lang="en-US" sz="1800" b="0" u="none" strike="noStrike">
+              <a:solidFill>
+                <a:srgbClr val="FFFFFF"/>
+              </a:solidFill>
+              <a:effectLst/>
+              <a:uFillTx/>
+              <a:latin typeface="Arial"/>
+            </a:endParaRPr>
+          </a:p>
+          <a:p>
+            <a:pPr defTabSz="914400">
+              <a:lnSpc>
+                <a:spcPct val="100000"/>
+              </a:lnSpc>
+              <a:spcBef>
+                <a:spcPts val="1191"/>
+              </a:spcBef>
+              <a:spcAft>
+                <a:spcPts val="992"/>
+              </a:spcAft>
+              <a:tabLst>
+                <a:tab pos="0" algn="l"/>
+              </a:tabLst>
+            </a:pPr>
+            <a:r>
+              <a:rPr lang="en-US" sz="1800" b="0" u="none" strike="noStrike">
+                <a:solidFill>
+                  <a:srgbClr val="E7E7E7"/>
+                </a:solidFill>
+                <a:effectLst/>
+                <a:uFillTx/>
+                <a:latin typeface="IBM Plex Sans"/>
+                <a:ea typeface="DejaVu Sans Mono"/>
+              </a:rPr>
+              <a:t>bloodhound-kube collect -C clusters.yml -A --scope all </a:t>
+            </a:r>
+            <a:endParaRPr lang="en-US" sz="1800" b="0" u="none" strike="noStrike">
+              <a:solidFill>
+                <a:srgbClr val="FFFFFF"/>
+              </a:solidFill>
+              <a:effectLst/>
+              <a:uFillTx/>
+              <a:latin typeface="Arial"/>
+            </a:endParaRPr>
+          </a:p>
+          <a:p>
+            <a:pPr defTabSz="914400">
+              <a:lnSpc>
+                <a:spcPct val="100000"/>
+              </a:lnSpc>
+              <a:spcBef>
+                <a:spcPts val="1191"/>
+              </a:spcBef>
+              <a:spcAft>
+                <a:spcPts val="992"/>
+              </a:spcAft>
+              <a:tabLst>
+                <a:tab pos="0" algn="l"/>
+              </a:tabLst>
+            </a:pPr>
+            <a:r>
+              <a:rPr lang="en-US" sz="1800" b="0" u="none" strike="noStrike">
+                <a:solidFill>
+                  <a:srgbClr val="E7E7E7"/>
+                </a:solidFill>
+                <a:effectLst/>
+                <a:uFillTx/>
+                <a:latin typeface="IBM Plex Sans"/>
+                <a:ea typeface="DejaVu Sans Mono"/>
+              </a:rPr>
+              <a:t># Resume interrupted collection</a:t>
+            </a:r>
+            <a:endParaRPr lang="en-US" sz="1800" b="0" u="none" strike="noStrike">
+              <a:solidFill>
+                <a:srgbClr val="FFFFFF"/>
+              </a:solidFill>
+              <a:effectLst/>
+              <a:uFillTx/>
+              <a:latin typeface="Arial"/>
+            </a:endParaRPr>
+          </a:p>
+          <a:p>
+            <a:pPr defTabSz="914400">
+              <a:lnSpc>
+                <a:spcPct val="100000"/>
+              </a:lnSpc>
+              <a:spcBef>
+                <a:spcPts val="1191"/>
+              </a:spcBef>
+              <a:spcAft>
+                <a:spcPts val="992"/>
+              </a:spcAft>
+              <a:tabLst>
+                <a:tab pos="0" algn="l"/>
+              </a:tabLst>
+            </a:pPr>
+            <a:r>
+              <a:rPr lang="en-US" sz="1800" b="0" u="none" strike="noStrike">
+                <a:solidFill>
+                  <a:srgbClr val="E7E7E7"/>
+                </a:solidFill>
+                <a:effectLst/>
+                <a:uFillTx/>
+                <a:latin typeface="IBM Plex Sans"/>
+                <a:ea typeface="DejaVu Sans Mono"/>
+              </a:rPr>
+              <a:t>bloodhound-kube collect --fetch-mode-full -A -C clusters.yml # Ctrl+Z out of the collection to produce a checkpoint.</a:t>
+            </a:r>
+            <a:endParaRPr lang="en-US" sz="1800" b="0" u="none" strike="noStrike">
+              <a:solidFill>
+                <a:srgbClr val="FFFFFF"/>
+              </a:solidFill>
+              <a:effectLst/>
+              <a:uFillTx/>
+              <a:latin typeface="Arial"/>
+            </a:endParaRPr>
+          </a:p>
+          <a:p>
+            <a:pPr defTabSz="914400">
+              <a:lnSpc>
+                <a:spcPct val="100000"/>
+              </a:lnSpc>
+              <a:spcBef>
+                <a:spcPts val="1191"/>
+              </a:spcBef>
+              <a:spcAft>
+                <a:spcPts val="992"/>
+              </a:spcAft>
+              <a:tabLst>
+                <a:tab pos="0" algn="l"/>
+              </a:tabLst>
+            </a:pPr>
+            <a:r>
+              <a:rPr lang="en-US" sz="1800" b="0" u="none" strike="noStrike">
+                <a:solidFill>
+                  <a:srgbClr val="E7E7E7"/>
+                </a:solidFill>
+                <a:effectLst/>
+                <a:uFillTx/>
+                <a:latin typeface="IBM Plex Sans"/>
+                <a:ea typeface="DejaVu Sans Mono"/>
+              </a:rPr>
+              <a:t>bloodhound-kube collect -C clusters.yml --resume</a:t>
+            </a:r>
+            <a:endParaRPr lang="en-US" sz="1800" b="0" u="none" strike="noStrike">
+              <a:solidFill>
+                <a:srgbClr val="FFFFFF"/>
+              </a:solidFill>
+              <a:effectLst/>
+              <a:uFillTx/>
+              <a:latin typeface="Arial"/>
+            </a:endParaRPr>
+          </a:p>
+          <a:p>
+            <a:pPr defTabSz="914400">
+              <a:lnSpc>
+                <a:spcPct val="100000"/>
+              </a:lnSpc>
+              <a:spcBef>
+                <a:spcPts val="1191"/>
+              </a:spcBef>
+              <a:spcAft>
+                <a:spcPts val="992"/>
+              </a:spcAft>
+              <a:tabLst>
+                <a:tab pos="0" algn="l"/>
+              </a:tabLst>
+            </a:pPr>
+            <a:r>
+              <a:rPr lang="en-US" sz="1800" b="0" u="none" strike="noStrike">
+                <a:solidFill>
+                  <a:srgbClr val="E7E7E7"/>
+                </a:solidFill>
+                <a:effectLst/>
+                <a:uFillTx/>
+                <a:latin typeface="IBM Plex Sans"/>
+                <a:ea typeface="DejaVu Sans Mono"/>
+              </a:rPr>
+              <a:t># Collect a explicit resource types</a:t>
+            </a:r>
+            <a:endParaRPr lang="en-US" sz="1800" b="0" u="none" strike="noStrike">
+              <a:solidFill>
+                <a:srgbClr val="FFFFFF"/>
+              </a:solidFill>
+              <a:effectLst/>
+              <a:uFillTx/>
+              <a:latin typeface="Arial"/>
+            </a:endParaRPr>
+          </a:p>
+          <a:p>
+            <a:pPr defTabSz="914400">
+              <a:lnSpc>
+                <a:spcPct val="100000"/>
+              </a:lnSpc>
+              <a:spcBef>
+                <a:spcPts val="1191"/>
+              </a:spcBef>
+              <a:spcAft>
+                <a:spcPts val="992"/>
+              </a:spcAft>
+              <a:tabLst>
+                <a:tab pos="0" algn="l"/>
+              </a:tabLst>
+            </a:pPr>
+            <a:r>
+              <a:rPr lang="en-US" sz="1800" b="0" u="none" strike="noStrike">
+                <a:solidFill>
+                  <a:srgbClr val="E7E7E7"/>
+                </a:solidFill>
+                <a:effectLst/>
+                <a:uFillTx/>
+                <a:latin typeface="IBM Plex Sans"/>
+                <a:ea typeface="DejaVu Sans Mono"/>
+              </a:rPr>
+              <a:t>bloodhound-kube collect -A --type configmaps,secrets --redacted --cluster demo-1 --output ./output/explicit.jsonl                                                            </a:t>
+            </a:r>
+            <a:endParaRPr lang="en-US" sz="1800" b="0" u="none" strike="noStrike">
+              <a:solidFill>
+                <a:srgbClr val="FFFFFF"/>
+              </a:solidFill>
+              <a:effectLst/>
+              <a:uFillTx/>
+              <a:latin typeface="Arial"/>
+            </a:endParaRPr>
+          </a:p>
+        </p:txBody>
+      </p:sp>
+      <p:sp>
+        <p:nvSpPr>
+          <p:cNvPr id="135" name="Text 35"/>
+          <p:cNvSpPr/>
+          <p:nvPr/>
+        </p:nvSpPr>
+        <p:spPr>
+          <a:xfrm>
+            <a:off x="6236280" y="1389960"/>
+            <a:ext cx="4945320" cy="296280"/>
           </a:xfrm>
           <a:prstGeom prst="rect">
             <a:avLst/>
@@ -9121,7 +10845,7 @@
           <a:fontRef idx="minor"/>
         </p:style>
         <p:txBody>
-          <a:bodyPr lIns="720" tIns="720" rIns="720" bIns="720" anchor="ctr">
+          <a:bodyPr lIns="0" tIns="0" rIns="0" bIns="0" anchor="ctr">
             <a:normAutofit/>
           </a:bodyPr>
           <a:p>
@@ -9133,105 +10857,27 @@
                 <a:tab pos="0" algn="l"/>
               </a:tabLst>
             </a:pPr>
-            <a:r>
-              <a:rPr lang="en-US" sz="1800" b="0" u="none" strike="noStrike">
-                <a:solidFill>
-                  <a:srgbClr val="D4D6DA"/>
-                </a:solidFill>
-                <a:effectLst/>
-                <a:uFillTx/>
-                <a:latin typeface="IBM Plex Sans"/>
-                <a:ea typeface="Aptos"/>
-              </a:rPr>
-              <a:t>Build the binary.</a:t>
-            </a:r>
-            <a:endParaRPr lang="en-US" sz="1800" b="0" u="none" strike="noStrike">
-              <a:solidFill>
-                <a:srgbClr val="FFFFFF"/>
-              </a:solidFill>
-              <a:effectLst/>
-              <a:uFillTx/>
-              <a:latin typeface="Arial"/>
-            </a:endParaRPr>
-          </a:p>
-        </p:txBody>
-      </p:sp>
-      <p:sp>
-        <p:nvSpPr>
-          <p:cNvPr id="136" name="Text 26"/>
-          <p:cNvSpPr/>
-          <p:nvPr/>
-        </p:nvSpPr>
-        <p:spPr>
-          <a:xfrm>
-            <a:off x="850320" y="2075760"/>
-            <a:ext cx="392040" cy="392040"/>
-          </a:xfrm>
-          <a:prstGeom prst="ellipse">
-            <a:avLst/>
-          </a:prstGeom>
-          <a:solidFill>
-            <a:srgbClr val="17191C"/>
-          </a:solidFill>
-          <a:ln w="15240">
-            <a:solidFill>
-              <a:srgbClr val="555A60"/>
-            </a:solidFill>
-            <a:round/>
-          </a:ln>
-        </p:spPr>
-        <p:style>
-          <a:lnRef idx="0"/>
-          <a:fillRef idx="0"/>
-          <a:effectRef idx="0"/>
-          <a:fontRef idx="minor"/>
-        </p:style>
-        <p:txBody>
-          <a:bodyPr lIns="720" tIns="720" rIns="720" bIns="720" anchor="ctr">
-            <a:normAutofit/>
-          </a:bodyPr>
-          <a:p>
-            <a:pPr algn="ctr" defTabSz="914400">
-              <a:lnSpc>
-                <a:spcPct val="100000"/>
-              </a:lnSpc>
-              <a:tabLst>
-                <a:tab pos="0" algn="l"/>
-              </a:tabLst>
-            </a:pPr>
-            <a:r>
-              <a:rPr lang="en-US" sz="1300" b="1" u="none" strike="noStrike">
-                <a:solidFill>
-                  <a:srgbClr val="F2F3F5"/>
-                </a:solidFill>
-                <a:effectLst/>
-                <a:uFillTx/>
-                <a:latin typeface="IBM Plex Sans"/>
-                <a:ea typeface="Aptos"/>
-              </a:rPr>
-              <a:t>2</a:t>
-            </a:r>
-            <a:endParaRPr lang="en-US" sz="1300" b="0" u="none" strike="noStrike">
-              <a:solidFill>
-                <a:srgbClr val="FFFFFF"/>
-              </a:solidFill>
-              <a:effectLst/>
-              <a:uFillTx/>
-              <a:latin typeface="Arial"/>
-            </a:endParaRPr>
-          </a:p>
-        </p:txBody>
-      </p:sp>
-      <p:sp>
-        <p:nvSpPr>
-          <p:cNvPr id="137" name="Text 27"/>
-          <p:cNvSpPr/>
-          <p:nvPr/>
-        </p:nvSpPr>
-        <p:spPr>
-          <a:xfrm>
-            <a:off x="1463040" y="2066400"/>
-            <a:ext cx="3976560" cy="346320"/>
+            <a:endParaRPr lang="en-US" sz="1800" b="0" u="none" strike="noStrike">
+              <a:solidFill>
+                <a:srgbClr val="FFFFFF"/>
+              </a:solidFill>
+              <a:effectLst/>
+              <a:uFillTx/>
+              <a:latin typeface="Arial"/>
+            </a:endParaRPr>
+          </a:p>
+        </p:txBody>
+      </p:sp>
+      <p:sp>
+        <p:nvSpPr>
+          <p:cNvPr id="136" name="Text 36"/>
+          <p:cNvSpPr/>
+          <p:nvPr/>
+        </p:nvSpPr>
+        <p:spPr>
+          <a:xfrm>
+            <a:off x="6766560" y="2743200"/>
+            <a:ext cx="4945320" cy="434880"/>
           </a:xfrm>
           <a:prstGeom prst="rect">
             <a:avLst/>
@@ -9248,8 +10894,8 @@
           <a:fontRef idx="minor"/>
         </p:style>
         <p:txBody>
-          <a:bodyPr lIns="720" tIns="720" rIns="720" bIns="720" anchor="ctr">
-            <a:normAutofit fontScale="85000" lnSpcReduction="9999"/>
+          <a:bodyPr lIns="0" tIns="0" rIns="0" bIns="0" anchor="ctr">
+            <a:normAutofit/>
           </a:bodyPr>
           <a:p>
             <a:pPr defTabSz="914400">
@@ -9260,105 +10906,27 @@
                 <a:tab pos="0" algn="l"/>
               </a:tabLst>
             </a:pPr>
-            <a:r>
-              <a:rPr lang="en-US" sz="1800" b="0" u="none" strike="noStrike">
-                <a:solidFill>
-                  <a:srgbClr val="D4D6DA"/>
-                </a:solidFill>
-                <a:effectLst/>
-                <a:uFillTx/>
-                <a:latin typeface="IBM Plex Sans"/>
-                <a:ea typeface="Aptos"/>
-              </a:rPr>
-              <a:t>Run collection against the demo contexts.</a:t>
-            </a:r>
-            <a:endParaRPr lang="en-US" sz="1800" b="0" u="none" strike="noStrike">
-              <a:solidFill>
-                <a:srgbClr val="FFFFFF"/>
-              </a:solidFill>
-              <a:effectLst/>
-              <a:uFillTx/>
-              <a:latin typeface="Arial"/>
-            </a:endParaRPr>
-          </a:p>
-        </p:txBody>
-      </p:sp>
-      <p:sp>
-        <p:nvSpPr>
-          <p:cNvPr id="138" name="Text 28"/>
-          <p:cNvSpPr/>
-          <p:nvPr/>
-        </p:nvSpPr>
-        <p:spPr>
-          <a:xfrm>
-            <a:off x="850320" y="2825640"/>
-            <a:ext cx="392040" cy="392040"/>
-          </a:xfrm>
-          <a:prstGeom prst="ellipse">
-            <a:avLst/>
-          </a:prstGeom>
-          <a:solidFill>
-            <a:srgbClr val="17191C"/>
-          </a:solidFill>
-          <a:ln w="15240">
-            <a:solidFill>
-              <a:srgbClr val="555A60"/>
-            </a:solidFill>
-            <a:round/>
-          </a:ln>
-        </p:spPr>
-        <p:style>
-          <a:lnRef idx="0"/>
-          <a:fillRef idx="0"/>
-          <a:effectRef idx="0"/>
-          <a:fontRef idx="minor"/>
-        </p:style>
-        <p:txBody>
-          <a:bodyPr lIns="720" tIns="720" rIns="720" bIns="720" anchor="ctr">
-            <a:normAutofit/>
-          </a:bodyPr>
-          <a:p>
-            <a:pPr algn="ctr" defTabSz="914400">
-              <a:lnSpc>
-                <a:spcPct val="100000"/>
-              </a:lnSpc>
-              <a:tabLst>
-                <a:tab pos="0" algn="l"/>
-              </a:tabLst>
-            </a:pPr>
-            <a:r>
-              <a:rPr lang="en-US" sz="1300" b="1" u="none" strike="noStrike">
-                <a:solidFill>
-                  <a:srgbClr val="F2F3F5"/>
-                </a:solidFill>
-                <a:effectLst/>
-                <a:uFillTx/>
-                <a:latin typeface="IBM Plex Sans"/>
-                <a:ea typeface="Aptos"/>
-              </a:rPr>
-              <a:t>3</a:t>
-            </a:r>
-            <a:endParaRPr lang="en-US" sz="1300" b="0" u="none" strike="noStrike">
-              <a:solidFill>
-                <a:srgbClr val="FFFFFF"/>
-              </a:solidFill>
-              <a:effectLst/>
-              <a:uFillTx/>
-              <a:latin typeface="Arial"/>
-            </a:endParaRPr>
-          </a:p>
-        </p:txBody>
-      </p:sp>
-      <p:sp>
-        <p:nvSpPr>
-          <p:cNvPr id="139" name="Text 29"/>
-          <p:cNvSpPr/>
-          <p:nvPr/>
-        </p:nvSpPr>
-        <p:spPr>
-          <a:xfrm>
-            <a:off x="1463040" y="2816280"/>
-            <a:ext cx="3976560" cy="346320"/>
+            <a:endParaRPr lang="en-US" sz="1800" b="0" u="none" strike="noStrike">
+              <a:solidFill>
+                <a:srgbClr val="FFFFFF"/>
+              </a:solidFill>
+              <a:effectLst/>
+              <a:uFillTx/>
+              <a:latin typeface="Arial"/>
+            </a:endParaRPr>
+          </a:p>
+        </p:txBody>
+      </p:sp>
+      <p:sp>
+        <p:nvSpPr>
+          <p:cNvPr id="137" name="Text 37"/>
+          <p:cNvSpPr/>
+          <p:nvPr/>
+        </p:nvSpPr>
+        <p:spPr>
+          <a:xfrm>
+            <a:off x="6236280" y="2036880"/>
+            <a:ext cx="4945320" cy="296280"/>
           </a:xfrm>
           <a:prstGeom prst="rect">
             <a:avLst/>
@@ -9375,7 +10943,48 @@
           <a:fontRef idx="minor"/>
         </p:style>
         <p:txBody>
-          <a:bodyPr lIns="720" tIns="720" rIns="720" bIns="720" anchor="ctr">
+          <a:bodyPr lIns="0" tIns="0" rIns="0" bIns="0" anchor="ctr">
+            <a:normAutofit fontScale="77500" lnSpcReduction="19999"/>
+          </a:bodyPr>
+          <a:p>
+            <a:endParaRPr lang="en-US" sz="920" b="0" u="none" strike="noStrike">
+              <a:solidFill>
+                <a:schemeClr val="dk1"/>
+              </a:solidFill>
+              <a:effectLst/>
+              <a:uFillTx/>
+              <a:latin typeface="IBM Plex Sans"/>
+            </a:endParaRPr>
+          </a:p>
+        </p:txBody>
+      </p:sp>
+      <p:sp>
+        <p:nvSpPr>
+          <p:cNvPr id="138" name="Text 38"/>
+          <p:cNvSpPr/>
+          <p:nvPr/>
+        </p:nvSpPr>
+        <p:spPr>
+          <a:xfrm>
+            <a:off x="6236280" y="2360160"/>
+            <a:ext cx="4945320" cy="296280"/>
+          </a:xfrm>
+          <a:prstGeom prst="rect">
+            <a:avLst/>
+          </a:prstGeom>
+          <a:noFill/>
+          <a:ln w="0">
+            <a:noFill/>
+          </a:ln>
+        </p:spPr>
+        <p:style>
+          <a:lnRef idx="0"/>
+          <a:fillRef idx="0"/>
+          <a:effectRef idx="0"/>
+          <a:fontRef idx="minor"/>
+        </p:style>
+        <p:txBody>
+          <a:bodyPr lIns="0" tIns="0" rIns="0" bIns="0" anchor="ctr">
             <a:normAutofit/>
           </a:bodyPr>
           <a:p>
@@ -9387,105 +10996,27 @@
                 <a:tab pos="0" algn="l"/>
               </a:tabLst>
             </a:pPr>
-            <a:r>
-              <a:rPr lang="en-US" sz="1800" b="0" u="none" strike="noStrike">
-                <a:solidFill>
-                  <a:srgbClr val="D4D6DA"/>
-                </a:solidFill>
-                <a:effectLst/>
-                <a:uFillTx/>
-                <a:latin typeface="IBM Plex Sans"/>
-                <a:ea typeface="Aptos"/>
-              </a:rPr>
-              <a:t>Upload or import the OpenGraph data.</a:t>
-            </a:r>
-            <a:endParaRPr lang="en-US" sz="1800" b="0" u="none" strike="noStrike">
-              <a:solidFill>
-                <a:srgbClr val="FFFFFF"/>
-              </a:solidFill>
-              <a:effectLst/>
-              <a:uFillTx/>
-              <a:latin typeface="Arial"/>
-            </a:endParaRPr>
-          </a:p>
-        </p:txBody>
-      </p:sp>
-      <p:sp>
-        <p:nvSpPr>
-          <p:cNvPr id="140" name="Text 30"/>
-          <p:cNvSpPr/>
-          <p:nvPr/>
-        </p:nvSpPr>
-        <p:spPr>
-          <a:xfrm>
-            <a:off x="850320" y="3575160"/>
-            <a:ext cx="392040" cy="392040"/>
-          </a:xfrm>
-          <a:prstGeom prst="ellipse">
-            <a:avLst/>
-          </a:prstGeom>
-          <a:solidFill>
-            <a:srgbClr val="3A1111"/>
-          </a:solidFill>
-          <a:ln w="15240">
-            <a:solidFill>
-              <a:srgbClr val="E53935"/>
-            </a:solidFill>
-            <a:round/>
-          </a:ln>
-        </p:spPr>
-        <p:style>
-          <a:lnRef idx="0"/>
-          <a:fillRef idx="0"/>
-          <a:effectRef idx="0"/>
-          <a:fontRef idx="minor"/>
-        </p:style>
-        <p:txBody>
-          <a:bodyPr lIns="720" tIns="720" rIns="720" bIns="720" anchor="ctr">
-            <a:normAutofit/>
-          </a:bodyPr>
-          <a:p>
-            <a:pPr algn="ctr" defTabSz="914400">
-              <a:lnSpc>
-                <a:spcPct val="100000"/>
-              </a:lnSpc>
-              <a:tabLst>
-                <a:tab pos="0" algn="l"/>
-              </a:tabLst>
-            </a:pPr>
-            <a:r>
-              <a:rPr lang="en-US" sz="1300" b="1" u="none" strike="noStrike">
-                <a:solidFill>
-                  <a:srgbClr val="F2F3F5"/>
-                </a:solidFill>
-                <a:effectLst/>
-                <a:uFillTx/>
-                <a:latin typeface="IBM Plex Sans"/>
-                <a:ea typeface="Aptos"/>
-              </a:rPr>
-              <a:t>4</a:t>
-            </a:r>
-            <a:endParaRPr lang="en-US" sz="1300" b="0" u="none" strike="noStrike">
-              <a:solidFill>
-                <a:srgbClr val="FFFFFF"/>
-              </a:solidFill>
-              <a:effectLst/>
-              <a:uFillTx/>
-              <a:latin typeface="Arial"/>
-            </a:endParaRPr>
-          </a:p>
-        </p:txBody>
-      </p:sp>
-      <p:sp>
-        <p:nvSpPr>
-          <p:cNvPr id="141" name="Text 31"/>
-          <p:cNvSpPr/>
-          <p:nvPr/>
-        </p:nvSpPr>
-        <p:spPr>
-          <a:xfrm>
-            <a:off x="1463040" y="3566160"/>
-            <a:ext cx="3976560" cy="346320"/>
+            <a:endParaRPr lang="en-US" sz="1800" b="0" u="none" strike="noStrike">
+              <a:solidFill>
+                <a:srgbClr val="FFFFFF"/>
+              </a:solidFill>
+              <a:effectLst/>
+              <a:uFillTx/>
+              <a:latin typeface="Arial"/>
+            </a:endParaRPr>
+          </a:p>
+        </p:txBody>
+      </p:sp>
+      <p:sp>
+        <p:nvSpPr>
+          <p:cNvPr id="139" name="Text 39"/>
+          <p:cNvSpPr/>
+          <p:nvPr/>
+        </p:nvSpPr>
+        <p:spPr>
+          <a:xfrm>
+            <a:off x="6236280" y="2683800"/>
+            <a:ext cx="4945320" cy="554040"/>
           </a:xfrm>
           <a:prstGeom prst="rect">
             <a:avLst/>
@@ -9502,8 +11033,8 @@
           <a:fontRef idx="minor"/>
         </p:style>
         <p:txBody>
-          <a:bodyPr lIns="720" tIns="720" rIns="720" bIns="720" anchor="ctr">
-            <a:normAutofit fontScale="92500" lnSpcReduction="9999"/>
+          <a:bodyPr lIns="0" tIns="0" rIns="0" bIns="0" anchor="ctr">
+            <a:normAutofit/>
           </a:bodyPr>
           <a:p>
             <a:pPr defTabSz="914400">
@@ -9514,105 +11045,123 @@
                 <a:tab pos="0" algn="l"/>
               </a:tabLst>
             </a:pPr>
-            <a:r>
-              <a:rPr lang="en-US" sz="1800" b="0" u="none" strike="noStrike">
-                <a:solidFill>
-                  <a:srgbClr val="D4D6DA"/>
-                </a:solidFill>
-                <a:effectLst/>
-                <a:uFillTx/>
-                <a:latin typeface="IBM Plex Sans"/>
-                <a:ea typeface="Aptos"/>
-              </a:rPr>
-              <a:t>Run prepared Kubernetes path queries.</a:t>
-            </a:r>
-            <a:endParaRPr lang="en-US" sz="1800" b="0" u="none" strike="noStrike">
-              <a:solidFill>
-                <a:srgbClr val="FFFFFF"/>
-              </a:solidFill>
-              <a:effectLst/>
-              <a:uFillTx/>
-              <a:latin typeface="Arial"/>
-            </a:endParaRPr>
-          </a:p>
-        </p:txBody>
-      </p:sp>
-      <p:sp>
-        <p:nvSpPr>
-          <p:cNvPr id="142" name="Text 32"/>
-          <p:cNvSpPr/>
-          <p:nvPr/>
-        </p:nvSpPr>
-        <p:spPr>
-          <a:xfrm>
-            <a:off x="850320" y="4325040"/>
-            <a:ext cx="392040" cy="392040"/>
-          </a:xfrm>
-          <a:prstGeom prst="ellipse">
-            <a:avLst/>
-          </a:prstGeom>
-          <a:solidFill>
-            <a:srgbClr val="3A1111"/>
-          </a:solidFill>
-          <a:ln w="15240">
-            <a:solidFill>
-              <a:srgbClr val="E53935"/>
-            </a:solidFill>
-            <a:round/>
-          </a:ln>
-        </p:spPr>
-        <p:style>
-          <a:lnRef idx="0"/>
-          <a:fillRef idx="0"/>
-          <a:effectRef idx="0"/>
-          <a:fontRef idx="minor"/>
-        </p:style>
-        <p:txBody>
-          <a:bodyPr lIns="720" tIns="720" rIns="720" bIns="720" anchor="ctr">
+            <a:endParaRPr lang="en-US" sz="1800" b="0" u="none" strike="noStrike">
+              <a:solidFill>
+                <a:srgbClr val="FFFFFF"/>
+              </a:solidFill>
+              <a:effectLst/>
+              <a:uFillTx/>
+              <a:latin typeface="Arial"/>
+            </a:endParaRPr>
+          </a:p>
+        </p:txBody>
+      </p:sp>
+      <p:sp>
+        <p:nvSpPr>
+          <p:cNvPr id="140" name="Text 40"/>
+          <p:cNvSpPr/>
+          <p:nvPr/>
+        </p:nvSpPr>
+        <p:spPr>
+          <a:xfrm>
+            <a:off x="6236280" y="3007080"/>
+            <a:ext cx="4945320" cy="296280"/>
+          </a:xfrm>
+          <a:prstGeom prst="rect">
+            <a:avLst/>
+          </a:prstGeom>
+          <a:noFill/>
+          <a:ln w="0">
+            <a:noFill/>
+          </a:ln>
+        </p:spPr>
+        <p:style>
+          <a:lnRef idx="0"/>
+          <a:fillRef idx="0"/>
+          <a:effectRef idx="0"/>
+          <a:fontRef idx="minor"/>
+        </p:style>
+        <p:txBody>
+          <a:bodyPr lIns="0" tIns="0" rIns="0" bIns="0" anchor="ctr">
+            <a:normAutofit fontScale="77500" lnSpcReduction="19999"/>
+          </a:bodyPr>
+          <a:p>
+            <a:endParaRPr lang="en-US" sz="920" b="0" u="none" strike="noStrike">
+              <a:solidFill>
+                <a:schemeClr val="dk1"/>
+              </a:solidFill>
+              <a:effectLst/>
+              <a:uFillTx/>
+              <a:latin typeface="IBM Plex Sans"/>
+            </a:endParaRPr>
+          </a:p>
+        </p:txBody>
+      </p:sp>
+      <p:sp>
+        <p:nvSpPr>
+          <p:cNvPr id="141" name="Text 41"/>
+          <p:cNvSpPr/>
+          <p:nvPr/>
+        </p:nvSpPr>
+        <p:spPr>
+          <a:xfrm>
+            <a:off x="6126480" y="18360"/>
+            <a:ext cx="5164920" cy="6839640"/>
+          </a:xfrm>
+          <a:prstGeom prst="rect">
+            <a:avLst/>
+          </a:prstGeom>
+          <a:noFill/>
+          <a:ln w="0">
+            <a:noFill/>
+          </a:ln>
+        </p:spPr>
+        <p:style>
+          <a:lnRef idx="0"/>
+          <a:fillRef idx="0"/>
+          <a:effectRef idx="0"/>
+          <a:fontRef idx="minor"/>
+        </p:style>
+        <p:txBody>
+          <a:bodyPr lIns="0" tIns="0" rIns="0" bIns="0" anchor="t">
             <a:normAutofit/>
           </a:bodyPr>
           <a:p>
-            <a:pPr algn="ctr" defTabSz="914400">
+            <a:pPr defTabSz="914400">
               <a:lnSpc>
                 <a:spcPct val="100000"/>
               </a:lnSpc>
+              <a:spcBef>
+                <a:spcPts val="1191"/>
+              </a:spcBef>
+              <a:spcAft>
+                <a:spcPts val="992"/>
+              </a:spcAft>
               <a:tabLst>
                 <a:tab pos="0" algn="l"/>
               </a:tabLst>
             </a:pPr>
-            <a:r>
-              <a:rPr lang="en-US" sz="1300" b="1" u="none" strike="noStrike">
-                <a:solidFill>
-                  <a:srgbClr val="F2F3F5"/>
-                </a:solidFill>
-                <a:effectLst/>
-                <a:uFillTx/>
-                <a:latin typeface="IBM Plex Sans"/>
-                <a:ea typeface="Aptos"/>
-              </a:rPr>
-              <a:t>5</a:t>
-            </a:r>
-            <a:endParaRPr lang="en-US" sz="1300" b="0" u="none" strike="noStrike">
-              <a:solidFill>
-                <a:srgbClr val="FFFFFF"/>
-              </a:solidFill>
-              <a:effectLst/>
-              <a:uFillTx/>
-              <a:latin typeface="Arial"/>
-            </a:endParaRPr>
-          </a:p>
-        </p:txBody>
-      </p:sp>
-      <p:sp>
-        <p:nvSpPr>
-          <p:cNvPr id="143" name="Text 33"/>
-          <p:cNvSpPr/>
-          <p:nvPr/>
-        </p:nvSpPr>
-        <p:spPr>
-          <a:xfrm>
-            <a:off x="1463040" y="4316040"/>
-            <a:ext cx="3976560" cy="346320"/>
+            <a:endParaRPr lang="en-US" sz="1800" b="0" u="none" strike="noStrike">
+              <a:solidFill>
+                <a:srgbClr val="FFFFFF"/>
+              </a:solidFill>
+              <a:effectLst/>
+              <a:uFillTx/>
+              <a:latin typeface="Arial"/>
+            </a:endParaRPr>
+          </a:p>
+        </p:txBody>
+      </p:sp>
+      <p:sp>
+        <p:nvSpPr>
+          <p:cNvPr id="142" name="Text 42"/>
+          <p:cNvSpPr/>
+          <p:nvPr/>
+        </p:nvSpPr>
+        <p:spPr>
+          <a:xfrm>
+            <a:off x="6236280" y="3654000"/>
+            <a:ext cx="4945320" cy="525240"/>
           </a:xfrm>
           <a:prstGeom prst="rect">
             <a:avLst/>
@@ -9629,7 +11178,7 @@
           <a:fontRef idx="minor"/>
         </p:style>
         <p:txBody>
-          <a:bodyPr lIns="720" tIns="720" rIns="720" bIns="720" anchor="ctr">
+          <a:bodyPr lIns="0" tIns="0" rIns="0" bIns="0" anchor="ctr">
             <a:normAutofit/>
           </a:bodyPr>
           <a:p>
@@ -9641,517 +11190,7 @@
                 <a:tab pos="0" algn="l"/>
               </a:tabLst>
             </a:pPr>
-            <a:r>
-              <a:rPr lang="en-US" sz="1800" b="0" u="none" strike="noStrike">
-                <a:solidFill>
-                  <a:srgbClr val="D4D6DA"/>
-                </a:solidFill>
-                <a:effectLst/>
-                <a:uFillTx/>
-                <a:latin typeface="IBM Plex Sans"/>
-                <a:ea typeface="Aptos"/>
-              </a:rPr>
-              <a:t>Explain paths</a:t>
-            </a:r>
-            <a:endParaRPr lang="en-US" sz="1800" b="0" u="none" strike="noStrike">
-              <a:solidFill>
-                <a:srgbClr val="FFFFFF"/>
-              </a:solidFill>
-              <a:effectLst/>
-              <a:uFillTx/>
-              <a:latin typeface="Arial"/>
-            </a:endParaRPr>
-          </a:p>
-        </p:txBody>
-      </p:sp>
-      <p:sp>
-        <p:nvSpPr>
-          <p:cNvPr id="144" name="Shape 34"/>
-          <p:cNvSpPr/>
-          <p:nvPr/>
-        </p:nvSpPr>
-        <p:spPr>
-          <a:xfrm>
-            <a:off x="6126480" y="1280160"/>
-            <a:ext cx="5165280" cy="4692240"/>
-          </a:xfrm>
-          <a:prstGeom prst="roundRect">
-            <a:avLst>
-              <a:gd name="adj" fmla="val 1967"/>
-            </a:avLst>
-          </a:prstGeom>
-          <a:solidFill>
-            <a:srgbClr val="070809"/>
-          </a:solidFill>
-          <a:ln w="12700">
-            <a:solidFill>
-              <a:srgbClr val="555A60">
-                <a:alpha val="88000"/>
-              </a:srgbClr>
-            </a:solidFill>
-            <a:round/>
-          </a:ln>
-        </p:spPr>
-        <p:style>
-          <a:lnRef idx="0"/>
-          <a:fillRef idx="0"/>
-          <a:effectRef idx="0"/>
-          <a:fontRef idx="minor"/>
-        </p:style>
-        <p:txBody>
-          <a:bodyPr lIns="90000" tIns="45000" rIns="90000" bIns="45000" anchor="t">
-            <a:noAutofit/>
-          </a:bodyPr>
-          <a:p>
-            <a:endParaRPr lang="en-US" sz="1800" b="0" u="none" strike="noStrike">
-              <a:solidFill>
-                <a:srgbClr val="FFFFFF"/>
-              </a:solidFill>
-              <a:effectLst/>
-              <a:uFillTx/>
-              <a:latin typeface="Arial"/>
-            </a:endParaRPr>
-          </a:p>
-        </p:txBody>
-      </p:sp>
-      <p:sp>
-        <p:nvSpPr>
-          <p:cNvPr id="145" name="Text 35"/>
-          <p:cNvSpPr/>
-          <p:nvPr/>
-        </p:nvSpPr>
-        <p:spPr>
-          <a:xfrm>
-            <a:off x="6236280" y="1389960"/>
-            <a:ext cx="4945680" cy="296640"/>
-          </a:xfrm>
-          <a:prstGeom prst="rect">
-            <a:avLst/>
-          </a:prstGeom>
-          <a:noFill/>
-          <a:ln w="0">
-            <a:noFill/>
-          </a:ln>
-        </p:spPr>
-        <p:style>
-          <a:lnRef idx="0"/>
-          <a:fillRef idx="0"/>
-          <a:effectRef idx="0"/>
-          <a:fontRef idx="minor"/>
-        </p:style>
-        <p:txBody>
-          <a:bodyPr lIns="0" tIns="0" rIns="0" bIns="0" anchor="ctr">
-            <a:normAutofit/>
-          </a:bodyPr>
-          <a:p>
-            <a:pPr defTabSz="914400">
-              <a:lnSpc>
-                <a:spcPct val="100000"/>
-              </a:lnSpc>
-              <a:tabLst>
-                <a:tab pos="0" algn="l"/>
-              </a:tabLst>
-            </a:pPr>
-            <a:r>
-              <a:rPr lang="en-US" sz="1200" b="0" u="none" strike="noStrike">
-                <a:solidFill>
-                  <a:srgbClr val="E7E7E7"/>
-                </a:solidFill>
-                <a:effectLst/>
-                <a:uFillTx/>
-                <a:latin typeface="IBM Plex Sans"/>
-                <a:ea typeface="DejaVu Sans Mono"/>
-              </a:rPr>
-              <a:t># baseline check</a:t>
-            </a:r>
-            <a:endParaRPr lang="en-US" sz="1200" b="0" u="none" strike="noStrike">
-              <a:solidFill>
-                <a:srgbClr val="FFFFFF"/>
-              </a:solidFill>
-              <a:effectLst/>
-              <a:uFillTx/>
-              <a:latin typeface="Arial"/>
-            </a:endParaRPr>
-          </a:p>
-        </p:txBody>
-      </p:sp>
-      <p:sp>
-        <p:nvSpPr>
-          <p:cNvPr id="146" name="Text 36"/>
-          <p:cNvSpPr/>
-          <p:nvPr/>
-        </p:nvSpPr>
-        <p:spPr>
-          <a:xfrm>
-            <a:off x="6236280" y="1785240"/>
-            <a:ext cx="4945680" cy="435240"/>
-          </a:xfrm>
-          <a:prstGeom prst="rect">
-            <a:avLst/>
-          </a:prstGeom>
-          <a:noFill/>
-          <a:ln w="0">
-            <a:noFill/>
-          </a:ln>
-        </p:spPr>
-        <p:style>
-          <a:lnRef idx="0"/>
-          <a:fillRef idx="0"/>
-          <a:effectRef idx="0"/>
-          <a:fontRef idx="minor"/>
-        </p:style>
-        <p:txBody>
-          <a:bodyPr lIns="0" tIns="0" rIns="0" bIns="0" anchor="ctr">
-            <a:normAutofit/>
-          </a:bodyPr>
-          <a:p>
-            <a:pPr defTabSz="914400">
-              <a:lnSpc>
-                <a:spcPct val="100000"/>
-              </a:lnSpc>
-              <a:tabLst>
-                <a:tab pos="0" algn="l"/>
-              </a:tabLst>
-            </a:pPr>
-            <a:r>
-              <a:rPr lang="en-US" sz="1200" b="0" u="none" strike="noStrike">
-                <a:solidFill>
-                  <a:srgbClr val="E7E7E7"/>
-                </a:solidFill>
-                <a:effectLst/>
-                <a:uFillTx/>
-                <a:latin typeface="IBM Plex Sans"/>
-                <a:ea typeface="DejaVu Sans Mono"/>
-              </a:rPr>
-              <a:t>go build -trimpath -ldflags "-s -w" -o bhk .</a:t>
-            </a:r>
-            <a:endParaRPr lang="en-US" sz="1200" b="0" u="none" strike="noStrike">
-              <a:solidFill>
-                <a:srgbClr val="FFFFFF"/>
-              </a:solidFill>
-              <a:effectLst/>
-              <a:uFillTx/>
-              <a:latin typeface="Arial"/>
-            </a:endParaRPr>
-          </a:p>
-        </p:txBody>
-      </p:sp>
-      <p:sp>
-        <p:nvSpPr>
-          <p:cNvPr id="147" name="Text 37"/>
-          <p:cNvSpPr/>
-          <p:nvPr/>
-        </p:nvSpPr>
-        <p:spPr>
-          <a:xfrm>
-            <a:off x="6236280" y="2036880"/>
-            <a:ext cx="4945680" cy="296640"/>
-          </a:xfrm>
-          <a:prstGeom prst="rect">
-            <a:avLst/>
-          </a:prstGeom>
-          <a:noFill/>
-          <a:ln w="0">
-            <a:noFill/>
-          </a:ln>
-        </p:spPr>
-        <p:style>
-          <a:lnRef idx="0"/>
-          <a:fillRef idx="0"/>
-          <a:effectRef idx="0"/>
-          <a:fontRef idx="minor"/>
-        </p:style>
-        <p:txBody>
-          <a:bodyPr lIns="0" tIns="0" rIns="0" bIns="0" anchor="ctr">
-            <a:normAutofit fontScale="77500" lnSpcReduction="19999"/>
-          </a:bodyPr>
-          <a:p>
-            <a:endParaRPr lang="en-US" sz="920" b="0" u="none" strike="noStrike">
-              <a:solidFill>
-                <a:schemeClr val="dk1"/>
-              </a:solidFill>
-              <a:effectLst/>
-              <a:uFillTx/>
-              <a:latin typeface="IBM Plex Sans"/>
-            </a:endParaRPr>
-          </a:p>
-        </p:txBody>
-      </p:sp>
-      <p:sp>
-        <p:nvSpPr>
-          <p:cNvPr id="148" name="Text 38"/>
-          <p:cNvSpPr/>
-          <p:nvPr/>
-        </p:nvSpPr>
-        <p:spPr>
-          <a:xfrm>
-            <a:off x="6236280" y="2360160"/>
-            <a:ext cx="4945680" cy="296640"/>
-          </a:xfrm>
-          <a:prstGeom prst="rect">
-            <a:avLst/>
-          </a:prstGeom>
-          <a:noFill/>
-          <a:ln w="0">
-            <a:noFill/>
-          </a:ln>
-        </p:spPr>
-        <p:style>
-          <a:lnRef idx="0"/>
-          <a:fillRef idx="0"/>
-          <a:effectRef idx="0"/>
-          <a:fontRef idx="minor"/>
-        </p:style>
-        <p:txBody>
-          <a:bodyPr lIns="0" tIns="0" rIns="0" bIns="0" anchor="ctr">
-            <a:normAutofit/>
-          </a:bodyPr>
-          <a:p>
-            <a:pPr defTabSz="914400">
-              <a:lnSpc>
-                <a:spcPct val="100000"/>
-              </a:lnSpc>
-              <a:tabLst>
-                <a:tab pos="0" algn="l"/>
-              </a:tabLst>
-            </a:pPr>
-            <a:r>
-              <a:rPr lang="en-US" sz="1200" b="0" u="none" strike="noStrike">
-                <a:solidFill>
-                  <a:srgbClr val="E7E7E7"/>
-                </a:solidFill>
-                <a:effectLst/>
-                <a:uFillTx/>
-                <a:latin typeface="IBM Plex Sans"/>
-                <a:ea typeface="DejaVu Sans Mono"/>
-              </a:rPr>
-              <a:t># collect + parse</a:t>
-            </a:r>
-            <a:endParaRPr lang="en-US" sz="1200" b="0" u="none" strike="noStrike">
-              <a:solidFill>
-                <a:srgbClr val="FFFFFF"/>
-              </a:solidFill>
-              <a:effectLst/>
-              <a:uFillTx/>
-              <a:latin typeface="Arial"/>
-            </a:endParaRPr>
-          </a:p>
-        </p:txBody>
-      </p:sp>
-      <p:sp>
-        <p:nvSpPr>
-          <p:cNvPr id="149" name="Text 39"/>
-          <p:cNvSpPr/>
-          <p:nvPr/>
-        </p:nvSpPr>
-        <p:spPr>
-          <a:xfrm>
-            <a:off x="6236280" y="2683800"/>
-            <a:ext cx="4945680" cy="554400"/>
-          </a:xfrm>
-          <a:prstGeom prst="rect">
-            <a:avLst/>
-          </a:prstGeom>
-          <a:noFill/>
-          <a:ln w="0">
-            <a:noFill/>
-          </a:ln>
-        </p:spPr>
-        <p:style>
-          <a:lnRef idx="0"/>
-          <a:fillRef idx="0"/>
-          <a:effectRef idx="0"/>
-          <a:fontRef idx="minor"/>
-        </p:style>
-        <p:txBody>
-          <a:bodyPr lIns="0" tIns="0" rIns="0" bIns="0" anchor="ctr">
-            <a:normAutofit/>
-          </a:bodyPr>
-          <a:p>
-            <a:pPr defTabSz="914400">
-              <a:lnSpc>
-                <a:spcPct val="100000"/>
-              </a:lnSpc>
-              <a:tabLst>
-                <a:tab pos="0" algn="l"/>
-              </a:tabLst>
-            </a:pPr>
-            <a:r>
-              <a:rPr lang="en-US" sz="1200" b="0" u="none" strike="noStrike">
-                <a:solidFill>
-                  <a:srgbClr val="E7E7E7"/>
-                </a:solidFill>
-                <a:effectLst/>
-                <a:uFillTx/>
-                <a:latin typeface="IBM Plex Sans"/>
-                <a:ea typeface="DejaVu Sans Mono"/>
-              </a:rPr>
-              <a:t>./bloodhound-kube collect --cluster live-demo --redacted --parsed-output live-demo.json</a:t>
-            </a:r>
-            <a:endParaRPr lang="en-US" sz="1200" b="0" u="none" strike="noStrike">
-              <a:solidFill>
-                <a:srgbClr val="FFFFFF"/>
-              </a:solidFill>
-              <a:effectLst/>
-              <a:uFillTx/>
-              <a:latin typeface="Arial"/>
-            </a:endParaRPr>
-          </a:p>
-        </p:txBody>
-      </p:sp>
-      <p:sp>
-        <p:nvSpPr>
-          <p:cNvPr id="150" name="Text 40"/>
-          <p:cNvSpPr/>
-          <p:nvPr/>
-        </p:nvSpPr>
-        <p:spPr>
-          <a:xfrm>
-            <a:off x="6236280" y="3007080"/>
-            <a:ext cx="4945680" cy="296640"/>
-          </a:xfrm>
-          <a:prstGeom prst="rect">
-            <a:avLst/>
-          </a:prstGeom>
-          <a:noFill/>
-          <a:ln w="0">
-            <a:noFill/>
-          </a:ln>
-        </p:spPr>
-        <p:style>
-          <a:lnRef idx="0"/>
-          <a:fillRef idx="0"/>
-          <a:effectRef idx="0"/>
-          <a:fontRef idx="minor"/>
-        </p:style>
-        <p:txBody>
-          <a:bodyPr lIns="0" tIns="0" rIns="0" bIns="0" anchor="ctr">
-            <a:normAutofit fontScale="77500" lnSpcReduction="19999"/>
-          </a:bodyPr>
-          <a:p>
-            <a:endParaRPr lang="en-US" sz="920" b="0" u="none" strike="noStrike">
-              <a:solidFill>
-                <a:schemeClr val="dk1"/>
-              </a:solidFill>
-              <a:effectLst/>
-              <a:uFillTx/>
-              <a:latin typeface="IBM Plex Sans"/>
-            </a:endParaRPr>
-          </a:p>
-        </p:txBody>
-      </p:sp>
-      <p:sp>
-        <p:nvSpPr>
-          <p:cNvPr id="151" name="Text 41"/>
-          <p:cNvSpPr/>
-          <p:nvPr/>
-        </p:nvSpPr>
-        <p:spPr>
-          <a:xfrm>
-            <a:off x="6236280" y="3330720"/>
-            <a:ext cx="4945680" cy="296640"/>
-          </a:xfrm>
-          <a:prstGeom prst="rect">
-            <a:avLst/>
-          </a:prstGeom>
-          <a:noFill/>
-          <a:ln w="0">
-            <a:noFill/>
-          </a:ln>
-        </p:spPr>
-        <p:style>
-          <a:lnRef idx="0"/>
-          <a:fillRef idx="0"/>
-          <a:effectRef idx="0"/>
-          <a:fontRef idx="minor"/>
-        </p:style>
-        <p:txBody>
-          <a:bodyPr lIns="0" tIns="0" rIns="0" bIns="0" anchor="ctr">
-            <a:normAutofit/>
-          </a:bodyPr>
-          <a:p>
-            <a:pPr defTabSz="914400">
-              <a:lnSpc>
-                <a:spcPct val="100000"/>
-              </a:lnSpc>
-              <a:tabLst>
-                <a:tab pos="0" algn="l"/>
-              </a:tabLst>
-            </a:pPr>
-            <a:r>
-              <a:rPr lang="en-US" sz="1200" b="0" u="none" strike="noStrike">
-                <a:solidFill>
-                  <a:srgbClr val="E7E7E7"/>
-                </a:solidFill>
-                <a:effectLst/>
-                <a:uFillTx/>
-                <a:latin typeface="IBM Plex Sans"/>
-                <a:ea typeface="DejaVu Sans Mono"/>
-              </a:rPr>
-              <a:t># upload graph data</a:t>
-            </a:r>
-            <a:endParaRPr lang="en-US" sz="1200" b="0" u="none" strike="noStrike">
-              <a:solidFill>
-                <a:srgbClr val="FFFFFF"/>
-              </a:solidFill>
-              <a:effectLst/>
-              <a:uFillTx/>
-              <a:latin typeface="Arial"/>
-            </a:endParaRPr>
-          </a:p>
-        </p:txBody>
-      </p:sp>
-      <p:sp>
-        <p:nvSpPr>
-          <p:cNvPr id="152" name="Text 42"/>
-          <p:cNvSpPr/>
-          <p:nvPr/>
-        </p:nvSpPr>
-        <p:spPr>
-          <a:xfrm>
-            <a:off x="6236280" y="3654000"/>
-            <a:ext cx="4945680" cy="525600"/>
-          </a:xfrm>
-          <a:prstGeom prst="rect">
-            <a:avLst/>
-          </a:prstGeom>
-          <a:noFill/>
-          <a:ln w="0">
-            <a:noFill/>
-          </a:ln>
-        </p:spPr>
-        <p:style>
-          <a:lnRef idx="0"/>
-          <a:fillRef idx="0"/>
-          <a:effectRef idx="0"/>
-          <a:fontRef idx="minor"/>
-        </p:style>
-        <p:txBody>
-          <a:bodyPr lIns="0" tIns="0" rIns="0" bIns="0" anchor="ctr">
-            <a:normAutofit/>
-          </a:bodyPr>
-          <a:p>
-            <a:pPr defTabSz="914400">
-              <a:lnSpc>
-                <a:spcPct val="100000"/>
-              </a:lnSpc>
-              <a:tabLst>
-                <a:tab pos="0" algn="l"/>
-              </a:tabLst>
-            </a:pPr>
-            <a:r>
-              <a:rPr lang="en-US" sz="1200" b="0" u="none" strike="noStrike">
-                <a:solidFill>
-                  <a:srgbClr val="E7E7E7"/>
-                </a:solidFill>
-                <a:effectLst/>
-                <a:uFillTx/>
-                <a:latin typeface="IBM Plex Sans"/>
-                <a:ea typeface="DejaVu Sans Mono"/>
-              </a:rPr>
-              <a:t>./bloodhound-kube upload --upload-file live-demo.json --token-id $BLOODHOUND_TOKEN_ID --token-key $BLOODHOUND_TOKEN_KEY</a:t>
-            </a:r>
-            <a:endParaRPr lang="en-US" sz="1200" b="0" u="none" strike="noStrike">
+            <a:endParaRPr lang="en-US" sz="1800" b="0" u="none" strike="noStrike">
               <a:solidFill>
                 <a:srgbClr val="FFFFFF"/>
               </a:solidFill>
@@ -10201,14 +11240,14 @@
       </p:grpSpPr>
       <p:sp>
         <p:nvSpPr>
-          <p:cNvPr id="153" name="Shape 24"/>
-          <p:cNvSpPr/>
-          <p:nvPr/>
-        </p:nvSpPr>
-        <p:spPr>
-          <a:xfrm>
-            <a:off x="0" y="-11160"/>
-            <a:ext cx="12190680" cy="6856920"/>
+          <p:cNvPr id="143" name="Shape 26"/>
+          <p:cNvSpPr/>
+          <p:nvPr/>
+        </p:nvSpPr>
+        <p:spPr>
+          <a:xfrm>
+            <a:off x="0" y="0"/>
+            <a:ext cx="12190320" cy="6856560"/>
           </a:xfrm>
           <a:prstGeom prst="rect">
             <a:avLst/>
@@ -10249,14 +11288,14 @@
       </p:sp>
       <p:sp>
         <p:nvSpPr>
-          <p:cNvPr id="154" name="Shape 25"/>
+          <p:cNvPr id="144" name="Shape 32"/>
           <p:cNvSpPr/>
           <p:nvPr/>
         </p:nvSpPr>
         <p:spPr>
           <a:xfrm>
             <a:off x="18360" y="18360"/>
-            <a:ext cx="12153960" cy="6820200"/>
+            <a:ext cx="12153600" cy="6819840"/>
           </a:xfrm>
           <a:prstGeom prst="rect">
             <a:avLst/>
@@ -10295,7 +11334,7 @@
       </p:sp>
       <p:sp>
         <p:nvSpPr>
-          <p:cNvPr id="155" name="Shape 33"/>
+          <p:cNvPr id="145" name="Shape 42"/>
           <p:cNvSpPr/>
           <p:nvPr/>
         </p:nvSpPr>
@@ -10340,7 +11379,7 @@
       </p:sp>
       <p:sp>
         <p:nvSpPr>
-          <p:cNvPr id="156" name="Shape 36"/>
+          <p:cNvPr id="146" name="Shape 43"/>
           <p:cNvSpPr/>
           <p:nvPr/>
         </p:nvSpPr>
@@ -10385,7 +11424,7 @@
       </p:sp>
       <p:sp>
         <p:nvSpPr>
-          <p:cNvPr id="157" name="Shape 37"/>
+          <p:cNvPr id="147" name="Shape 44"/>
           <p:cNvSpPr/>
           <p:nvPr/>
         </p:nvSpPr>
@@ -10430,7 +11469,7 @@
       </p:sp>
       <p:sp>
         <p:nvSpPr>
-          <p:cNvPr id="158" name="Shape 38"/>
+          <p:cNvPr id="148" name="Shape 45"/>
           <p:cNvSpPr/>
           <p:nvPr/>
         </p:nvSpPr>
@@ -10475,7 +11514,7 @@
       </p:sp>
       <p:sp>
         <p:nvSpPr>
-          <p:cNvPr id="159" name="Shape 40"/>
+          <p:cNvPr id="149" name="Shape 46"/>
           <p:cNvSpPr/>
           <p:nvPr/>
         </p:nvSpPr>
@@ -10520,7 +11559,7 @@
       </p:sp>
       <p:sp>
         <p:nvSpPr>
-          <p:cNvPr id="160" name="Shape 41"/>
+          <p:cNvPr id="150" name="Shape 92"/>
           <p:cNvSpPr/>
           <p:nvPr/>
         </p:nvSpPr>
@@ -10565,7 +11604,7 @@
       </p:sp>
       <p:sp>
         <p:nvSpPr>
-          <p:cNvPr id="161" name="Shape 80"/>
+          <p:cNvPr id="151" name="Shape 93"/>
           <p:cNvSpPr/>
           <p:nvPr/>
         </p:nvSpPr>
@@ -10610,7 +11649,7 @@
       </p:sp>
       <p:sp>
         <p:nvSpPr>
-          <p:cNvPr id="162" name="Shape 81"/>
+          <p:cNvPr id="152" name="Shape 94"/>
           <p:cNvSpPr/>
           <p:nvPr/>
         </p:nvSpPr>
@@ -10655,7 +11694,7 @@
       </p:sp>
       <p:sp>
         <p:nvSpPr>
-          <p:cNvPr id="163" name="Shape 82"/>
+          <p:cNvPr id="153" name="Shape 95"/>
           <p:cNvSpPr/>
           <p:nvPr/>
         </p:nvSpPr>
@@ -10700,7 +11739,7 @@
       </p:sp>
       <p:sp>
         <p:nvSpPr>
-          <p:cNvPr id="164" name="Shape 83"/>
+          <p:cNvPr id="154" name="Shape 96"/>
           <p:cNvSpPr/>
           <p:nvPr/>
         </p:nvSpPr>
@@ -10745,7 +11784,7 @@
       </p:sp>
       <p:sp>
         <p:nvSpPr>
-          <p:cNvPr id="165" name="Shape 84"/>
+          <p:cNvPr id="155" name="Shape 97"/>
           <p:cNvSpPr/>
           <p:nvPr/>
         </p:nvSpPr>
@@ -10790,7 +11829,7 @@
       </p:sp>
       <p:sp>
         <p:nvSpPr>
-          <p:cNvPr id="166" name="Shape 85"/>
+          <p:cNvPr id="156" name="Shape 98"/>
           <p:cNvSpPr/>
           <p:nvPr/>
         </p:nvSpPr>
@@ -10835,7 +11874,7 @@
       </p:sp>
       <p:sp>
         <p:nvSpPr>
-          <p:cNvPr id="167" name="Shape 86"/>
+          <p:cNvPr id="157" name="Shape 99"/>
           <p:cNvSpPr/>
           <p:nvPr/>
         </p:nvSpPr>
@@ -10880,7 +11919,7 @@
       </p:sp>
       <p:sp>
         <p:nvSpPr>
-          <p:cNvPr id="168" name="Shape 87"/>
+          <p:cNvPr id="158" name="Shape 100"/>
           <p:cNvSpPr/>
           <p:nvPr/>
         </p:nvSpPr>
@@ -10925,7 +11964,7 @@
       </p:sp>
       <p:sp>
         <p:nvSpPr>
-          <p:cNvPr id="169" name="Shape 88"/>
+          <p:cNvPr id="159" name="Shape 101"/>
           <p:cNvSpPr/>
           <p:nvPr/>
         </p:nvSpPr>
@@ -10970,7 +12009,7 @@
       </p:sp>
       <p:sp>
         <p:nvSpPr>
-          <p:cNvPr id="170" name="Shape 89"/>
+          <p:cNvPr id="160" name="Shape 102"/>
           <p:cNvSpPr/>
           <p:nvPr/>
         </p:nvSpPr>
@@ -11015,7 +12054,7 @@
       </p:sp>
       <p:sp>
         <p:nvSpPr>
-          <p:cNvPr id="171" name="Shape 90"/>
+          <p:cNvPr id="161" name="Shape 103"/>
           <p:cNvSpPr/>
           <p:nvPr/>
         </p:nvSpPr>
@@ -11060,14 +12099,14 @@
       </p:sp>
       <p:sp>
         <p:nvSpPr>
-          <p:cNvPr id="172" name="Text 13"/>
+          <p:cNvPr id="162" name="Text 2"/>
           <p:cNvSpPr/>
           <p:nvPr/>
         </p:nvSpPr>
         <p:spPr>
           <a:xfrm>
             <a:off x="255960" y="6455520"/>
-            <a:ext cx="410400" cy="163440"/>
+            <a:ext cx="410040" cy="163080"/>
           </a:xfrm>
           <a:prstGeom prst="rect">
             <a:avLst/>
@@ -11121,14 +12160,14 @@
       </p:sp>
       <p:sp>
         <p:nvSpPr>
-          <p:cNvPr id="173" name="Text 15"/>
+          <p:cNvPr id="163" name="Text 14"/>
           <p:cNvSpPr/>
           <p:nvPr/>
         </p:nvSpPr>
         <p:spPr>
           <a:xfrm>
             <a:off x="576000" y="384120"/>
-            <a:ext cx="7131240" cy="410400"/>
+            <a:ext cx="7130880" cy="410040"/>
           </a:xfrm>
           <a:prstGeom prst="rect">
             <a:avLst/>
@@ -11167,7 +12206,7 @@
                 <a:latin typeface="IBM Plex Sans"/>
                 <a:ea typeface="Aptos Display"/>
               </a:rPr>
-              <a:t>Demo Video</a:t>
+              <a:t>Demo time! (2 of 2)</a:t>
             </a:r>
             <a:endParaRPr lang="en-US" sz="2800" b="0" u="none" strike="noStrike">
               <a:solidFill>
@@ -11182,7 +12221,7 @@
       </p:sp>
       <p:sp>
         <p:nvSpPr>
-          <p:cNvPr id="174" name="Shape 91"/>
+          <p:cNvPr id="164" name="Shape 104"/>
           <p:cNvSpPr/>
           <p:nvPr/>
         </p:nvSpPr>
@@ -11210,6 +12249,554 @@
         <p:txBody>
           <a:bodyPr lIns="90000" tIns="-44640" rIns="90000" bIns="-44640" anchor="t" anchorCtr="1">
             <a:noAutofit/>
+          </a:bodyPr>
+          <a:p>
+            <a:endParaRPr lang="en-US" sz="1800" b="0" u="none" strike="noStrike">
+              <a:solidFill>
+                <a:srgbClr val="FFFFFF"/>
+              </a:solidFill>
+              <a:effectLst/>
+              <a:uFillTx/>
+              <a:latin typeface="Arial"/>
+            </a:endParaRPr>
+          </a:p>
+        </p:txBody>
+      </p:sp>
+      <p:sp>
+        <p:nvSpPr>
+          <p:cNvPr id="165" name="Shape 105"/>
+          <p:cNvSpPr/>
+          <p:nvPr/>
+        </p:nvSpPr>
+        <p:spPr>
+          <a:xfrm>
+            <a:off x="457200" y="914400"/>
+            <a:ext cx="11649240" cy="5904000"/>
+          </a:xfrm>
+          <a:prstGeom prst="roundRect">
+            <a:avLst>
+              <a:gd name="adj" fmla="val 1967"/>
+            </a:avLst>
+          </a:prstGeom>
+          <a:solidFill>
+            <a:srgbClr val="070809"/>
+          </a:solidFill>
+          <a:ln w="12700">
+            <a:solidFill>
+              <a:srgbClr val="555A60">
+                <a:alpha val="88000"/>
+              </a:srgbClr>
+            </a:solidFill>
+            <a:round/>
+          </a:ln>
+        </p:spPr>
+        <p:style>
+          <a:lnRef idx="0"/>
+          <a:fillRef idx="0"/>
+          <a:effectRef idx="0"/>
+          <a:fontRef idx="minor"/>
+        </p:style>
+        <p:txBody>
+          <a:bodyPr lIns="90000" tIns="45000" rIns="90000" bIns="45000" anchor="t">
+            <a:noAutofit/>
+          </a:bodyPr>
+          <a:p>
+            <a:pPr defTabSz="914400">
+              <a:lnSpc>
+                <a:spcPct val="100000"/>
+              </a:lnSpc>
+              <a:spcBef>
+                <a:spcPts val="1191"/>
+              </a:spcBef>
+              <a:spcAft>
+                <a:spcPts val="992"/>
+              </a:spcAft>
+              <a:tabLst>
+                <a:tab pos="0" algn="l"/>
+              </a:tabLst>
+            </a:pPr>
+            <a:r>
+              <a:rPr lang="en-US" sz="1800" b="0" u="none" strike="noStrike">
+                <a:solidFill>
+                  <a:srgbClr val="E7E7E7"/>
+                </a:solidFill>
+                <a:effectLst/>
+                <a:uFillTx/>
+                <a:latin typeface="IBM Plex Sans"/>
+                <a:ea typeface="DejaVu Sans Mono"/>
+              </a:rPr>
+              <a:t># Collect all, and parse undefined</a:t>
+            </a:r>
+            <a:endParaRPr lang="en-US" sz="1800" b="0" u="none" strike="noStrike">
+              <a:solidFill>
+                <a:srgbClr val="FFFFFF"/>
+              </a:solidFill>
+              <a:effectLst/>
+              <a:uFillTx/>
+              <a:latin typeface="Arial"/>
+            </a:endParaRPr>
+          </a:p>
+          <a:p>
+            <a:pPr defTabSz="914400">
+              <a:lnSpc>
+                <a:spcPct val="100000"/>
+              </a:lnSpc>
+              <a:spcBef>
+                <a:spcPts val="1191"/>
+              </a:spcBef>
+              <a:spcAft>
+                <a:spcPts val="992"/>
+              </a:spcAft>
+              <a:tabLst>
+                <a:tab pos="0" algn="l"/>
+              </a:tabLst>
+            </a:pPr>
+            <a:r>
+              <a:rPr lang="en-US" sz="1800" b="0" u="none" strike="noStrike">
+                <a:solidFill>
+                  <a:srgbClr val="E7E7E7"/>
+                </a:solidFill>
+                <a:effectLst/>
+                <a:uFillTx/>
+                <a:latin typeface="IBM Plex Sans"/>
+                <a:ea typeface="DejaVu Sans Mono"/>
+              </a:rPr>
+              <a:t>bloodhound-kube collect --parse-undefined-nodes -A --scope all --output ./output/undefined-demo.jsonl</a:t>
+            </a:r>
+            <a:endParaRPr lang="en-US" sz="1800" b="0" u="none" strike="noStrike">
+              <a:solidFill>
+                <a:srgbClr val="FFFFFF"/>
+              </a:solidFill>
+              <a:effectLst/>
+              <a:uFillTx/>
+              <a:latin typeface="Arial"/>
+            </a:endParaRPr>
+          </a:p>
+          <a:p>
+            <a:pPr defTabSz="914400">
+              <a:lnSpc>
+                <a:spcPct val="100000"/>
+              </a:lnSpc>
+              <a:spcBef>
+                <a:spcPts val="1191"/>
+              </a:spcBef>
+              <a:spcAft>
+                <a:spcPts val="992"/>
+              </a:spcAft>
+              <a:tabLst>
+                <a:tab pos="0" algn="l"/>
+              </a:tabLst>
+            </a:pPr>
+            <a:r>
+              <a:rPr lang="en-US" sz="1800" b="0" u="none" strike="noStrike">
+                <a:solidFill>
+                  <a:srgbClr val="E7E7E7"/>
+                </a:solidFill>
+                <a:effectLst/>
+                <a:uFillTx/>
+                <a:latin typeface="IBM Plex Sans"/>
+                <a:ea typeface="DejaVu Sans Mono"/>
+              </a:rPr>
+              <a:t># Upload results</a:t>
+            </a:r>
+            <a:endParaRPr lang="en-US" sz="1800" b="0" u="none" strike="noStrike">
+              <a:solidFill>
+                <a:srgbClr val="FFFFFF"/>
+              </a:solidFill>
+              <a:effectLst/>
+              <a:uFillTx/>
+              <a:latin typeface="Arial"/>
+            </a:endParaRPr>
+          </a:p>
+          <a:p>
+            <a:pPr defTabSz="914400">
+              <a:lnSpc>
+                <a:spcPct val="100000"/>
+              </a:lnSpc>
+              <a:spcBef>
+                <a:spcPts val="1191"/>
+              </a:spcBef>
+              <a:spcAft>
+                <a:spcPts val="992"/>
+              </a:spcAft>
+              <a:tabLst>
+                <a:tab pos="0" algn="l"/>
+              </a:tabLst>
+            </a:pPr>
+            <a:r>
+              <a:rPr lang="en-US" sz="1800" b="0" u="none" strike="noStrike">
+                <a:solidFill>
+                  <a:srgbClr val="E7E7E7"/>
+                </a:solidFill>
+                <a:effectLst/>
+                <a:uFillTx/>
+                <a:latin typeface="IBM Plex Sans"/>
+                <a:ea typeface="DejaVu Sans Mono"/>
+              </a:rPr>
+              <a:t>bloodhound-kube upload --enable-extension --url http://localhost:8080 --token-id $TOK_ID --token-key $TOK_KEY --schema-file ./schema.json --queries-file ./queries.json --cluster demo-1 --upload-file output/bhk-demo.json</a:t>
+            </a:r>
+            <a:endParaRPr lang="en-US" sz="1800" b="0" u="none" strike="noStrike">
+              <a:solidFill>
+                <a:srgbClr val="FFFFFF"/>
+              </a:solidFill>
+              <a:effectLst/>
+              <a:uFillTx/>
+              <a:latin typeface="Arial"/>
+            </a:endParaRPr>
+          </a:p>
+          <a:p>
+            <a:pPr defTabSz="914400">
+              <a:lnSpc>
+                <a:spcPct val="100000"/>
+              </a:lnSpc>
+              <a:spcBef>
+                <a:spcPts val="1191"/>
+              </a:spcBef>
+              <a:spcAft>
+                <a:spcPts val="992"/>
+              </a:spcAft>
+              <a:tabLst>
+                <a:tab pos="0" algn="l"/>
+              </a:tabLst>
+            </a:pPr>
+            <a:r>
+              <a:rPr lang="en-US" sz="1800" b="0" u="none" strike="noStrike">
+                <a:solidFill>
+                  <a:srgbClr val="E7E7E7"/>
+                </a:solidFill>
+                <a:effectLst/>
+                <a:uFillTx/>
+                <a:latin typeface="IBM Plex Sans"/>
+                <a:ea typeface="DejaVu Sans Mono"/>
+              </a:rPr>
+              <a:t>bloodhound-kube upload --enable-extension --url http://localhost:8080 --token-id $TOK_ID --token-key $TOK_KEY --schema-file ./schema.json --queries-file ./queries.json --cluster demo-2 --upload-file output/bhk-demo-2.json </a:t>
+            </a:r>
+            <a:endParaRPr lang="en-US" sz="1800" b="0" u="none" strike="noStrike">
+              <a:solidFill>
+                <a:srgbClr val="FFFFFF"/>
+              </a:solidFill>
+              <a:effectLst/>
+              <a:uFillTx/>
+              <a:latin typeface="Arial"/>
+            </a:endParaRPr>
+          </a:p>
+        </p:txBody>
+      </p:sp>
+      <p:sp>
+        <p:nvSpPr>
+          <p:cNvPr id="166" name="Text 16"/>
+          <p:cNvSpPr/>
+          <p:nvPr/>
+        </p:nvSpPr>
+        <p:spPr>
+          <a:xfrm>
+            <a:off x="6236280" y="1389960"/>
+            <a:ext cx="4945320" cy="296280"/>
+          </a:xfrm>
+          <a:prstGeom prst="rect">
+            <a:avLst/>
+          </a:prstGeom>
+          <a:noFill/>
+          <a:ln w="0">
+            <a:noFill/>
+          </a:ln>
+        </p:spPr>
+        <p:style>
+          <a:lnRef idx="0"/>
+          <a:fillRef idx="0"/>
+          <a:effectRef idx="0"/>
+          <a:fontRef idx="minor"/>
+        </p:style>
+        <p:txBody>
+          <a:bodyPr lIns="0" tIns="0" rIns="0" bIns="0" anchor="ctr">
+            <a:normAutofit fontScale="77500" lnSpcReduction="19999"/>
+          </a:bodyPr>
+          <a:p>
+            <a:endParaRPr lang="en-US" sz="1800" b="0" u="none" strike="noStrike">
+              <a:solidFill>
+                <a:srgbClr val="FFFFFF"/>
+              </a:solidFill>
+              <a:effectLst/>
+              <a:uFillTx/>
+              <a:latin typeface="Arial"/>
+            </a:endParaRPr>
+          </a:p>
+        </p:txBody>
+      </p:sp>
+      <p:sp>
+        <p:nvSpPr>
+          <p:cNvPr id="167" name="Text 17"/>
+          <p:cNvSpPr/>
+          <p:nvPr/>
+        </p:nvSpPr>
+        <p:spPr>
+          <a:xfrm>
+            <a:off x="6766560" y="2743200"/>
+            <a:ext cx="4945320" cy="434880"/>
+          </a:xfrm>
+          <a:prstGeom prst="rect">
+            <a:avLst/>
+          </a:prstGeom>
+          <a:noFill/>
+          <a:ln w="0">
+            <a:noFill/>
+          </a:ln>
+        </p:spPr>
+        <p:style>
+          <a:lnRef idx="0"/>
+          <a:fillRef idx="0"/>
+          <a:effectRef idx="0"/>
+          <a:fontRef idx="minor"/>
+        </p:style>
+        <p:txBody>
+          <a:bodyPr lIns="0" tIns="0" rIns="0" bIns="0" anchor="ctr">
+            <a:normAutofit/>
+          </a:bodyPr>
+          <a:p>
+            <a:endParaRPr lang="en-US" sz="1800" b="0" u="none" strike="noStrike">
+              <a:solidFill>
+                <a:srgbClr val="FFFFFF"/>
+              </a:solidFill>
+              <a:effectLst/>
+              <a:uFillTx/>
+              <a:latin typeface="Arial"/>
+            </a:endParaRPr>
+          </a:p>
+        </p:txBody>
+      </p:sp>
+      <p:sp>
+        <p:nvSpPr>
+          <p:cNvPr id="168" name="Text 18"/>
+          <p:cNvSpPr/>
+          <p:nvPr/>
+        </p:nvSpPr>
+        <p:spPr>
+          <a:xfrm>
+            <a:off x="6236280" y="2036880"/>
+            <a:ext cx="4945320" cy="296280"/>
+          </a:xfrm>
+          <a:prstGeom prst="rect">
+            <a:avLst/>
+          </a:prstGeom>
+          <a:noFill/>
+          <a:ln w="0">
+            <a:noFill/>
+          </a:ln>
+        </p:spPr>
+        <p:style>
+          <a:lnRef idx="0"/>
+          <a:fillRef idx="0"/>
+          <a:effectRef idx="0"/>
+          <a:fontRef idx="minor"/>
+        </p:style>
+        <p:txBody>
+          <a:bodyPr lIns="0" tIns="0" rIns="0" bIns="0" anchor="ctr">
+            <a:normAutofit fontScale="77500" lnSpcReduction="19999"/>
+          </a:bodyPr>
+          <a:p>
+            <a:endParaRPr lang="en-US" sz="920" b="0" u="none" strike="noStrike">
+              <a:solidFill>
+                <a:schemeClr val="dk1"/>
+              </a:solidFill>
+              <a:effectLst/>
+              <a:uFillTx/>
+              <a:latin typeface="IBM Plex Sans"/>
+            </a:endParaRPr>
+          </a:p>
+        </p:txBody>
+      </p:sp>
+      <p:sp>
+        <p:nvSpPr>
+          <p:cNvPr id="169" name="Text 20"/>
+          <p:cNvSpPr/>
+          <p:nvPr/>
+        </p:nvSpPr>
+        <p:spPr>
+          <a:xfrm>
+            <a:off x="6236280" y="2360160"/>
+            <a:ext cx="4945320" cy="296280"/>
+          </a:xfrm>
+          <a:prstGeom prst="rect">
+            <a:avLst/>
+          </a:prstGeom>
+          <a:noFill/>
+          <a:ln w="0">
+            <a:noFill/>
+          </a:ln>
+        </p:spPr>
+        <p:style>
+          <a:lnRef idx="0"/>
+          <a:fillRef idx="0"/>
+          <a:effectRef idx="0"/>
+          <a:fontRef idx="minor"/>
+        </p:style>
+        <p:txBody>
+          <a:bodyPr lIns="0" tIns="0" rIns="0" bIns="0" anchor="ctr">
+            <a:normAutofit fontScale="77500" lnSpcReduction="19999"/>
+          </a:bodyPr>
+          <a:p>
+            <a:endParaRPr lang="en-US" sz="1800" b="0" u="none" strike="noStrike">
+              <a:solidFill>
+                <a:srgbClr val="FFFFFF"/>
+              </a:solidFill>
+              <a:effectLst/>
+              <a:uFillTx/>
+              <a:latin typeface="Arial"/>
+            </a:endParaRPr>
+          </a:p>
+        </p:txBody>
+      </p:sp>
+      <p:sp>
+        <p:nvSpPr>
+          <p:cNvPr id="170" name="Text 45"/>
+          <p:cNvSpPr/>
+          <p:nvPr/>
+        </p:nvSpPr>
+        <p:spPr>
+          <a:xfrm>
+            <a:off x="6236280" y="2683800"/>
+            <a:ext cx="4945320" cy="554040"/>
+          </a:xfrm>
+          <a:prstGeom prst="rect">
+            <a:avLst/>
+          </a:prstGeom>
+          <a:noFill/>
+          <a:ln w="0">
+            <a:noFill/>
+          </a:ln>
+        </p:spPr>
+        <p:style>
+          <a:lnRef idx="0"/>
+          <a:fillRef idx="0"/>
+          <a:effectRef idx="0"/>
+          <a:fontRef idx="minor"/>
+        </p:style>
+        <p:txBody>
+          <a:bodyPr lIns="0" tIns="0" rIns="0" bIns="0" anchor="ctr">
+            <a:normAutofit/>
+          </a:bodyPr>
+          <a:p>
+            <a:endParaRPr lang="en-US" sz="1800" b="0" u="none" strike="noStrike">
+              <a:solidFill>
+                <a:srgbClr val="FFFFFF"/>
+              </a:solidFill>
+              <a:effectLst/>
+              <a:uFillTx/>
+              <a:latin typeface="Arial"/>
+            </a:endParaRPr>
+          </a:p>
+        </p:txBody>
+      </p:sp>
+      <p:sp>
+        <p:nvSpPr>
+          <p:cNvPr id="171" name="Text 46"/>
+          <p:cNvSpPr/>
+          <p:nvPr/>
+        </p:nvSpPr>
+        <p:spPr>
+          <a:xfrm>
+            <a:off x="6236280" y="3007080"/>
+            <a:ext cx="4945320" cy="296280"/>
+          </a:xfrm>
+          <a:prstGeom prst="rect">
+            <a:avLst/>
+          </a:prstGeom>
+          <a:noFill/>
+          <a:ln w="0">
+            <a:noFill/>
+          </a:ln>
+        </p:spPr>
+        <p:style>
+          <a:lnRef idx="0"/>
+          <a:fillRef idx="0"/>
+          <a:effectRef idx="0"/>
+          <a:fontRef idx="minor"/>
+        </p:style>
+        <p:txBody>
+          <a:bodyPr lIns="0" tIns="0" rIns="0" bIns="0" anchor="ctr">
+            <a:normAutofit fontScale="77500" lnSpcReduction="19999"/>
+          </a:bodyPr>
+          <a:p>
+            <a:endParaRPr lang="en-US" sz="920" b="0" u="none" strike="noStrike">
+              <a:solidFill>
+                <a:schemeClr val="dk1"/>
+              </a:solidFill>
+              <a:effectLst/>
+              <a:uFillTx/>
+              <a:latin typeface="IBM Plex Sans"/>
+            </a:endParaRPr>
+          </a:p>
+        </p:txBody>
+      </p:sp>
+      <p:sp>
+        <p:nvSpPr>
+          <p:cNvPr id="172" name="Text 47"/>
+          <p:cNvSpPr/>
+          <p:nvPr/>
+        </p:nvSpPr>
+        <p:spPr>
+          <a:xfrm>
+            <a:off x="6126480" y="18360"/>
+            <a:ext cx="5164920" cy="6839640"/>
+          </a:xfrm>
+          <a:prstGeom prst="rect">
+            <a:avLst/>
+          </a:prstGeom>
+          <a:noFill/>
+          <a:ln w="0">
+            <a:noFill/>
+          </a:ln>
+        </p:spPr>
+        <p:style>
+          <a:lnRef idx="0"/>
+          <a:fillRef idx="0"/>
+          <a:effectRef idx="0"/>
+          <a:fontRef idx="minor"/>
+        </p:style>
+        <p:txBody>
+          <a:bodyPr lIns="0" tIns="0" rIns="0" bIns="0" anchor="t">
+            <a:normAutofit/>
+          </a:bodyPr>
+          <a:p>
+            <a:endParaRPr lang="en-US" sz="1800" b="0" u="none" strike="noStrike">
+              <a:solidFill>
+                <a:srgbClr val="FFFFFF"/>
+              </a:solidFill>
+              <a:effectLst/>
+              <a:uFillTx/>
+              <a:latin typeface="Arial"/>
+            </a:endParaRPr>
+          </a:p>
+        </p:txBody>
+      </p:sp>
+      <p:sp>
+        <p:nvSpPr>
+          <p:cNvPr id="173" name="Text 48"/>
+          <p:cNvSpPr/>
+          <p:nvPr/>
+        </p:nvSpPr>
+        <p:spPr>
+          <a:xfrm>
+            <a:off x="6236280" y="3654000"/>
+            <a:ext cx="4945320" cy="525240"/>
+          </a:xfrm>
+          <a:prstGeom prst="rect">
+            <a:avLst/>
+          </a:prstGeom>
+          <a:noFill/>
+          <a:ln w="0">
+            <a:noFill/>
+          </a:ln>
+        </p:spPr>
+        <p:style>
+          <a:lnRef idx="0"/>
+          <a:fillRef idx="0"/>
+          <a:effectRef idx="0"/>
+          <a:fontRef idx="minor"/>
+        </p:style>
+        <p:txBody>
+          <a:bodyPr lIns="0" tIns="0" rIns="0" bIns="0" anchor="ctr">
+            <a:normAutofit/>
           </a:bodyPr>
           <a:p>
             <a:endParaRPr lang="en-US" sz="1800" b="0" u="none" strike="noStrike">
@@ -11262,14 +12849,14 @@
       </p:grpSpPr>
       <p:sp>
         <p:nvSpPr>
-          <p:cNvPr id="175" name="Shape 0"/>
-          <p:cNvSpPr/>
-          <p:nvPr/>
-        </p:nvSpPr>
-        <p:spPr>
-          <a:xfrm>
-            <a:off x="0" y="0"/>
-            <a:ext cx="12190680" cy="6856920"/>
+          <p:cNvPr id="174" name="Shape 24"/>
+          <p:cNvSpPr/>
+          <p:nvPr/>
+        </p:nvSpPr>
+        <p:spPr>
+          <a:xfrm>
+            <a:off x="0" y="-11160"/>
+            <a:ext cx="12190320" cy="6856560"/>
           </a:xfrm>
           <a:prstGeom prst="rect">
             <a:avLst/>
@@ -11310,14 +12897,14 @@
       </p:sp>
       <p:sp>
         <p:nvSpPr>
-          <p:cNvPr id="176" name="Shape 1"/>
+          <p:cNvPr id="175" name="Shape 25"/>
           <p:cNvSpPr/>
           <p:nvPr/>
         </p:nvSpPr>
         <p:spPr>
           <a:xfrm>
             <a:off x="18360" y="18360"/>
-            <a:ext cx="12153960" cy="6820200"/>
+            <a:ext cx="12153600" cy="6819840"/>
           </a:xfrm>
           <a:prstGeom prst="rect">
             <a:avLst/>
@@ -11356,7 +12943,7 @@
       </p:sp>
       <p:sp>
         <p:nvSpPr>
-          <p:cNvPr id="177" name="Shape 2"/>
+          <p:cNvPr id="176" name="Shape 33"/>
           <p:cNvSpPr/>
           <p:nvPr/>
         </p:nvSpPr>
@@ -11401,7 +12988,7 @@
       </p:sp>
       <p:sp>
         <p:nvSpPr>
-          <p:cNvPr id="178" name="Shape 3"/>
+          <p:cNvPr id="177" name="Shape 36"/>
           <p:cNvSpPr/>
           <p:nvPr/>
         </p:nvSpPr>
@@ -11446,7 +13033,7 @@
       </p:sp>
       <p:sp>
         <p:nvSpPr>
-          <p:cNvPr id="179" name="Shape 4"/>
+          <p:cNvPr id="178" name="Shape 37"/>
           <p:cNvSpPr/>
           <p:nvPr/>
         </p:nvSpPr>
@@ -11491,7 +13078,7 @@
       </p:sp>
       <p:sp>
         <p:nvSpPr>
-          <p:cNvPr id="180" name="Shape 5"/>
+          <p:cNvPr id="179" name="Shape 38"/>
           <p:cNvSpPr/>
           <p:nvPr/>
         </p:nvSpPr>
@@ -11536,7 +13123,7 @@
       </p:sp>
       <p:sp>
         <p:nvSpPr>
-          <p:cNvPr id="181" name="Shape 6"/>
+          <p:cNvPr id="180" name="Shape 40"/>
           <p:cNvSpPr/>
           <p:nvPr/>
         </p:nvSpPr>
@@ -11581,7 +13168,7 @@
       </p:sp>
       <p:sp>
         <p:nvSpPr>
-          <p:cNvPr id="182" name="Shape 7"/>
+          <p:cNvPr id="181" name="Shape 41"/>
           <p:cNvSpPr/>
           <p:nvPr/>
         </p:nvSpPr>
@@ -11626,7 +13213,7 @@
       </p:sp>
       <p:sp>
         <p:nvSpPr>
-          <p:cNvPr id="183" name="Shape 8"/>
+          <p:cNvPr id="182" name="Shape 80"/>
           <p:cNvSpPr/>
           <p:nvPr/>
         </p:nvSpPr>
@@ -11671,7 +13258,7 @@
       </p:sp>
       <p:sp>
         <p:nvSpPr>
-          <p:cNvPr id="184" name="Shape 9"/>
+          <p:cNvPr id="183" name="Shape 81"/>
           <p:cNvSpPr/>
           <p:nvPr/>
         </p:nvSpPr>
@@ -11716,7 +13303,7 @@
       </p:sp>
       <p:sp>
         <p:nvSpPr>
-          <p:cNvPr id="185" name="Shape 10"/>
+          <p:cNvPr id="184" name="Shape 82"/>
           <p:cNvSpPr/>
           <p:nvPr/>
         </p:nvSpPr>
@@ -11761,7 +13348,7 @@
       </p:sp>
       <p:sp>
         <p:nvSpPr>
-          <p:cNvPr id="186" name="Shape 11"/>
+          <p:cNvPr id="185" name="Shape 83"/>
           <p:cNvSpPr/>
           <p:nvPr/>
         </p:nvSpPr>
@@ -11806,7 +13393,7 @@
       </p:sp>
       <p:sp>
         <p:nvSpPr>
-          <p:cNvPr id="187" name="Shape 12"/>
+          <p:cNvPr id="186" name="Shape 84"/>
           <p:cNvSpPr/>
           <p:nvPr/>
         </p:nvSpPr>
@@ -11851,7 +13438,7 @@
       </p:sp>
       <p:sp>
         <p:nvSpPr>
-          <p:cNvPr id="188" name="Shape 13"/>
+          <p:cNvPr id="187" name="Shape 85"/>
           <p:cNvSpPr/>
           <p:nvPr/>
         </p:nvSpPr>
@@ -11896,7 +13483,7 @@
       </p:sp>
       <p:sp>
         <p:nvSpPr>
-          <p:cNvPr id="189" name="Shape 14"/>
+          <p:cNvPr id="188" name="Shape 86"/>
           <p:cNvSpPr/>
           <p:nvPr/>
         </p:nvSpPr>
@@ -11941,7 +13528,7 @@
       </p:sp>
       <p:sp>
         <p:nvSpPr>
-          <p:cNvPr id="190" name="Shape 15"/>
+          <p:cNvPr id="189" name="Shape 87"/>
           <p:cNvSpPr/>
           <p:nvPr/>
         </p:nvSpPr>
@@ -11986,7 +13573,7 @@
       </p:sp>
       <p:sp>
         <p:nvSpPr>
-          <p:cNvPr id="191" name="Shape 16"/>
+          <p:cNvPr id="190" name="Shape 88"/>
           <p:cNvSpPr/>
           <p:nvPr/>
         </p:nvSpPr>
@@ -12031,7 +13618,7 @@
       </p:sp>
       <p:sp>
         <p:nvSpPr>
-          <p:cNvPr id="192" name="Shape 17"/>
+          <p:cNvPr id="191" name="Shape 89"/>
           <p:cNvSpPr/>
           <p:nvPr/>
         </p:nvSpPr>
@@ -12076,7 +13663,7 @@
       </p:sp>
       <p:sp>
         <p:nvSpPr>
-          <p:cNvPr id="193" name="Shape 18"/>
+          <p:cNvPr id="192" name="Shape 90"/>
           <p:cNvSpPr/>
           <p:nvPr/>
         </p:nvSpPr>
@@ -12121,14 +13708,14 @@
       </p:sp>
       <p:sp>
         <p:nvSpPr>
-          <p:cNvPr id="194" name="Text 19"/>
+          <p:cNvPr id="193" name="Text 13"/>
           <p:cNvSpPr/>
           <p:nvPr/>
         </p:nvSpPr>
         <p:spPr>
           <a:xfrm>
             <a:off x="255960" y="6455520"/>
-            <a:ext cx="410400" cy="163440"/>
+            <a:ext cx="410040" cy="163080"/>
           </a:xfrm>
           <a:prstGeom prst="rect">
             <a:avLst/>
@@ -12182,14 +13769,14 @@
       </p:sp>
       <p:sp>
         <p:nvSpPr>
-          <p:cNvPr id="195" name="Text 21"/>
+          <p:cNvPr id="194" name="Text 15"/>
           <p:cNvSpPr/>
           <p:nvPr/>
         </p:nvSpPr>
         <p:spPr>
           <a:xfrm>
             <a:off x="576000" y="384120"/>
-            <a:ext cx="7131240" cy="410400"/>
+            <a:ext cx="7130880" cy="410040"/>
           </a:xfrm>
           <a:prstGeom prst="rect">
             <a:avLst/>
@@ -12228,7 +13815,7 @@
                 <a:latin typeface="IBM Plex Sans"/>
                 <a:ea typeface="Aptos Display"/>
               </a:rPr>
-              <a:t>How to Interpret the Graph</a:t>
+              <a:t>Demo Video</a:t>
             </a:r>
             <a:endParaRPr lang="en-US" sz="2800" b="0" u="none" strike="noStrike">
               <a:solidFill>
@@ -12243,7 +13830,7 @@
       </p:sp>
       <p:sp>
         <p:nvSpPr>
-          <p:cNvPr id="196" name="Shape 22"/>
+          <p:cNvPr id="195" name="Shape 91"/>
           <p:cNvSpPr/>
           <p:nvPr/>
         </p:nvSpPr>
@@ -12271,745 +13858,6 @@
         <p:txBody>
           <a:bodyPr lIns="90000" tIns="-44640" rIns="90000" bIns="-44640" anchor="t" anchorCtr="1">
             <a:noAutofit/>
-          </a:bodyPr>
-          <a:p>
-            <a:endParaRPr lang="en-US" sz="1800" b="0" u="none" strike="noStrike">
-              <a:solidFill>
-                <a:srgbClr val="FFFFFF"/>
-              </a:solidFill>
-              <a:effectLst/>
-              <a:uFillTx/>
-              <a:latin typeface="Arial"/>
-            </a:endParaRPr>
-          </a:p>
-        </p:txBody>
-      </p:sp>
-      <p:sp>
-        <p:nvSpPr>
-          <p:cNvPr id="197" name="Text 24"/>
-          <p:cNvSpPr/>
-          <p:nvPr/>
-        </p:nvSpPr>
-        <p:spPr>
-          <a:xfrm>
-            <a:off x="822960" y="1505160"/>
-            <a:ext cx="4708080" cy="401400"/>
-          </a:xfrm>
-          <a:prstGeom prst="rect">
-            <a:avLst/>
-          </a:prstGeom>
-          <a:solidFill>
-            <a:srgbClr val="17191C"/>
-          </a:solidFill>
-          <a:ln w="12700">
-            <a:solidFill>
-              <a:srgbClr val="555A60">
-                <a:alpha val="85000"/>
-              </a:srgbClr>
-            </a:solidFill>
-            <a:round/>
-          </a:ln>
-        </p:spPr>
-        <p:style>
-          <a:lnRef idx="0"/>
-          <a:fillRef idx="0"/>
-          <a:effectRef idx="0"/>
-          <a:fontRef idx="minor"/>
-        </p:style>
-        <p:txBody>
-          <a:bodyPr lIns="1800" tIns="1800" rIns="1800" bIns="1800" anchor="ctr">
-            <a:normAutofit/>
-          </a:bodyPr>
-          <a:p>
-            <a:pPr defTabSz="914400">
-              <a:lnSpc>
-                <a:spcPct val="100000"/>
-              </a:lnSpc>
-              <a:tabLst>
-                <a:tab pos="0" algn="l"/>
-              </a:tabLst>
-            </a:pPr>
-            <a:r>
-              <a:rPr lang="en-US" sz="1400" b="1" u="none" strike="noStrike">
-                <a:solidFill>
-                  <a:srgbClr val="F2F3F5"/>
-                </a:solidFill>
-                <a:effectLst/>
-                <a:uFillTx/>
-                <a:latin typeface="IBM Plex Sans"/>
-                <a:ea typeface="Aptos"/>
-              </a:rPr>
-              <a:t> What the graph can tell you</a:t>
-            </a:r>
-            <a:endParaRPr lang="en-US" sz="1400" b="0" u="none" strike="noStrike">
-              <a:solidFill>
-                <a:srgbClr val="FFFFFF"/>
-              </a:solidFill>
-              <a:effectLst/>
-              <a:uFillTx/>
-              <a:latin typeface="Arial"/>
-            </a:endParaRPr>
-          </a:p>
-        </p:txBody>
-      </p:sp>
-      <p:sp>
-        <p:nvSpPr>
-          <p:cNvPr id="198" name="Text 26"/>
-          <p:cNvSpPr/>
-          <p:nvPr/>
-        </p:nvSpPr>
-        <p:spPr>
-          <a:xfrm>
-            <a:off x="795600" y="1965960"/>
-            <a:ext cx="4717440" cy="4432320"/>
-          </a:xfrm>
-          <a:prstGeom prst="rect">
-            <a:avLst/>
-          </a:prstGeom>
-          <a:noFill/>
-          <a:ln w="0">
-            <a:noFill/>
-          </a:ln>
-        </p:spPr>
-        <p:style>
-          <a:lnRef idx="0"/>
-          <a:fillRef idx="0"/>
-          <a:effectRef idx="0"/>
-          <a:fontRef idx="minor"/>
-        </p:style>
-        <p:txBody>
-          <a:bodyPr lIns="0" tIns="0" rIns="0" bIns="0" anchor="ctr">
-            <a:normAutofit/>
-          </a:bodyPr>
-          <a:p>
-            <a:pPr defTabSz="914400">
-              <a:lnSpc>
-                <a:spcPct val="100000"/>
-              </a:lnSpc>
-              <a:tabLst>
-                <a:tab pos="0" algn="l"/>
-              </a:tabLst>
-            </a:pPr>
-            <a:r>
-              <a:rPr lang="en-US" sz="2600" b="0" u="none" strike="noStrike">
-                <a:solidFill>
-                  <a:srgbClr val="E53935"/>
-                </a:solidFill>
-                <a:effectLst/>
-                <a:uFillTx/>
-                <a:latin typeface="IBM Plex Sans"/>
-                <a:ea typeface="Aptos"/>
-              </a:rPr>
-              <a:t>•</a:t>
-            </a:r>
-            <a:r>
-              <a:rPr lang="en-US" sz="2600" b="0" u="none" strike="noStrike">
-                <a:solidFill>
-                  <a:srgbClr val="D4D6DA"/>
-                </a:solidFill>
-                <a:effectLst/>
-                <a:uFillTx/>
-                <a:latin typeface="IBM Plex Sans"/>
-                <a:ea typeface="Aptos"/>
-              </a:rPr>
-              <a:t>Which objects are connected by relationships.</a:t>
-            </a:r>
-            <a:endParaRPr lang="en-US" sz="2600" b="0" u="none" strike="noStrike">
-              <a:solidFill>
-                <a:srgbClr val="FFFFFF"/>
-              </a:solidFill>
-              <a:effectLst/>
-              <a:uFillTx/>
-              <a:latin typeface="Arial"/>
-            </a:endParaRPr>
-          </a:p>
-          <a:p>
-            <a:pPr defTabSz="914400">
-              <a:lnSpc>
-                <a:spcPct val="100000"/>
-              </a:lnSpc>
-              <a:tabLst>
-                <a:tab pos="0" algn="l"/>
-              </a:tabLst>
-            </a:pPr>
-            <a:r>
-              <a:rPr lang="en-US" sz="2600" b="0" u="none" strike="noStrike">
-                <a:solidFill>
-                  <a:srgbClr val="E53935"/>
-                </a:solidFill>
-                <a:effectLst/>
-                <a:uFillTx/>
-                <a:latin typeface="IBM Plex Sans"/>
-                <a:ea typeface="Aptos"/>
-              </a:rPr>
-              <a:t>•</a:t>
-            </a:r>
-            <a:r>
-              <a:rPr lang="en-US" sz="2600" b="0" u="none" strike="noStrike">
-                <a:solidFill>
-                  <a:srgbClr val="D4D6DA"/>
-                </a:solidFill>
-                <a:effectLst/>
-                <a:uFillTx/>
-                <a:latin typeface="IBM Plex Sans"/>
-                <a:ea typeface="Aptos"/>
-              </a:rPr>
-              <a:t>Which paths are the most straightforward.</a:t>
-            </a:r>
-            <a:endParaRPr lang="en-US" sz="2600" b="0" u="none" strike="noStrike">
-              <a:solidFill>
-                <a:srgbClr val="FFFFFF"/>
-              </a:solidFill>
-              <a:effectLst/>
-              <a:uFillTx/>
-              <a:latin typeface="Arial"/>
-            </a:endParaRPr>
-          </a:p>
-          <a:p>
-            <a:pPr defTabSz="914400">
-              <a:lnSpc>
-                <a:spcPct val="100000"/>
-              </a:lnSpc>
-              <a:tabLst>
-                <a:tab pos="0" algn="l"/>
-              </a:tabLst>
-            </a:pPr>
-            <a:r>
-              <a:rPr lang="en-US" sz="2600" b="0" u="none" strike="noStrike">
-                <a:solidFill>
-                  <a:srgbClr val="E53935"/>
-                </a:solidFill>
-                <a:effectLst/>
-                <a:uFillTx/>
-                <a:latin typeface="IBM Plex Sans"/>
-                <a:ea typeface="Aptos"/>
-              </a:rPr>
-              <a:t>•</a:t>
-            </a:r>
-            <a:r>
-              <a:rPr lang="en-US" sz="2600" b="0" u="none" strike="noStrike">
-                <a:solidFill>
-                  <a:srgbClr val="D4D6DA"/>
-                </a:solidFill>
-                <a:effectLst/>
-                <a:uFillTx/>
-                <a:latin typeface="IBM Plex Sans"/>
-                <a:ea typeface="Aptos"/>
-              </a:rPr>
-              <a:t>Which misconfiguration is most relevant to the path.</a:t>
-            </a:r>
-            <a:endParaRPr lang="en-US" sz="2600" b="0" u="none" strike="noStrike">
-              <a:solidFill>
-                <a:srgbClr val="FFFFFF"/>
-              </a:solidFill>
-              <a:effectLst/>
-              <a:uFillTx/>
-              <a:latin typeface="Arial"/>
-            </a:endParaRPr>
-          </a:p>
-          <a:p>
-            <a:pPr defTabSz="914400">
-              <a:lnSpc>
-                <a:spcPct val="100000"/>
-              </a:lnSpc>
-              <a:tabLst>
-                <a:tab pos="0" algn="l"/>
-              </a:tabLst>
-            </a:pPr>
-            <a:r>
-              <a:rPr lang="en-US" sz="2600" b="0" u="none" strike="noStrike">
-                <a:solidFill>
-                  <a:srgbClr val="E53935"/>
-                </a:solidFill>
-                <a:effectLst/>
-                <a:uFillTx/>
-                <a:latin typeface="IBM Plex Sans"/>
-                <a:ea typeface="Aptos"/>
-              </a:rPr>
-              <a:t>•</a:t>
-            </a:r>
-            <a:r>
-              <a:rPr lang="en-US" sz="2600" b="0" u="none" strike="noStrike">
-                <a:solidFill>
-                  <a:srgbClr val="D4D6DA"/>
-                </a:solidFill>
-                <a:effectLst/>
-                <a:uFillTx/>
-                <a:latin typeface="IBM Plex Sans"/>
-                <a:ea typeface="Aptos"/>
-              </a:rPr>
-              <a:t>Which relationship is likely to lead to an objective.</a:t>
-            </a:r>
-            <a:endParaRPr lang="en-US" sz="2600" b="0" u="none" strike="noStrike">
-              <a:solidFill>
-                <a:srgbClr val="FFFFFF"/>
-              </a:solidFill>
-              <a:effectLst/>
-              <a:uFillTx/>
-              <a:latin typeface="Arial"/>
-            </a:endParaRPr>
-          </a:p>
-        </p:txBody>
-      </p:sp>
-      <p:sp>
-        <p:nvSpPr>
-          <p:cNvPr id="199" name="Text 28"/>
-          <p:cNvSpPr/>
-          <p:nvPr/>
-        </p:nvSpPr>
-        <p:spPr>
-          <a:xfrm>
-            <a:off x="1188720" y="2464200"/>
-            <a:ext cx="4159440" cy="479160"/>
-          </a:xfrm>
-          <a:prstGeom prst="rect">
-            <a:avLst/>
-          </a:prstGeom>
-          <a:noFill/>
-          <a:ln w="0">
-            <a:noFill/>
-          </a:ln>
-        </p:spPr>
-        <p:style>
-          <a:lnRef idx="0"/>
-          <a:fillRef idx="0"/>
-          <a:effectRef idx="0"/>
-          <a:fontRef idx="minor"/>
-        </p:style>
-        <p:txBody>
-          <a:bodyPr lIns="0" tIns="0" rIns="0" bIns="0" anchor="ctr">
-            <a:normAutofit/>
-          </a:bodyPr>
-          <a:p>
-            <a:endParaRPr lang="en-US" sz="1800" b="0" u="none" strike="noStrike">
-              <a:solidFill>
-                <a:srgbClr val="FFFFFF"/>
-              </a:solidFill>
-              <a:effectLst/>
-              <a:uFillTx/>
-              <a:latin typeface="Arial"/>
-            </a:endParaRPr>
-          </a:p>
-        </p:txBody>
-      </p:sp>
-      <p:sp>
-        <p:nvSpPr>
-          <p:cNvPr id="200" name="Text 30"/>
-          <p:cNvSpPr/>
-          <p:nvPr/>
-        </p:nvSpPr>
-        <p:spPr>
-          <a:xfrm>
-            <a:off x="1188720" y="2962800"/>
-            <a:ext cx="4159440" cy="479160"/>
-          </a:xfrm>
-          <a:prstGeom prst="rect">
-            <a:avLst/>
-          </a:prstGeom>
-          <a:noFill/>
-          <a:ln w="0">
-            <a:noFill/>
-          </a:ln>
-        </p:spPr>
-        <p:style>
-          <a:lnRef idx="0"/>
-          <a:fillRef idx="0"/>
-          <a:effectRef idx="0"/>
-          <a:fontRef idx="minor"/>
-        </p:style>
-        <p:txBody>
-          <a:bodyPr lIns="0" tIns="0" rIns="0" bIns="0" anchor="ctr">
-            <a:normAutofit/>
-          </a:bodyPr>
-          <a:p>
-            <a:endParaRPr lang="en-US" sz="1800" b="0" u="none" strike="noStrike">
-              <a:solidFill>
-                <a:srgbClr val="FFFFFF"/>
-              </a:solidFill>
-              <a:effectLst/>
-              <a:uFillTx/>
-              <a:latin typeface="Arial"/>
-            </a:endParaRPr>
-          </a:p>
-        </p:txBody>
-      </p:sp>
-      <p:sp>
-        <p:nvSpPr>
-          <p:cNvPr id="201" name="Text 32"/>
-          <p:cNvSpPr/>
-          <p:nvPr/>
-        </p:nvSpPr>
-        <p:spPr>
-          <a:xfrm>
-            <a:off x="1188720" y="3461040"/>
-            <a:ext cx="4159440" cy="479160"/>
-          </a:xfrm>
-          <a:prstGeom prst="rect">
-            <a:avLst/>
-          </a:prstGeom>
-          <a:noFill/>
-          <a:ln w="0">
-            <a:noFill/>
-          </a:ln>
-        </p:spPr>
-        <p:style>
-          <a:lnRef idx="0"/>
-          <a:fillRef idx="0"/>
-          <a:effectRef idx="0"/>
-          <a:fontRef idx="minor"/>
-        </p:style>
-        <p:txBody>
-          <a:bodyPr lIns="0" tIns="0" rIns="0" bIns="0" anchor="ctr">
-            <a:normAutofit/>
-          </a:bodyPr>
-          <a:p>
-            <a:endParaRPr lang="en-US" sz="1800" b="0" u="none" strike="noStrike">
-              <a:solidFill>
-                <a:srgbClr val="FFFFFF"/>
-              </a:solidFill>
-              <a:effectLst/>
-              <a:uFillTx/>
-              <a:latin typeface="Arial"/>
-            </a:endParaRPr>
-          </a:p>
-        </p:txBody>
-      </p:sp>
-      <p:sp>
-        <p:nvSpPr>
-          <p:cNvPr id="202" name="Text 33"/>
-          <p:cNvSpPr/>
-          <p:nvPr/>
-        </p:nvSpPr>
-        <p:spPr>
-          <a:xfrm>
-            <a:off x="6446520" y="1494000"/>
-            <a:ext cx="4708080" cy="401400"/>
-          </a:xfrm>
-          <a:prstGeom prst="rect">
-            <a:avLst/>
-          </a:prstGeom>
-          <a:solidFill>
-            <a:srgbClr val="3A1111"/>
-          </a:solidFill>
-          <a:ln w="12700">
-            <a:solidFill>
-              <a:srgbClr val="E53935">
-                <a:alpha val="85000"/>
-              </a:srgbClr>
-            </a:solidFill>
-            <a:round/>
-          </a:ln>
-        </p:spPr>
-        <p:style>
-          <a:lnRef idx="0"/>
-          <a:fillRef idx="0"/>
-          <a:effectRef idx="0"/>
-          <a:fontRef idx="minor"/>
-        </p:style>
-        <p:txBody>
-          <a:bodyPr lIns="1800" tIns="1800" rIns="1800" bIns="1800" anchor="ctr">
-            <a:normAutofit/>
-          </a:bodyPr>
-          <a:p>
-            <a:pPr defTabSz="914400">
-              <a:lnSpc>
-                <a:spcPct val="100000"/>
-              </a:lnSpc>
-              <a:tabLst>
-                <a:tab pos="0" algn="l"/>
-              </a:tabLst>
-            </a:pPr>
-            <a:r>
-              <a:rPr lang="en-US" sz="1400" b="1" u="none" strike="noStrike">
-                <a:solidFill>
-                  <a:srgbClr val="F2F3F5"/>
-                </a:solidFill>
-                <a:effectLst/>
-                <a:uFillTx/>
-                <a:latin typeface="IBM Plex Sans"/>
-                <a:ea typeface="Aptos"/>
-              </a:rPr>
-              <a:t> What still requires tester validation</a:t>
-            </a:r>
-            <a:endParaRPr lang="en-US" sz="1400" b="0" u="none" strike="noStrike">
-              <a:solidFill>
-                <a:srgbClr val="FFFFFF"/>
-              </a:solidFill>
-              <a:effectLst/>
-              <a:uFillTx/>
-              <a:latin typeface="Arial"/>
-            </a:endParaRPr>
-          </a:p>
-        </p:txBody>
-      </p:sp>
-      <p:sp>
-        <p:nvSpPr>
-          <p:cNvPr id="203" name="Text 35"/>
-          <p:cNvSpPr/>
-          <p:nvPr/>
-        </p:nvSpPr>
-        <p:spPr>
-          <a:xfrm>
-            <a:off x="6421320" y="1965960"/>
-            <a:ext cx="5176440" cy="4421160"/>
-          </a:xfrm>
-          <a:prstGeom prst="rect">
-            <a:avLst/>
-          </a:prstGeom>
-          <a:noFill/>
-          <a:ln w="0">
-            <a:noFill/>
-          </a:ln>
-        </p:spPr>
-        <p:style>
-          <a:lnRef idx="0"/>
-          <a:fillRef idx="0"/>
-          <a:effectRef idx="0"/>
-          <a:fontRef idx="minor"/>
-        </p:style>
-        <p:txBody>
-          <a:bodyPr lIns="0" tIns="0" rIns="0" bIns="0" anchor="ctr">
-            <a:normAutofit/>
-          </a:bodyPr>
-          <a:p>
-            <a:pPr defTabSz="914400">
-              <a:lnSpc>
-                <a:spcPct val="100000"/>
-              </a:lnSpc>
-              <a:tabLst>
-                <a:tab pos="0" algn="l"/>
-              </a:tabLst>
-            </a:pPr>
-            <a:r>
-              <a:rPr lang="en-US" sz="2600" b="0" u="none" strike="noStrike">
-                <a:solidFill>
-                  <a:srgbClr val="E53935"/>
-                </a:solidFill>
-                <a:effectLst/>
-                <a:uFillTx/>
-                <a:latin typeface="IBM Plex Sans"/>
-                <a:ea typeface="Aptos"/>
-              </a:rPr>
-              <a:t>•</a:t>
-            </a:r>
-            <a:r>
-              <a:rPr lang="en-US" sz="2600" b="0" u="none" strike="noStrike">
-                <a:solidFill>
-                  <a:srgbClr val="D4D6DA"/>
-                </a:solidFill>
-                <a:effectLst/>
-                <a:uFillTx/>
-                <a:latin typeface="IBM Plex Sans"/>
-                <a:ea typeface="Aptos"/>
-              </a:rPr>
-              <a:t>Whether the path is exploitable in the specific environment.</a:t>
-            </a:r>
-            <a:endParaRPr lang="en-US" sz="2600" b="0" u="none" strike="noStrike">
-              <a:solidFill>
-                <a:srgbClr val="FFFFFF"/>
-              </a:solidFill>
-              <a:effectLst/>
-              <a:uFillTx/>
-              <a:latin typeface="Arial"/>
-            </a:endParaRPr>
-          </a:p>
-          <a:p>
-            <a:pPr defTabSz="914400">
-              <a:lnSpc>
-                <a:spcPct val="100000"/>
-              </a:lnSpc>
-              <a:tabLst>
-                <a:tab pos="0" algn="l"/>
-              </a:tabLst>
-            </a:pPr>
-            <a:r>
-              <a:rPr lang="en-US" sz="2600" b="0" u="none" strike="noStrike">
-                <a:solidFill>
-                  <a:srgbClr val="E53935"/>
-                </a:solidFill>
-                <a:effectLst/>
-                <a:uFillTx/>
-                <a:latin typeface="IBM Plex Sans"/>
-                <a:ea typeface="Aptos"/>
-              </a:rPr>
-              <a:t>•</a:t>
-            </a:r>
-            <a:r>
-              <a:rPr lang="en-US" sz="2600" b="0" u="none" strike="noStrike">
-                <a:solidFill>
-                  <a:srgbClr val="D4D6DA"/>
-                </a:solidFill>
-                <a:effectLst/>
-                <a:uFillTx/>
-                <a:latin typeface="IBM Plex Sans"/>
-                <a:ea typeface="Aptos"/>
-              </a:rPr>
-              <a:t>Whether compensating controls block the chain.</a:t>
-            </a:r>
-            <a:endParaRPr lang="en-US" sz="2600" b="0" u="none" strike="noStrike">
-              <a:solidFill>
-                <a:srgbClr val="FFFFFF"/>
-              </a:solidFill>
-              <a:effectLst/>
-              <a:uFillTx/>
-              <a:latin typeface="Arial"/>
-            </a:endParaRPr>
-          </a:p>
-          <a:p>
-            <a:pPr defTabSz="914400">
-              <a:lnSpc>
-                <a:spcPct val="100000"/>
-              </a:lnSpc>
-              <a:tabLst>
-                <a:tab pos="0" algn="l"/>
-              </a:tabLst>
-            </a:pPr>
-            <a:r>
-              <a:rPr lang="en-US" sz="2600" b="0" u="none" strike="noStrike">
-                <a:solidFill>
-                  <a:srgbClr val="E53935"/>
-                </a:solidFill>
-                <a:effectLst/>
-                <a:uFillTx/>
-                <a:latin typeface="IBM Plex Sans"/>
-                <a:ea typeface="Aptos"/>
-              </a:rPr>
-              <a:t>•</a:t>
-            </a:r>
-            <a:r>
-              <a:rPr lang="en-US" sz="2600" b="0" u="none" strike="noStrike">
-                <a:solidFill>
-                  <a:srgbClr val="D4D6DA"/>
-                </a:solidFill>
-                <a:effectLst/>
-                <a:uFillTx/>
-                <a:latin typeface="IBM Plex Sans"/>
-                <a:ea typeface="Aptos"/>
-              </a:rPr>
-              <a:t>Whether captured credentials are valid and in scope.</a:t>
-            </a:r>
-            <a:endParaRPr lang="en-US" sz="2600" b="0" u="none" strike="noStrike">
-              <a:solidFill>
-                <a:srgbClr val="FFFFFF"/>
-              </a:solidFill>
-              <a:effectLst/>
-              <a:uFillTx/>
-              <a:latin typeface="Arial"/>
-            </a:endParaRPr>
-          </a:p>
-          <a:p>
-            <a:pPr defTabSz="914400">
-              <a:lnSpc>
-                <a:spcPct val="100000"/>
-              </a:lnSpc>
-              <a:tabLst>
-                <a:tab pos="0" algn="l"/>
-              </a:tabLst>
-            </a:pPr>
-            <a:r>
-              <a:rPr lang="en-US" sz="2600" b="0" u="none" strike="noStrike">
-                <a:solidFill>
-                  <a:srgbClr val="E53935"/>
-                </a:solidFill>
-                <a:effectLst/>
-                <a:uFillTx/>
-                <a:latin typeface="IBM Plex Sans"/>
-                <a:ea typeface="Aptos"/>
-              </a:rPr>
-              <a:t>•</a:t>
-            </a:r>
-            <a:r>
-              <a:rPr lang="en-US" sz="2600" b="0" u="none" strike="noStrike">
-                <a:solidFill>
-                  <a:srgbClr val="D4D6DA"/>
-                </a:solidFill>
-                <a:effectLst/>
-                <a:uFillTx/>
-                <a:latin typeface="IBM Plex Sans"/>
-                <a:ea typeface="Aptos"/>
-              </a:rPr>
-              <a:t>Whether the path creates meaningful business impact.</a:t>
-            </a:r>
-            <a:endParaRPr lang="en-US" sz="2600" b="0" u="none" strike="noStrike">
-              <a:solidFill>
-                <a:srgbClr val="FFFFFF"/>
-              </a:solidFill>
-              <a:effectLst/>
-              <a:uFillTx/>
-              <a:latin typeface="Arial"/>
-            </a:endParaRPr>
-          </a:p>
-        </p:txBody>
-      </p:sp>
-      <p:sp>
-        <p:nvSpPr>
-          <p:cNvPr id="204" name="Text 39"/>
-          <p:cNvSpPr/>
-          <p:nvPr/>
-        </p:nvSpPr>
-        <p:spPr>
-          <a:xfrm>
-            <a:off x="6812280" y="2962800"/>
-            <a:ext cx="4159440" cy="479160"/>
-          </a:xfrm>
-          <a:prstGeom prst="rect">
-            <a:avLst/>
-          </a:prstGeom>
-          <a:noFill/>
-          <a:ln w="0">
-            <a:noFill/>
-          </a:ln>
-        </p:spPr>
-        <p:style>
-          <a:lnRef idx="0"/>
-          <a:fillRef idx="0"/>
-          <a:effectRef idx="0"/>
-          <a:fontRef idx="minor"/>
-        </p:style>
-        <p:txBody>
-          <a:bodyPr lIns="0" tIns="0" rIns="0" bIns="0" anchor="ctr">
-            <a:normAutofit/>
-          </a:bodyPr>
-          <a:p>
-            <a:endParaRPr lang="en-US" sz="1800" b="0" u="none" strike="noStrike">
-              <a:solidFill>
-                <a:srgbClr val="FFFFFF"/>
-              </a:solidFill>
-              <a:effectLst/>
-              <a:uFillTx/>
-              <a:latin typeface="Arial"/>
-            </a:endParaRPr>
-          </a:p>
-        </p:txBody>
-      </p:sp>
-      <p:sp>
-        <p:nvSpPr>
-          <p:cNvPr id="205" name="Text 41"/>
-          <p:cNvSpPr/>
-          <p:nvPr/>
-        </p:nvSpPr>
-        <p:spPr>
-          <a:xfrm>
-            <a:off x="6812280" y="3461040"/>
-            <a:ext cx="4159440" cy="479160"/>
-          </a:xfrm>
-          <a:prstGeom prst="rect">
-            <a:avLst/>
-          </a:prstGeom>
-          <a:noFill/>
-          <a:ln w="0">
-            <a:noFill/>
-          </a:ln>
-        </p:spPr>
-        <p:style>
-          <a:lnRef idx="0"/>
-          <a:fillRef idx="0"/>
-          <a:effectRef idx="0"/>
-          <a:fontRef idx="minor"/>
-        </p:style>
-        <p:txBody>
-          <a:bodyPr lIns="0" tIns="0" rIns="0" bIns="0" anchor="ctr">
-            <a:normAutofit/>
           </a:bodyPr>
           <a:p>
             <a:endParaRPr lang="en-US" sz="1800" b="0" u="none" strike="noStrike">
@@ -13062,14 +13910,14 @@
       </p:grpSpPr>
       <p:sp>
         <p:nvSpPr>
-          <p:cNvPr id="206" name="Shape 0"/>
+          <p:cNvPr id="196" name="Shape 0"/>
           <p:cNvSpPr/>
           <p:nvPr/>
         </p:nvSpPr>
         <p:spPr>
           <a:xfrm>
             <a:off x="0" y="0"/>
-            <a:ext cx="12190680" cy="6856920"/>
+            <a:ext cx="12190320" cy="6856560"/>
           </a:xfrm>
           <a:prstGeom prst="rect">
             <a:avLst/>
@@ -13110,14 +13958,14 @@
       </p:sp>
       <p:sp>
         <p:nvSpPr>
-          <p:cNvPr id="207" name="Shape 1"/>
+          <p:cNvPr id="197" name="Shape 1"/>
           <p:cNvSpPr/>
           <p:nvPr/>
         </p:nvSpPr>
         <p:spPr>
           <a:xfrm>
             <a:off x="18360" y="18360"/>
-            <a:ext cx="12153960" cy="6820200"/>
+            <a:ext cx="12153600" cy="6819840"/>
           </a:xfrm>
           <a:prstGeom prst="rect">
             <a:avLst/>
@@ -13156,7 +14004,7 @@
       </p:sp>
       <p:sp>
         <p:nvSpPr>
-          <p:cNvPr id="208" name="Shape 2"/>
+          <p:cNvPr id="198" name="Shape 2"/>
           <p:cNvSpPr/>
           <p:nvPr/>
         </p:nvSpPr>
@@ -13201,7 +14049,7 @@
       </p:sp>
       <p:sp>
         <p:nvSpPr>
-          <p:cNvPr id="209" name="Shape 3"/>
+          <p:cNvPr id="199" name="Shape 3"/>
           <p:cNvSpPr/>
           <p:nvPr/>
         </p:nvSpPr>
@@ -13246,7 +14094,7 @@
       </p:sp>
       <p:sp>
         <p:nvSpPr>
-          <p:cNvPr id="210" name="Shape 4"/>
+          <p:cNvPr id="200" name="Shape 4"/>
           <p:cNvSpPr/>
           <p:nvPr/>
         </p:nvSpPr>
@@ -13291,7 +14139,7 @@
       </p:sp>
       <p:sp>
         <p:nvSpPr>
-          <p:cNvPr id="211" name="Shape 5"/>
+          <p:cNvPr id="201" name="Shape 5"/>
           <p:cNvSpPr/>
           <p:nvPr/>
         </p:nvSpPr>
@@ -13336,7 +14184,7 @@
       </p:sp>
       <p:sp>
         <p:nvSpPr>
-          <p:cNvPr id="212" name="Shape 6"/>
+          <p:cNvPr id="202" name="Shape 6"/>
           <p:cNvSpPr/>
           <p:nvPr/>
         </p:nvSpPr>
@@ -13381,7 +14229,7 @@
       </p:sp>
       <p:sp>
         <p:nvSpPr>
-          <p:cNvPr id="213" name="Shape 7"/>
+          <p:cNvPr id="203" name="Shape 7"/>
           <p:cNvSpPr/>
           <p:nvPr/>
         </p:nvSpPr>
@@ -13426,7 +14274,7 @@
       </p:sp>
       <p:sp>
         <p:nvSpPr>
-          <p:cNvPr id="214" name="Shape 8"/>
+          <p:cNvPr id="204" name="Shape 8"/>
           <p:cNvSpPr/>
           <p:nvPr/>
         </p:nvSpPr>
@@ -13471,7 +14319,7 @@
       </p:sp>
       <p:sp>
         <p:nvSpPr>
-          <p:cNvPr id="215" name="Shape 9"/>
+          <p:cNvPr id="205" name="Shape 9"/>
           <p:cNvSpPr/>
           <p:nvPr/>
         </p:nvSpPr>
@@ -13516,7 +14364,7 @@
       </p:sp>
       <p:sp>
         <p:nvSpPr>
-          <p:cNvPr id="216" name="Shape 10"/>
+          <p:cNvPr id="206" name="Shape 10"/>
           <p:cNvSpPr/>
           <p:nvPr/>
         </p:nvSpPr>
@@ -13561,7 +14409,7 @@
       </p:sp>
       <p:sp>
         <p:nvSpPr>
-          <p:cNvPr id="217" name="Shape 11"/>
+          <p:cNvPr id="207" name="Shape 11"/>
           <p:cNvSpPr/>
           <p:nvPr/>
         </p:nvSpPr>
@@ -13606,7 +14454,7 @@
       </p:sp>
       <p:sp>
         <p:nvSpPr>
-          <p:cNvPr id="218" name="Shape 12"/>
+          <p:cNvPr id="208" name="Shape 12"/>
           <p:cNvSpPr/>
           <p:nvPr/>
         </p:nvSpPr>
@@ -13651,7 +14499,7 @@
       </p:sp>
       <p:sp>
         <p:nvSpPr>
-          <p:cNvPr id="219" name="Shape 13"/>
+          <p:cNvPr id="209" name="Shape 13"/>
           <p:cNvSpPr/>
           <p:nvPr/>
         </p:nvSpPr>
@@ -13696,7 +14544,7 @@
       </p:sp>
       <p:sp>
         <p:nvSpPr>
-          <p:cNvPr id="220" name="Shape 14"/>
+          <p:cNvPr id="210" name="Shape 14"/>
           <p:cNvSpPr/>
           <p:nvPr/>
         </p:nvSpPr>
@@ -13741,7 +14589,7 @@
       </p:sp>
       <p:sp>
         <p:nvSpPr>
-          <p:cNvPr id="221" name="Shape 15"/>
+          <p:cNvPr id="211" name="Shape 15"/>
           <p:cNvSpPr/>
           <p:nvPr/>
         </p:nvSpPr>
@@ -13786,7 +14634,7 @@
       </p:sp>
       <p:sp>
         <p:nvSpPr>
-          <p:cNvPr id="222" name="Shape 16"/>
+          <p:cNvPr id="212" name="Shape 16"/>
           <p:cNvSpPr/>
           <p:nvPr/>
         </p:nvSpPr>
@@ -13831,7 +14679,7 @@
       </p:sp>
       <p:sp>
         <p:nvSpPr>
-          <p:cNvPr id="223" name="Shape 17"/>
+          <p:cNvPr id="213" name="Shape 17"/>
           <p:cNvSpPr/>
           <p:nvPr/>
         </p:nvSpPr>
@@ -13876,7 +14724,7 @@
       </p:sp>
       <p:sp>
         <p:nvSpPr>
-          <p:cNvPr id="224" name="Shape 18"/>
+          <p:cNvPr id="214" name="Shape 18"/>
           <p:cNvSpPr/>
           <p:nvPr/>
         </p:nvSpPr>
@@ -13921,14 +14769,14 @@
       </p:sp>
       <p:sp>
         <p:nvSpPr>
-          <p:cNvPr id="225" name="Text 19"/>
+          <p:cNvPr id="215" name="Text 19"/>
           <p:cNvSpPr/>
           <p:nvPr/>
         </p:nvSpPr>
         <p:spPr>
           <a:xfrm>
             <a:off x="255960" y="6455520"/>
-            <a:ext cx="410400" cy="163440"/>
+            <a:ext cx="410040" cy="163080"/>
           </a:xfrm>
           <a:prstGeom prst="rect">
             <a:avLst/>
@@ -13982,14 +14830,14 @@
       </p:sp>
       <p:sp>
         <p:nvSpPr>
-          <p:cNvPr id="226" name="Text 21"/>
-          <p:cNvSpPr/>
-          <p:nvPr/>
-        </p:nvSpPr>
-        <p:spPr>
-          <a:xfrm>
-            <a:off x="749880" y="1143000"/>
-            <a:ext cx="3656520" cy="501840"/>
+          <p:cNvPr id="216" name="Text 21"/>
+          <p:cNvSpPr/>
+          <p:nvPr/>
+        </p:nvSpPr>
+        <p:spPr>
+          <a:xfrm>
+            <a:off x="576000" y="384120"/>
+            <a:ext cx="7130880" cy="410040"/>
           </a:xfrm>
           <a:prstGeom prst="rect">
             <a:avLst/>
@@ -14019,7 +14867,7 @@
               </a:tabLst>
             </a:pPr>
             <a:r>
-              <a:rPr lang="en-US" sz="3400" b="1" u="none" strike="noStrike">
+              <a:rPr lang="en-US" sz="2800" b="1" u="none" strike="noStrike">
                 <a:solidFill>
                   <a:srgbClr val="F2F3F5"/>
                 </a:solidFill>
@@ -14028,112 +14876,96 @@
                 <a:latin typeface="IBM Plex Sans"/>
                 <a:ea typeface="Aptos Display"/>
               </a:rPr>
-              <a:t>Questions?</a:t>
+              <a:t>How to Interpret the Graph</a:t>
             </a:r>
-            <a:endParaRPr lang="en-US" sz="3400" b="0" u="none" strike="noStrike">
-              <a:solidFill>
-                <a:srgbClr val="FFFFFF"/>
-              </a:solidFill>
-              <a:effectLst/>
-              <a:uFillTx/>
-              <a:latin typeface="Arial"/>
-            </a:endParaRPr>
-          </a:p>
-        </p:txBody>
-      </p:sp>
-      <p:sp>
-        <p:nvSpPr>
-          <p:cNvPr id="227" name="Text 22"/>
-          <p:cNvSpPr/>
-          <p:nvPr/>
-        </p:nvSpPr>
-        <p:spPr>
-          <a:xfrm>
-            <a:off x="822960" y="2148840"/>
-            <a:ext cx="364680" cy="364680"/>
-          </a:xfrm>
-          <a:prstGeom prst="ellipse">
+            <a:endParaRPr lang="en-US" sz="2800" b="0" u="none" strike="noStrike">
+              <a:solidFill>
+                <a:srgbClr val="FFFFFF"/>
+              </a:solidFill>
+              <a:effectLst/>
+              <a:uFillTx/>
+              <a:latin typeface="Arial"/>
+            </a:endParaRPr>
+          </a:p>
+        </p:txBody>
+      </p:sp>
+      <p:sp>
+        <p:nvSpPr>
+          <p:cNvPr id="217" name="Shape 22"/>
+          <p:cNvSpPr/>
+          <p:nvPr/>
+        </p:nvSpPr>
+        <p:spPr>
+          <a:xfrm>
+            <a:off x="576000" y="932400"/>
+            <a:ext cx="914400" cy="360"/>
+          </a:xfrm>
+          <a:prstGeom prst="line">
+            <a:avLst/>
+          </a:prstGeom>
+          <a:ln w="27940">
+            <a:solidFill>
+              <a:srgbClr val="E53935"/>
+            </a:solidFill>
+            <a:round/>
+          </a:ln>
+        </p:spPr>
+        <p:style>
+          <a:lnRef idx="0"/>
+          <a:fillRef idx="0"/>
+          <a:effectRef idx="0"/>
+          <a:fontRef idx="minor"/>
+        </p:style>
+        <p:txBody>
+          <a:bodyPr lIns="90000" tIns="-44640" rIns="90000" bIns="-44640" anchor="t" anchorCtr="1">
+            <a:noAutofit/>
+          </a:bodyPr>
+          <a:p>
+            <a:endParaRPr lang="en-US" sz="1800" b="0" u="none" strike="noStrike">
+              <a:solidFill>
+                <a:srgbClr val="FFFFFF"/>
+              </a:solidFill>
+              <a:effectLst/>
+              <a:uFillTx/>
+              <a:latin typeface="Arial"/>
+            </a:endParaRPr>
+          </a:p>
+        </p:txBody>
+      </p:sp>
+      <p:sp>
+        <p:nvSpPr>
+          <p:cNvPr id="218" name="Text 24"/>
+          <p:cNvSpPr/>
+          <p:nvPr/>
+        </p:nvSpPr>
+        <p:spPr>
+          <a:xfrm>
+            <a:off x="822960" y="1505160"/>
+            <a:ext cx="4707720" cy="401040"/>
+          </a:xfrm>
+          <a:prstGeom prst="rect">
             <a:avLst/>
           </a:prstGeom>
           <a:solidFill>
             <a:srgbClr val="17191C"/>
           </a:solidFill>
-          <a:ln w="15240">
-            <a:solidFill>
-              <a:srgbClr val="555A60"/>
-            </a:solidFill>
-            <a:round/>
-          </a:ln>
-        </p:spPr>
-        <p:style>
-          <a:lnRef idx="0"/>
-          <a:fillRef idx="0"/>
-          <a:effectRef idx="0"/>
-          <a:fontRef idx="minor"/>
-        </p:style>
-        <p:txBody>
-          <a:bodyPr lIns="720" tIns="720" rIns="720" bIns="720" anchor="ctr">
-            <a:normAutofit/>
-          </a:bodyPr>
-          <a:p>
-            <a:pPr algn="ctr" defTabSz="914400">
-              <a:lnSpc>
-                <a:spcPct val="100000"/>
-              </a:lnSpc>
-              <a:tabLst>
-                <a:tab pos="0" algn="l"/>
-              </a:tabLst>
-            </a:pPr>
-            <a:r>
-              <a:rPr lang="en-US" sz="1800" b="1" u="none" strike="noStrike">
-                <a:solidFill>
-                  <a:srgbClr val="F2F3F5"/>
-                </a:solidFill>
-                <a:effectLst/>
-                <a:uFillTx/>
-                <a:latin typeface="IBM Plex Sans"/>
-                <a:ea typeface="Aptos"/>
-              </a:rPr>
-              <a:t>1</a:t>
-            </a:r>
-            <a:endParaRPr lang="en-US" sz="1800" b="0" u="none" strike="noStrike">
-              <a:solidFill>
-                <a:srgbClr val="FFFFFF"/>
-              </a:solidFill>
-              <a:effectLst/>
-              <a:uFillTx/>
-              <a:latin typeface="Arial"/>
-            </a:endParaRPr>
-          </a:p>
-        </p:txBody>
-      </p:sp>
-      <p:sp>
-        <p:nvSpPr>
-          <p:cNvPr id="228" name="Text 23"/>
-          <p:cNvSpPr/>
-          <p:nvPr/>
-        </p:nvSpPr>
-        <p:spPr>
-          <a:xfrm>
-            <a:off x="1417320" y="2148840"/>
-            <a:ext cx="5759640" cy="337320"/>
-          </a:xfrm>
-          <a:prstGeom prst="rect">
-            <a:avLst/>
-          </a:prstGeom>
-          <a:noFill/>
-          <a:ln w="0">
-            <a:noFill/>
-          </a:ln>
-        </p:spPr>
-        <p:style>
-          <a:lnRef idx="0"/>
-          <a:fillRef idx="0"/>
-          <a:effectRef idx="0"/>
-          <a:fontRef idx="minor"/>
-        </p:style>
-        <p:txBody>
-          <a:bodyPr lIns="720" tIns="720" rIns="720" bIns="720" anchor="ctr">
+          <a:ln w="12700">
+            <a:solidFill>
+              <a:srgbClr val="555A60">
+                <a:alpha val="85000"/>
+              </a:srgbClr>
+            </a:solidFill>
+            <a:round/>
+          </a:ln>
+        </p:spPr>
+        <p:style>
+          <a:lnRef idx="0"/>
+          <a:fillRef idx="0"/>
+          <a:effectRef idx="0"/>
+          <a:fontRef idx="minor"/>
+        </p:style>
+        <p:txBody>
+          <a:bodyPr lIns="1800" tIns="1800" rIns="1800" bIns="1800" anchor="ctr">
             <a:normAutofit/>
           </a:bodyPr>
           <a:p>
@@ -14146,73 +14978,7 @@
               </a:tabLst>
             </a:pPr>
             <a:r>
-              <a:rPr lang="en-US" sz="1800" b="0" u="none" strike="noStrike">
-                <a:solidFill>
-                  <a:srgbClr val="D4D6DA"/>
-                </a:solidFill>
-                <a:effectLst/>
-                <a:uFillTx/>
-                <a:latin typeface="IBM Plex Sans"/>
-                <a:ea typeface="Aptos"/>
-              </a:rPr>
-              <a:t>Kubernetes authorization is a graph problem.</a:t>
-            </a:r>
-            <a:endParaRPr lang="en-US" sz="1800" b="0" u="none" strike="noStrike">
-              <a:solidFill>
-                <a:srgbClr val="FFFFFF"/>
-              </a:solidFill>
-              <a:effectLst/>
-              <a:uFillTx/>
-              <a:latin typeface="Arial"/>
-            </a:endParaRPr>
-          </a:p>
-        </p:txBody>
-      </p:sp>
-      <p:sp>
-        <p:nvSpPr>
-          <p:cNvPr id="229" name="Text 24"/>
-          <p:cNvSpPr/>
-          <p:nvPr/>
-        </p:nvSpPr>
-        <p:spPr>
-          <a:xfrm>
-            <a:off x="822960" y="2807280"/>
-            <a:ext cx="364680" cy="364680"/>
-          </a:xfrm>
-          <a:prstGeom prst="ellipse">
-            <a:avLst/>
-          </a:prstGeom>
-          <a:solidFill>
-            <a:srgbClr val="3A1111"/>
-          </a:solidFill>
-          <a:ln w="15240">
-            <a:solidFill>
-              <a:srgbClr val="E53935"/>
-            </a:solidFill>
-            <a:round/>
-          </a:ln>
-        </p:spPr>
-        <p:style>
-          <a:lnRef idx="0"/>
-          <a:fillRef idx="0"/>
-          <a:effectRef idx="0"/>
-          <a:fontRef idx="minor"/>
-        </p:style>
-        <p:txBody>
-          <a:bodyPr lIns="720" tIns="720" rIns="720" bIns="720" anchor="ctr">
-            <a:normAutofit/>
-          </a:bodyPr>
-          <a:p>
-            <a:pPr algn="ctr" defTabSz="914400">
-              <a:lnSpc>
-                <a:spcPct val="100000"/>
-              </a:lnSpc>
-              <a:tabLst>
-                <a:tab pos="0" algn="l"/>
-              </a:tabLst>
-            </a:pPr>
-            <a:r>
-              <a:rPr lang="en-US" sz="1800" b="1" u="none" strike="noStrike">
+              <a:rPr lang="en-US" sz="1400" b="1" u="none" strike="noStrike">
                 <a:solidFill>
                   <a:srgbClr val="F2F3F5"/>
                 </a:solidFill>
@@ -14221,29 +14987,29 @@
                 <a:latin typeface="IBM Plex Sans"/>
                 <a:ea typeface="Aptos"/>
               </a:rPr>
-              <a:t>2</a:t>
+              <a:t> What the graph can tell you</a:t>
             </a:r>
-            <a:endParaRPr lang="en-US" sz="1800" b="0" u="none" strike="noStrike">
-              <a:solidFill>
-                <a:srgbClr val="FFFFFF"/>
-              </a:solidFill>
-              <a:effectLst/>
-              <a:uFillTx/>
-              <a:latin typeface="Arial"/>
-            </a:endParaRPr>
-          </a:p>
-        </p:txBody>
-      </p:sp>
-      <p:sp>
-        <p:nvSpPr>
-          <p:cNvPr id="230" name="Text 25"/>
-          <p:cNvSpPr/>
-          <p:nvPr/>
-        </p:nvSpPr>
-        <p:spPr>
-          <a:xfrm>
-            <a:off x="1417320" y="2653920"/>
-            <a:ext cx="5943600" cy="658440"/>
+            <a:endParaRPr lang="en-US" sz="1400" b="0" u="none" strike="noStrike">
+              <a:solidFill>
+                <a:srgbClr val="FFFFFF"/>
+              </a:solidFill>
+              <a:effectLst/>
+              <a:uFillTx/>
+              <a:latin typeface="Arial"/>
+            </a:endParaRPr>
+          </a:p>
+        </p:txBody>
+      </p:sp>
+      <p:sp>
+        <p:nvSpPr>
+          <p:cNvPr id="219" name="Text 26"/>
+          <p:cNvSpPr/>
+          <p:nvPr/>
+        </p:nvSpPr>
+        <p:spPr>
+          <a:xfrm>
+            <a:off x="795600" y="1965960"/>
+            <a:ext cx="4717080" cy="4431960"/>
           </a:xfrm>
           <a:prstGeom prst="rect">
             <a:avLst/>
@@ -14260,7 +15026,7 @@
           <a:fontRef idx="minor"/>
         </p:style>
         <p:txBody>
-          <a:bodyPr lIns="720" tIns="720" rIns="720" bIns="720" anchor="ctr">
+          <a:bodyPr lIns="0" tIns="0" rIns="0" bIns="0" anchor="ctr">
             <a:normAutofit/>
           </a:bodyPr>
           <a:p>
@@ -14273,7 +15039,19 @@
               </a:tabLst>
             </a:pPr>
             <a:r>
-              <a:rPr lang="en-US" sz="1800" b="0" u="none" strike="noStrike">
+              <a:rPr lang="en-US" sz="2600" b="0" u="none" strike="noStrike">
+                <a:solidFill>
+                  <a:srgbClr val="E53935"/>
+                </a:solidFill>
+                <a:effectLst/>
+                <a:uFillTx/>
+                <a:latin typeface="IBM Plex Sans"/>
+                <a:ea typeface="Aptos"/>
+              </a:rPr>
+              <a:t>•</a:t>
+            </a:r>
+            <a:r>
+              <a:rPr lang="en-US" sz="2600" b="0" u="none" strike="noStrike">
                 <a:solidFill>
                   <a:srgbClr val="D4D6DA"/>
                 </a:solidFill>
@@ -14282,114 +15060,17 @@
                 <a:latin typeface="IBM Plex Sans"/>
                 <a:ea typeface="Aptos"/>
               </a:rPr>
-              <a:t>BloodHound-Kube turns cluster state into OpenGraph data.</a:t>
+              <a:t>Which objects are connected by relationships.</a:t>
             </a:r>
-            <a:endParaRPr lang="en-US" sz="1800" b="0" u="none" strike="noStrike">
-              <a:solidFill>
-                <a:srgbClr val="FFFFFF"/>
-              </a:solidFill>
-              <a:effectLst/>
-              <a:uFillTx/>
-              <a:latin typeface="Arial"/>
-            </a:endParaRPr>
-          </a:p>
-        </p:txBody>
-      </p:sp>
-      <p:sp>
-        <p:nvSpPr>
-          <p:cNvPr id="231" name="Text 26"/>
-          <p:cNvSpPr/>
-          <p:nvPr/>
-        </p:nvSpPr>
-        <p:spPr>
-          <a:xfrm>
-            <a:off x="822960" y="3465720"/>
-            <a:ext cx="364680" cy="364680"/>
-          </a:xfrm>
-          <a:prstGeom prst="ellipse">
-            <a:avLst/>
-          </a:prstGeom>
-          <a:solidFill>
-            <a:srgbClr val="17191C"/>
-          </a:solidFill>
-          <a:ln w="15240">
-            <a:solidFill>
-              <a:srgbClr val="555A60"/>
-            </a:solidFill>
-            <a:round/>
-          </a:ln>
-        </p:spPr>
-        <p:style>
-          <a:lnRef idx="0"/>
-          <a:fillRef idx="0"/>
-          <a:effectRef idx="0"/>
-          <a:fontRef idx="minor"/>
-        </p:style>
-        <p:txBody>
-          <a:bodyPr lIns="720" tIns="720" rIns="720" bIns="720" anchor="ctr">
-            <a:normAutofit/>
-          </a:bodyPr>
-          <a:p>
-            <a:pPr algn="ctr" defTabSz="914400">
-              <a:lnSpc>
-                <a:spcPct val="100000"/>
-              </a:lnSpc>
-              <a:tabLst>
-                <a:tab pos="0" algn="l"/>
-              </a:tabLst>
-            </a:pPr>
-            <a:r>
-              <a:rPr lang="en-US" sz="1800" b="1" u="none" strike="noStrike">
-                <a:solidFill>
-                  <a:srgbClr val="F2F3F5"/>
-                </a:solidFill>
-                <a:effectLst/>
-                <a:uFillTx/>
-                <a:latin typeface="IBM Plex Sans"/>
-                <a:ea typeface="Aptos"/>
-              </a:rPr>
-              <a:t>3</a:t>
-            </a:r>
-            <a:endParaRPr lang="en-US" sz="1800" b="0" u="none" strike="noStrike">
-              <a:solidFill>
-                <a:srgbClr val="FFFFFF"/>
-              </a:solidFill>
-              <a:effectLst/>
-              <a:uFillTx/>
-              <a:latin typeface="Arial"/>
-            </a:endParaRPr>
-          </a:p>
-        </p:txBody>
-      </p:sp>
-      <p:sp>
-        <p:nvSpPr>
-          <p:cNvPr id="232" name="Text 27"/>
-          <p:cNvSpPr/>
-          <p:nvPr/>
-        </p:nvSpPr>
-        <p:spPr>
-          <a:xfrm>
-            <a:off x="1417320" y="3312360"/>
-            <a:ext cx="6114240" cy="652680"/>
-          </a:xfrm>
-          <a:prstGeom prst="rect">
-            <a:avLst/>
-          </a:prstGeom>
-          <a:noFill/>
-          <a:ln w="0">
-            <a:noFill/>
-          </a:ln>
-        </p:spPr>
-        <p:style>
-          <a:lnRef idx="0"/>
-          <a:fillRef idx="0"/>
-          <a:effectRef idx="0"/>
-          <a:fontRef idx="minor"/>
-        </p:style>
-        <p:txBody>
-          <a:bodyPr lIns="720" tIns="720" rIns="720" bIns="720" anchor="ctr">
-            <a:normAutofit/>
-          </a:bodyPr>
+            <a:endParaRPr lang="en-US" sz="2600" b="0" u="none" strike="noStrike">
+              <a:solidFill>
+                <a:srgbClr val="FFFFFF"/>
+              </a:solidFill>
+              <a:effectLst/>
+              <a:uFillTx/>
+              <a:latin typeface="Arial"/>
+            </a:endParaRPr>
+          </a:p>
           <a:p>
             <a:pPr defTabSz="914400">
               <a:lnSpc>
@@ -14400,7 +15081,19 @@
               </a:tabLst>
             </a:pPr>
             <a:r>
-              <a:rPr lang="en-US" sz="1800" b="0" u="none" strike="noStrike">
+              <a:rPr lang="en-US" sz="2600" b="0" u="none" strike="noStrike">
+                <a:solidFill>
+                  <a:srgbClr val="E53935"/>
+                </a:solidFill>
+                <a:effectLst/>
+                <a:uFillTx/>
+                <a:latin typeface="IBM Plex Sans"/>
+                <a:ea typeface="Aptos"/>
+              </a:rPr>
+              <a:t>•</a:t>
+            </a:r>
+            <a:r>
+              <a:rPr lang="en-US" sz="2600" b="0" u="none" strike="noStrike">
                 <a:solidFill>
                   <a:srgbClr val="D4D6DA"/>
                 </a:solidFill>
@@ -14409,98 +15102,17 @@
                 <a:latin typeface="IBM Plex Sans"/>
                 <a:ea typeface="Aptos"/>
               </a:rPr>
-              <a:t>Better visibility leads to better, faster, more accurate testing. </a:t>
+              <a:t>Which paths are the most straightforward.</a:t>
             </a:r>
-            <a:endParaRPr lang="en-US" sz="1800" b="0" u="none" strike="noStrike">
-              <a:solidFill>
-                <a:srgbClr val="FFFFFF"/>
-              </a:solidFill>
-              <a:effectLst/>
-              <a:uFillTx/>
-              <a:latin typeface="Arial"/>
-            </a:endParaRPr>
-          </a:p>
-        </p:txBody>
-      </p:sp>
-      <p:sp>
-        <p:nvSpPr>
-          <p:cNvPr id="233" name="Shape 29"/>
-          <p:cNvSpPr/>
-          <p:nvPr/>
-        </p:nvSpPr>
-        <p:spPr>
-          <a:xfrm>
-            <a:off x="861480" y="4312800"/>
-            <a:ext cx="10500840" cy="1715760"/>
-          </a:xfrm>
-          <a:prstGeom prst="roundRect">
-            <a:avLst>
-              <a:gd name="adj" fmla="val 7317"/>
-            </a:avLst>
-          </a:prstGeom>
-          <a:solidFill>
-            <a:srgbClr val="070809"/>
-          </a:solidFill>
-          <a:ln w="12700">
-            <a:solidFill>
-              <a:srgbClr val="555A60">
-                <a:alpha val="88000"/>
-              </a:srgbClr>
-            </a:solidFill>
-            <a:round/>
-          </a:ln>
-        </p:spPr>
-        <p:style>
-          <a:lnRef idx="0"/>
-          <a:fillRef idx="0"/>
-          <a:effectRef idx="0"/>
-          <a:fontRef idx="minor"/>
-        </p:style>
-        <p:txBody>
-          <a:bodyPr lIns="90000" tIns="45000" rIns="90000" bIns="45000" anchor="t">
-            <a:noAutofit/>
-          </a:bodyPr>
-          <a:p>
-            <a:endParaRPr lang="en-US" sz="1800" b="0" u="none" strike="noStrike">
-              <a:solidFill>
-                <a:srgbClr val="FFFFFF"/>
-              </a:solidFill>
-              <a:effectLst/>
-              <a:uFillTx/>
-              <a:latin typeface="Arial"/>
-            </a:endParaRPr>
-          </a:p>
-        </p:txBody>
-      </p:sp>
-      <p:sp>
-        <p:nvSpPr>
-          <p:cNvPr id="234" name="Text 30"/>
-          <p:cNvSpPr/>
-          <p:nvPr/>
-        </p:nvSpPr>
-        <p:spPr>
-          <a:xfrm>
-            <a:off x="1038600" y="4400280"/>
-            <a:ext cx="10110960" cy="619560"/>
-          </a:xfrm>
-          <a:prstGeom prst="rect">
-            <a:avLst/>
-          </a:prstGeom>
-          <a:noFill/>
-          <a:ln w="0">
-            <a:noFill/>
-          </a:ln>
-        </p:spPr>
-        <p:style>
-          <a:lnRef idx="0"/>
-          <a:fillRef idx="0"/>
-          <a:effectRef idx="0"/>
-          <a:fontRef idx="minor"/>
-        </p:style>
-        <p:txBody>
-          <a:bodyPr lIns="0" tIns="0" rIns="0" bIns="0" anchor="ctr">
-            <a:normAutofit/>
-          </a:bodyPr>
+            <a:endParaRPr lang="en-US" sz="2600" b="0" u="none" strike="noStrike">
+              <a:solidFill>
+                <a:srgbClr val="FFFFFF"/>
+              </a:solidFill>
+              <a:effectLst/>
+              <a:uFillTx/>
+              <a:latin typeface="Arial"/>
+            </a:endParaRPr>
+          </a:p>
           <a:p>
             <a:pPr defTabSz="914400">
               <a:lnSpc>
@@ -14511,57 +15123,38 @@
               </a:tabLst>
             </a:pPr>
             <a:r>
-              <a:rPr lang="en-US" sz="2200" b="0" u="none" strike="noStrike">
+              <a:rPr lang="en-US" sz="2600" b="0" u="none" strike="noStrike">
                 <a:solidFill>
-                  <a:srgbClr val="E7E7E7"/>
+                  <a:srgbClr val="E53935"/>
                 </a:solidFill>
                 <a:effectLst/>
                 <a:uFillTx/>
                 <a:latin typeface="IBM Plex Sans"/>
-                <a:ea typeface="DejaVu Sans Mono"/>
+                <a:ea typeface="Aptos"/>
               </a:rPr>
-              <a:t>github.com/HackinAhab/bloodhound-kube</a:t>
+              <a:t>•</a:t>
             </a:r>
-            <a:endParaRPr lang="en-US" sz="2200" b="0" u="none" strike="noStrike">
-              <a:solidFill>
-                <a:srgbClr val="FFFFFF"/>
-              </a:solidFill>
-              <a:effectLst/>
-              <a:uFillTx/>
-              <a:latin typeface="Arial"/>
-            </a:endParaRPr>
-          </a:p>
-        </p:txBody>
-      </p:sp>
-      <p:sp>
-        <p:nvSpPr>
-          <p:cNvPr id="235" name="Text 31"/>
-          <p:cNvSpPr/>
-          <p:nvPr/>
-        </p:nvSpPr>
-        <p:spPr>
-          <a:xfrm>
-            <a:off x="1038600" y="5020200"/>
-            <a:ext cx="7836120" cy="470160"/>
-          </a:xfrm>
-          <a:prstGeom prst="rect">
-            <a:avLst/>
-          </a:prstGeom>
-          <a:noFill/>
-          <a:ln w="0">
-            <a:noFill/>
-          </a:ln>
-        </p:spPr>
-        <p:style>
-          <a:lnRef idx="0"/>
-          <a:fillRef idx="0"/>
-          <a:effectRef idx="0"/>
-          <a:fontRef idx="minor"/>
-        </p:style>
-        <p:txBody>
-          <a:bodyPr lIns="0" tIns="0" rIns="0" bIns="0" anchor="ctr">
-            <a:normAutofit/>
-          </a:bodyPr>
+            <a:r>
+              <a:rPr lang="en-US" sz="2600" b="0" u="none" strike="noStrike">
+                <a:solidFill>
+                  <a:srgbClr val="D4D6DA"/>
+                </a:solidFill>
+                <a:effectLst/>
+                <a:uFillTx/>
+                <a:latin typeface="IBM Plex Sans"/>
+                <a:ea typeface="Aptos"/>
+              </a:rPr>
+              <a:t>Which misconfiguration is most relevant to the path.</a:t>
+            </a:r>
+            <a:endParaRPr lang="en-US" sz="2600" b="0" u="none" strike="noStrike">
+              <a:solidFill>
+                <a:srgbClr val="FFFFFF"/>
+              </a:solidFill>
+              <a:effectLst/>
+              <a:uFillTx/>
+              <a:latin typeface="Arial"/>
+            </a:endParaRPr>
+          </a:p>
           <a:p>
             <a:pPr defTabSz="914400">
               <a:lnSpc>
@@ -14572,42 +15165,50 @@
               </a:tabLst>
             </a:pPr>
             <a:r>
-              <a:rPr lang="en-US" sz="2200" b="0" u="none" strike="noStrike">
+              <a:rPr lang="en-US" sz="2600" b="0" u="none" strike="noStrike">
                 <a:solidFill>
-                  <a:srgbClr val="E7E7E7"/>
+                  <a:srgbClr val="E53935"/>
                 </a:solidFill>
                 <a:effectLst/>
                 <a:uFillTx/>
                 <a:latin typeface="IBM Plex Sans"/>
-                <a:ea typeface="DejaVu Sans Mono"/>
+                <a:ea typeface="Aptos"/>
               </a:rPr>
-              <a:t>Open source  |  Contributions and feedback welcome</a:t>
+              <a:t>•</a:t>
             </a:r>
-            <a:endParaRPr lang="en-US" sz="2200" b="0" u="none" strike="noStrike">
-              <a:solidFill>
-                <a:srgbClr val="FFFFFF"/>
-              </a:solidFill>
-              <a:effectLst/>
-              <a:uFillTx/>
-              <a:latin typeface="Arial"/>
-            </a:endParaRPr>
-          </a:p>
-        </p:txBody>
-      </p:sp>
-      <p:pic>
-        <p:nvPicPr>
-          <p:cNvPr id="236" name="Picture 243"/>
-          <p:cNvPicPr/>
-          <p:nvPr/>
-        </p:nvPicPr>
-        <p:blipFill>
-          <a:blip r:embed="rId1"/>
-          <a:stretch/>
-        </p:blipFill>
-        <p:spPr>
-          <a:xfrm>
-            <a:off x="7653960" y="640080"/>
-            <a:ext cx="3417120" cy="3417120"/>
+            <a:r>
+              <a:rPr lang="en-US" sz="2600" b="0" u="none" strike="noStrike">
+                <a:solidFill>
+                  <a:srgbClr val="D4D6DA"/>
+                </a:solidFill>
+                <a:effectLst/>
+                <a:uFillTx/>
+                <a:latin typeface="IBM Plex Sans"/>
+                <a:ea typeface="Aptos"/>
+              </a:rPr>
+              <a:t>Which relationship is likely to lead to an objective.</a:t>
+            </a:r>
+            <a:endParaRPr lang="en-US" sz="2600" b="0" u="none" strike="noStrike">
+              <a:solidFill>
+                <a:srgbClr val="FFFFFF"/>
+              </a:solidFill>
+              <a:effectLst/>
+              <a:uFillTx/>
+              <a:latin typeface="Arial"/>
+            </a:endParaRPr>
+          </a:p>
+        </p:txBody>
+      </p:sp>
+      <p:sp>
+        <p:nvSpPr>
+          <p:cNvPr id="220" name="Text 28"/>
+          <p:cNvSpPr/>
+          <p:nvPr/>
+        </p:nvSpPr>
+        <p:spPr>
+          <a:xfrm>
+            <a:off x="1188720" y="2464200"/>
+            <a:ext cx="4159080" cy="478800"/>
           </a:xfrm>
           <a:prstGeom prst="rect">
             <a:avLst/>
@@ -14617,7 +15218,459 @@
             <a:noFill/>
           </a:ln>
         </p:spPr>
-      </p:pic>
+        <p:style>
+          <a:lnRef idx="0"/>
+          <a:fillRef idx="0"/>
+          <a:effectRef idx="0"/>
+          <a:fontRef idx="minor"/>
+        </p:style>
+        <p:txBody>
+          <a:bodyPr lIns="0" tIns="0" rIns="0" bIns="0" anchor="ctr">
+            <a:normAutofit/>
+          </a:bodyPr>
+          <a:p>
+            <a:endParaRPr lang="en-US" sz="1800" b="0" u="none" strike="noStrike">
+              <a:solidFill>
+                <a:srgbClr val="FFFFFF"/>
+              </a:solidFill>
+              <a:effectLst/>
+              <a:uFillTx/>
+              <a:latin typeface="Arial"/>
+            </a:endParaRPr>
+          </a:p>
+        </p:txBody>
+      </p:sp>
+      <p:sp>
+        <p:nvSpPr>
+          <p:cNvPr id="221" name="Text 30"/>
+          <p:cNvSpPr/>
+          <p:nvPr/>
+        </p:nvSpPr>
+        <p:spPr>
+          <a:xfrm>
+            <a:off x="1188720" y="2962800"/>
+            <a:ext cx="4159080" cy="478800"/>
+          </a:xfrm>
+          <a:prstGeom prst="rect">
+            <a:avLst/>
+          </a:prstGeom>
+          <a:noFill/>
+          <a:ln w="0">
+            <a:noFill/>
+          </a:ln>
+        </p:spPr>
+        <p:style>
+          <a:lnRef idx="0"/>
+          <a:fillRef idx="0"/>
+          <a:effectRef idx="0"/>
+          <a:fontRef idx="minor"/>
+        </p:style>
+        <p:txBody>
+          <a:bodyPr lIns="0" tIns="0" rIns="0" bIns="0" anchor="ctr">
+            <a:normAutofit/>
+          </a:bodyPr>
+          <a:p>
+            <a:endParaRPr lang="en-US" sz="1800" b="0" u="none" strike="noStrike">
+              <a:solidFill>
+                <a:srgbClr val="FFFFFF"/>
+              </a:solidFill>
+              <a:effectLst/>
+              <a:uFillTx/>
+              <a:latin typeface="Arial"/>
+            </a:endParaRPr>
+          </a:p>
+        </p:txBody>
+      </p:sp>
+      <p:sp>
+        <p:nvSpPr>
+          <p:cNvPr id="222" name="Text 32"/>
+          <p:cNvSpPr/>
+          <p:nvPr/>
+        </p:nvSpPr>
+        <p:spPr>
+          <a:xfrm>
+            <a:off x="1188720" y="3461040"/>
+            <a:ext cx="4159080" cy="478800"/>
+          </a:xfrm>
+          <a:prstGeom prst="rect">
+            <a:avLst/>
+          </a:prstGeom>
+          <a:noFill/>
+          <a:ln w="0">
+            <a:noFill/>
+          </a:ln>
+        </p:spPr>
+        <p:style>
+          <a:lnRef idx="0"/>
+          <a:fillRef idx="0"/>
+          <a:effectRef idx="0"/>
+          <a:fontRef idx="minor"/>
+        </p:style>
+        <p:txBody>
+          <a:bodyPr lIns="0" tIns="0" rIns="0" bIns="0" anchor="ctr">
+            <a:normAutofit/>
+          </a:bodyPr>
+          <a:p>
+            <a:endParaRPr lang="en-US" sz="1800" b="0" u="none" strike="noStrike">
+              <a:solidFill>
+                <a:srgbClr val="FFFFFF"/>
+              </a:solidFill>
+              <a:effectLst/>
+              <a:uFillTx/>
+              <a:latin typeface="Arial"/>
+            </a:endParaRPr>
+          </a:p>
+        </p:txBody>
+      </p:sp>
+      <p:sp>
+        <p:nvSpPr>
+          <p:cNvPr id="223" name="Text 33"/>
+          <p:cNvSpPr/>
+          <p:nvPr/>
+        </p:nvSpPr>
+        <p:spPr>
+          <a:xfrm>
+            <a:off x="6446520" y="1494000"/>
+            <a:ext cx="4707720" cy="401040"/>
+          </a:xfrm>
+          <a:prstGeom prst="rect">
+            <a:avLst/>
+          </a:prstGeom>
+          <a:solidFill>
+            <a:srgbClr val="3A1111"/>
+          </a:solidFill>
+          <a:ln w="12700">
+            <a:solidFill>
+              <a:srgbClr val="E53935">
+                <a:alpha val="85000"/>
+              </a:srgbClr>
+            </a:solidFill>
+            <a:round/>
+          </a:ln>
+        </p:spPr>
+        <p:style>
+          <a:lnRef idx="0"/>
+          <a:fillRef idx="0"/>
+          <a:effectRef idx="0"/>
+          <a:fontRef idx="minor"/>
+        </p:style>
+        <p:txBody>
+          <a:bodyPr lIns="1800" tIns="1800" rIns="1800" bIns="1800" anchor="ctr">
+            <a:normAutofit/>
+          </a:bodyPr>
+          <a:p>
+            <a:pPr defTabSz="914400">
+              <a:lnSpc>
+                <a:spcPct val="100000"/>
+              </a:lnSpc>
+              <a:tabLst>
+                <a:tab pos="0" algn="l"/>
+              </a:tabLst>
+            </a:pPr>
+            <a:r>
+              <a:rPr lang="en-US" sz="1400" b="1" u="none" strike="noStrike">
+                <a:solidFill>
+                  <a:srgbClr val="F2F3F5"/>
+                </a:solidFill>
+                <a:effectLst/>
+                <a:uFillTx/>
+                <a:latin typeface="IBM Plex Sans"/>
+                <a:ea typeface="Aptos"/>
+              </a:rPr>
+              <a:t> What still requires tester validation</a:t>
+            </a:r>
+            <a:endParaRPr lang="en-US" sz="1400" b="0" u="none" strike="noStrike">
+              <a:solidFill>
+                <a:srgbClr val="FFFFFF"/>
+              </a:solidFill>
+              <a:effectLst/>
+              <a:uFillTx/>
+              <a:latin typeface="Arial"/>
+            </a:endParaRPr>
+          </a:p>
+        </p:txBody>
+      </p:sp>
+      <p:sp>
+        <p:nvSpPr>
+          <p:cNvPr id="224" name="Text 35"/>
+          <p:cNvSpPr/>
+          <p:nvPr/>
+        </p:nvSpPr>
+        <p:spPr>
+          <a:xfrm>
+            <a:off x="6421320" y="1965960"/>
+            <a:ext cx="5176080" cy="4420800"/>
+          </a:xfrm>
+          <a:prstGeom prst="rect">
+            <a:avLst/>
+          </a:prstGeom>
+          <a:noFill/>
+          <a:ln w="0">
+            <a:noFill/>
+          </a:ln>
+        </p:spPr>
+        <p:style>
+          <a:lnRef idx="0"/>
+          <a:fillRef idx="0"/>
+          <a:effectRef idx="0"/>
+          <a:fontRef idx="minor"/>
+        </p:style>
+        <p:txBody>
+          <a:bodyPr lIns="0" tIns="0" rIns="0" bIns="0" anchor="ctr">
+            <a:normAutofit/>
+          </a:bodyPr>
+          <a:p>
+            <a:pPr defTabSz="914400">
+              <a:lnSpc>
+                <a:spcPct val="100000"/>
+              </a:lnSpc>
+              <a:tabLst>
+                <a:tab pos="0" algn="l"/>
+              </a:tabLst>
+            </a:pPr>
+            <a:r>
+              <a:rPr lang="en-US" sz="2600" b="0" u="none" strike="noStrike">
+                <a:solidFill>
+                  <a:srgbClr val="E53935"/>
+                </a:solidFill>
+                <a:effectLst/>
+                <a:uFillTx/>
+                <a:latin typeface="IBM Plex Sans"/>
+                <a:ea typeface="Aptos"/>
+              </a:rPr>
+              <a:t>•</a:t>
+            </a:r>
+            <a:r>
+              <a:rPr lang="en-US" sz="2600" b="0" u="none" strike="noStrike">
+                <a:solidFill>
+                  <a:srgbClr val="D4D6DA"/>
+                </a:solidFill>
+                <a:effectLst/>
+                <a:uFillTx/>
+                <a:latin typeface="IBM Plex Sans"/>
+                <a:ea typeface="Aptos"/>
+              </a:rPr>
+              <a:t>Whether the path is exploitable in the specific environment.</a:t>
+            </a:r>
+            <a:endParaRPr lang="en-US" sz="2600" b="0" u="none" strike="noStrike">
+              <a:solidFill>
+                <a:srgbClr val="FFFFFF"/>
+              </a:solidFill>
+              <a:effectLst/>
+              <a:uFillTx/>
+              <a:latin typeface="Arial"/>
+            </a:endParaRPr>
+          </a:p>
+          <a:p>
+            <a:pPr defTabSz="914400">
+              <a:lnSpc>
+                <a:spcPct val="100000"/>
+              </a:lnSpc>
+              <a:tabLst>
+                <a:tab pos="0" algn="l"/>
+              </a:tabLst>
+            </a:pPr>
+            <a:r>
+              <a:rPr lang="en-US" sz="2600" b="0" u="none" strike="noStrike">
+                <a:solidFill>
+                  <a:srgbClr val="E53935"/>
+                </a:solidFill>
+                <a:effectLst/>
+                <a:uFillTx/>
+                <a:latin typeface="IBM Plex Sans"/>
+                <a:ea typeface="Aptos"/>
+              </a:rPr>
+              <a:t>•</a:t>
+            </a:r>
+            <a:r>
+              <a:rPr lang="en-US" sz="2600" b="0" u="none" strike="noStrike">
+                <a:solidFill>
+                  <a:srgbClr val="D4D6DA"/>
+                </a:solidFill>
+                <a:effectLst/>
+                <a:uFillTx/>
+                <a:latin typeface="IBM Plex Sans"/>
+                <a:ea typeface="Aptos"/>
+              </a:rPr>
+              <a:t>Whether compensating controls block the chain.</a:t>
+            </a:r>
+            <a:endParaRPr lang="en-US" sz="2600" b="0" u="none" strike="noStrike">
+              <a:solidFill>
+                <a:srgbClr val="FFFFFF"/>
+              </a:solidFill>
+              <a:effectLst/>
+              <a:uFillTx/>
+              <a:latin typeface="Arial"/>
+            </a:endParaRPr>
+          </a:p>
+          <a:p>
+            <a:pPr defTabSz="914400">
+              <a:lnSpc>
+                <a:spcPct val="100000"/>
+              </a:lnSpc>
+              <a:tabLst>
+                <a:tab pos="0" algn="l"/>
+              </a:tabLst>
+            </a:pPr>
+            <a:r>
+              <a:rPr lang="en-US" sz="2600" b="0" u="none" strike="noStrike">
+                <a:solidFill>
+                  <a:srgbClr val="E53935"/>
+                </a:solidFill>
+                <a:effectLst/>
+                <a:uFillTx/>
+                <a:latin typeface="IBM Plex Sans"/>
+                <a:ea typeface="Aptos"/>
+              </a:rPr>
+              <a:t>•</a:t>
+            </a:r>
+            <a:r>
+              <a:rPr lang="en-US" sz="2600" b="0" u="none" strike="noStrike">
+                <a:solidFill>
+                  <a:srgbClr val="D4D6DA"/>
+                </a:solidFill>
+                <a:effectLst/>
+                <a:uFillTx/>
+                <a:latin typeface="IBM Plex Sans"/>
+                <a:ea typeface="Aptos"/>
+              </a:rPr>
+              <a:t>Whether captured credentials are valid and in scope.</a:t>
+            </a:r>
+            <a:endParaRPr lang="en-US" sz="2600" b="0" u="none" strike="noStrike">
+              <a:solidFill>
+                <a:srgbClr val="FFFFFF"/>
+              </a:solidFill>
+              <a:effectLst/>
+              <a:uFillTx/>
+              <a:latin typeface="Arial"/>
+            </a:endParaRPr>
+          </a:p>
+          <a:p>
+            <a:pPr defTabSz="914400">
+              <a:lnSpc>
+                <a:spcPct val="100000"/>
+              </a:lnSpc>
+              <a:tabLst>
+                <a:tab pos="0" algn="l"/>
+              </a:tabLst>
+            </a:pPr>
+            <a:r>
+              <a:rPr lang="en-US" sz="2600" b="0" u="none" strike="noStrike">
+                <a:solidFill>
+                  <a:srgbClr val="E53935"/>
+                </a:solidFill>
+                <a:effectLst/>
+                <a:uFillTx/>
+                <a:latin typeface="IBM Plex Sans"/>
+                <a:ea typeface="Aptos"/>
+              </a:rPr>
+              <a:t>•</a:t>
+            </a:r>
+            <a:r>
+              <a:rPr lang="en-US" sz="2600" b="0" u="none" strike="noStrike">
+                <a:solidFill>
+                  <a:srgbClr val="D4D6DA"/>
+                </a:solidFill>
+                <a:effectLst/>
+                <a:uFillTx/>
+                <a:latin typeface="IBM Plex Sans"/>
+                <a:ea typeface="Aptos"/>
+              </a:rPr>
+              <a:t>Whether the path creates meaningful business impact.</a:t>
+            </a:r>
+            <a:endParaRPr lang="en-US" sz="2600" b="0" u="none" strike="noStrike">
+              <a:solidFill>
+                <a:srgbClr val="FFFFFF"/>
+              </a:solidFill>
+              <a:effectLst/>
+              <a:uFillTx/>
+              <a:latin typeface="Arial"/>
+            </a:endParaRPr>
+          </a:p>
+        </p:txBody>
+      </p:sp>
+      <p:sp>
+        <p:nvSpPr>
+          <p:cNvPr id="225" name="Text 39"/>
+          <p:cNvSpPr/>
+          <p:nvPr/>
+        </p:nvSpPr>
+        <p:spPr>
+          <a:xfrm>
+            <a:off x="6812280" y="2962800"/>
+            <a:ext cx="4159080" cy="478800"/>
+          </a:xfrm>
+          <a:prstGeom prst="rect">
+            <a:avLst/>
+          </a:prstGeom>
+          <a:noFill/>
+          <a:ln w="0">
+            <a:noFill/>
+          </a:ln>
+        </p:spPr>
+        <p:style>
+          <a:lnRef idx="0"/>
+          <a:fillRef idx="0"/>
+          <a:effectRef idx="0"/>
+          <a:fontRef idx="minor"/>
+        </p:style>
+        <p:txBody>
+          <a:bodyPr lIns="0" tIns="0" rIns="0" bIns="0" anchor="ctr">
+            <a:normAutofit/>
+          </a:bodyPr>
+          <a:p>
+            <a:endParaRPr lang="en-US" sz="1800" b="0" u="none" strike="noStrike">
+              <a:solidFill>
+                <a:srgbClr val="FFFFFF"/>
+              </a:solidFill>
+              <a:effectLst/>
+              <a:uFillTx/>
+              <a:latin typeface="Arial"/>
+            </a:endParaRPr>
+          </a:p>
+        </p:txBody>
+      </p:sp>
+      <p:sp>
+        <p:nvSpPr>
+          <p:cNvPr id="226" name="Text 41"/>
+          <p:cNvSpPr/>
+          <p:nvPr/>
+        </p:nvSpPr>
+        <p:spPr>
+          <a:xfrm>
+            <a:off x="6812280" y="3461040"/>
+            <a:ext cx="4159080" cy="478800"/>
+          </a:xfrm>
+          <a:prstGeom prst="rect">
+            <a:avLst/>
+          </a:prstGeom>
+          <a:noFill/>
+          <a:ln w="0">
+            <a:noFill/>
+          </a:ln>
+        </p:spPr>
+        <p:style>
+          <a:lnRef idx="0"/>
+          <a:fillRef idx="0"/>
+          <a:effectRef idx="0"/>
+          <a:fontRef idx="minor"/>
+        </p:style>
+        <p:txBody>
+          <a:bodyPr lIns="0" tIns="0" rIns="0" bIns="0" anchor="ctr">
+            <a:normAutofit/>
+          </a:bodyPr>
+          <a:p>
+            <a:endParaRPr lang="en-US" sz="1800" b="0" u="none" strike="noStrike">
+              <a:solidFill>
+                <a:srgbClr val="FFFFFF"/>
+              </a:solidFill>
+              <a:effectLst/>
+              <a:uFillTx/>
+              <a:latin typeface="Arial"/>
+            </a:endParaRPr>
+          </a:p>
+        </p:txBody>
+      </p:sp>
     </p:spTree>
   </p:cSld>
   <mc:AlternateContent>
@@ -14632,7 +15685,7 @@
 </file>
 
 <file path=ppt/slides/slide9.xml><?xml version="1.0" encoding="utf-8"?>
-<p:sld xmlns:a="http://schemas.openxmlformats.org/drawingml/2006/main" xmlns:p="http://schemas.openxmlformats.org/presentationml/2006/main" xmlns:r="http://schemas.openxmlformats.org/officeDocument/2006/relationships" xmlns:p14="http://schemas.microsoft.com/office/powerpoint/2010/main" xmlns:p15="http://schemas.microsoft.com/office/powerpoint/2012/main" xmlns:mc="http://schemas.openxmlformats.org/markup-compatibility/2006" show="0">
+<p:sld xmlns:a="http://schemas.openxmlformats.org/drawingml/2006/main" xmlns:p="http://schemas.openxmlformats.org/presentationml/2006/main" xmlns:r="http://schemas.openxmlformats.org/officeDocument/2006/relationships" xmlns:p14="http://schemas.microsoft.com/office/powerpoint/2010/main" xmlns:p15="http://schemas.microsoft.com/office/powerpoint/2012/main" xmlns:mc="http://schemas.openxmlformats.org/markup-compatibility/2006">
   <p:cSld>
     <p:bg>
       <p:bgPr>
@@ -14657,14 +15710,14 @@
       </p:grpSpPr>
       <p:sp>
         <p:nvSpPr>
-          <p:cNvPr id="237" name="Shape 19"/>
-          <p:cNvSpPr/>
-          <p:nvPr/>
-        </p:nvSpPr>
-        <p:spPr>
-          <a:xfrm>
-            <a:off x="0" y="-11160"/>
-            <a:ext cx="12190680" cy="6856920"/>
+          <p:cNvPr id="227" name="Shape 0"/>
+          <p:cNvSpPr/>
+          <p:nvPr/>
+        </p:nvSpPr>
+        <p:spPr>
+          <a:xfrm>
+            <a:off x="0" y="0"/>
+            <a:ext cx="12190320" cy="6856560"/>
           </a:xfrm>
           <a:prstGeom prst="rect">
             <a:avLst/>
@@ -14705,14 +15758,14 @@
       </p:sp>
       <p:sp>
         <p:nvSpPr>
-          <p:cNvPr id="238" name="Shape 61"/>
+          <p:cNvPr id="228" name="Shape 1"/>
           <p:cNvSpPr/>
           <p:nvPr/>
         </p:nvSpPr>
         <p:spPr>
           <a:xfrm>
             <a:off x="18360" y="18360"/>
-            <a:ext cx="12153960" cy="6820200"/>
+            <a:ext cx="12153600" cy="6819840"/>
           </a:xfrm>
           <a:prstGeom prst="rect">
             <a:avLst/>
@@ -14751,7 +15804,7 @@
       </p:sp>
       <p:sp>
         <p:nvSpPr>
-          <p:cNvPr id="239" name="Shape 62"/>
+          <p:cNvPr id="229" name="Shape 2"/>
           <p:cNvSpPr/>
           <p:nvPr/>
         </p:nvSpPr>
@@ -14796,7 +15849,7 @@
       </p:sp>
       <p:sp>
         <p:nvSpPr>
-          <p:cNvPr id="240" name="Shape 63"/>
+          <p:cNvPr id="230" name="Shape 3"/>
           <p:cNvSpPr/>
           <p:nvPr/>
         </p:nvSpPr>
@@ -14841,7 +15894,7 @@
       </p:sp>
       <p:sp>
         <p:nvSpPr>
-          <p:cNvPr id="241" name="Shape 64"/>
+          <p:cNvPr id="231" name="Shape 4"/>
           <p:cNvSpPr/>
           <p:nvPr/>
         </p:nvSpPr>
@@ -14886,7 +15939,7 @@
       </p:sp>
       <p:sp>
         <p:nvSpPr>
-          <p:cNvPr id="242" name="Shape 65"/>
+          <p:cNvPr id="232" name="Shape 5"/>
           <p:cNvSpPr/>
           <p:nvPr/>
         </p:nvSpPr>
@@ -14931,7 +15984,7 @@
       </p:sp>
       <p:sp>
         <p:nvSpPr>
-          <p:cNvPr id="243" name="Shape 66"/>
+          <p:cNvPr id="233" name="Shape 6"/>
           <p:cNvSpPr/>
           <p:nvPr/>
         </p:nvSpPr>
@@ -14976,7 +16029,7 @@
       </p:sp>
       <p:sp>
         <p:nvSpPr>
-          <p:cNvPr id="244" name="Shape 67"/>
+          <p:cNvPr id="234" name="Shape 7"/>
           <p:cNvSpPr/>
           <p:nvPr/>
         </p:nvSpPr>
@@ -15021,7 +16074,7 @@
       </p:sp>
       <p:sp>
         <p:nvSpPr>
-          <p:cNvPr id="245" name="Shape 68"/>
+          <p:cNvPr id="235" name="Shape 8"/>
           <p:cNvSpPr/>
           <p:nvPr/>
         </p:nvSpPr>
@@ -15066,7 +16119,7 @@
       </p:sp>
       <p:sp>
         <p:nvSpPr>
-          <p:cNvPr id="246" name="Shape 69"/>
+          <p:cNvPr id="236" name="Shape 9"/>
           <p:cNvSpPr/>
           <p:nvPr/>
         </p:nvSpPr>
@@ -15111,7 +16164,7 @@
       </p:sp>
       <p:sp>
         <p:nvSpPr>
-          <p:cNvPr id="247" name="Shape 70"/>
+          <p:cNvPr id="237" name="Shape 10"/>
           <p:cNvSpPr/>
           <p:nvPr/>
         </p:nvSpPr>
@@ -15156,7 +16209,7 @@
       </p:sp>
       <p:sp>
         <p:nvSpPr>
-          <p:cNvPr id="248" name="Shape 71"/>
+          <p:cNvPr id="238" name="Shape 11"/>
           <p:cNvSpPr/>
           <p:nvPr/>
         </p:nvSpPr>
@@ -15201,7 +16254,7 @@
       </p:sp>
       <p:sp>
         <p:nvSpPr>
-          <p:cNvPr id="249" name="Shape 72"/>
+          <p:cNvPr id="239" name="Shape 12"/>
           <p:cNvSpPr/>
           <p:nvPr/>
         </p:nvSpPr>
@@ -15246,7 +16299,7 @@
       </p:sp>
       <p:sp>
         <p:nvSpPr>
-          <p:cNvPr id="250" name="Shape 73"/>
+          <p:cNvPr id="240" name="Shape 13"/>
           <p:cNvSpPr/>
           <p:nvPr/>
         </p:nvSpPr>
@@ -15291,7 +16344,7 @@
       </p:sp>
       <p:sp>
         <p:nvSpPr>
-          <p:cNvPr id="251" name="Shape 74"/>
+          <p:cNvPr id="241" name="Shape 14"/>
           <p:cNvSpPr/>
           <p:nvPr/>
         </p:nvSpPr>
@@ -15336,7 +16389,7 @@
       </p:sp>
       <p:sp>
         <p:nvSpPr>
-          <p:cNvPr id="252" name="Shape 75"/>
+          <p:cNvPr id="242" name="Shape 15"/>
           <p:cNvSpPr/>
           <p:nvPr/>
         </p:nvSpPr>
@@ -15381,7 +16434,7 @@
       </p:sp>
       <p:sp>
         <p:nvSpPr>
-          <p:cNvPr id="253" name="Shape 76"/>
+          <p:cNvPr id="243" name="Shape 16"/>
           <p:cNvSpPr/>
           <p:nvPr/>
         </p:nvSpPr>
@@ -15426,7 +16479,7 @@
       </p:sp>
       <p:sp>
         <p:nvSpPr>
-          <p:cNvPr id="254" name="Shape 77"/>
+          <p:cNvPr id="244" name="Shape 17"/>
           <p:cNvSpPr/>
           <p:nvPr/>
         </p:nvSpPr>
@@ -15471,7 +16524,7 @@
       </p:sp>
       <p:sp>
         <p:nvSpPr>
-          <p:cNvPr id="255" name="Shape 78"/>
+          <p:cNvPr id="245" name="Shape 18"/>
           <p:cNvSpPr/>
           <p:nvPr/>
         </p:nvSpPr>
@@ -15516,14 +16569,14 @@
       </p:sp>
       <p:sp>
         <p:nvSpPr>
-          <p:cNvPr id="256" name="Text 7"/>
+          <p:cNvPr id="246" name="Text 19"/>
           <p:cNvSpPr/>
           <p:nvPr/>
         </p:nvSpPr>
         <p:spPr>
           <a:xfrm>
             <a:off x="255960" y="6455520"/>
-            <a:ext cx="410400" cy="163440"/>
+            <a:ext cx="410040" cy="163080"/>
           </a:xfrm>
           <a:prstGeom prst="rect">
             <a:avLst/>
@@ -15553,7 +16606,7 @@
               </a:tabLst>
             </a:pPr>
             <a:r>
-              <a:rPr lang="en-US" sz="650" b="0" u="none" strike="noStrike">
+              <a:rPr lang="en-US" sz="1400" b="0" u="none" strike="noStrike">
                 <a:solidFill>
                   <a:srgbClr val="8F949A"/>
                 </a:solidFill>
@@ -15562,90 +16615,29 @@
                 <a:latin typeface="IBM Plex Sans"/>
                 <a:ea typeface="Aptos"/>
               </a:rPr>
-              <a:t>06</a:t>
+              <a:t>9</a:t>
             </a:r>
-            <a:endParaRPr lang="en-US" sz="650" b="0" u="none" strike="noStrike">
-              <a:solidFill>
-                <a:srgbClr val="FFFFFF"/>
-              </a:solidFill>
-              <a:effectLst/>
-              <a:uFillTx/>
-              <a:latin typeface="Arial"/>
-            </a:endParaRPr>
-          </a:p>
-        </p:txBody>
-      </p:sp>
-      <p:sp>
-        <p:nvSpPr>
-          <p:cNvPr id="257" name="Text 8"/>
-          <p:cNvSpPr/>
-          <p:nvPr/>
-        </p:nvSpPr>
-        <p:spPr>
-          <a:xfrm>
-            <a:off x="9829800" y="6455520"/>
-            <a:ext cx="2056320" cy="163440"/>
-          </a:xfrm>
-          <a:prstGeom prst="rect">
-            <a:avLst/>
-          </a:prstGeom>
-          <a:noFill/>
-          <a:ln w="0">
-            <a:noFill/>
-          </a:ln>
-        </p:spPr>
-        <p:style>
-          <a:lnRef idx="0"/>
-          <a:fillRef idx="0"/>
-          <a:effectRef idx="0"/>
-          <a:fontRef idx="minor"/>
-        </p:style>
-        <p:txBody>
-          <a:bodyPr lIns="0" tIns="0" rIns="0" bIns="0" anchor="ctr">
-            <a:noAutofit/>
-          </a:bodyPr>
-          <a:p>
-            <a:pPr algn="r" defTabSz="914400">
-              <a:lnSpc>
-                <a:spcPct val="100000"/>
-              </a:lnSpc>
-              <a:tabLst>
-                <a:tab pos="0" algn="l"/>
-              </a:tabLst>
-            </a:pPr>
-            <a:r>
-              <a:rPr lang="en-US" sz="650" b="0" u="none" strike="noStrike">
-                <a:solidFill>
-                  <a:srgbClr val="8F949A"/>
-                </a:solidFill>
-                <a:effectLst/>
-                <a:uFillTx/>
-                <a:latin typeface="IBM Plex Sans"/>
-                <a:ea typeface="Aptos"/>
-              </a:rPr>
-              <a:t>BLOODHOUND-KUBE</a:t>
-            </a:r>
-            <a:endParaRPr lang="en-US" sz="650" b="0" u="none" strike="noStrike">
-              <a:solidFill>
-                <a:srgbClr val="FFFFFF"/>
-              </a:solidFill>
-              <a:effectLst/>
-              <a:uFillTx/>
-              <a:latin typeface="Arial"/>
-            </a:endParaRPr>
-          </a:p>
-        </p:txBody>
-      </p:sp>
-      <p:sp>
-        <p:nvSpPr>
-          <p:cNvPr id="258" name="Text 9"/>
-          <p:cNvSpPr/>
-          <p:nvPr/>
-        </p:nvSpPr>
-        <p:spPr>
-          <a:xfrm>
-            <a:off x="576000" y="384120"/>
-            <a:ext cx="7131240" cy="410400"/>
+            <a:endParaRPr lang="en-US" sz="1400" b="0" u="none" strike="noStrike">
+              <a:solidFill>
+                <a:srgbClr val="FFFFFF"/>
+              </a:solidFill>
+              <a:effectLst/>
+              <a:uFillTx/>
+              <a:latin typeface="Arial"/>
+            </a:endParaRPr>
+          </a:p>
+        </p:txBody>
+      </p:sp>
+      <p:sp>
+        <p:nvSpPr>
+          <p:cNvPr id="247" name="Text 21"/>
+          <p:cNvSpPr/>
+          <p:nvPr/>
+        </p:nvSpPr>
+        <p:spPr>
+          <a:xfrm>
+            <a:off x="749880" y="1143000"/>
+            <a:ext cx="3656160" cy="501480"/>
           </a:xfrm>
           <a:prstGeom prst="rect">
             <a:avLst/>
@@ -15675,7 +16667,7 @@
               </a:tabLst>
             </a:pPr>
             <a:r>
-              <a:rPr lang="en-US" sz="2800" b="1" u="none" strike="noStrike">
+              <a:rPr lang="en-US" sz="3400" b="1" u="none" strike="noStrike">
                 <a:solidFill>
                   <a:srgbClr val="F2F3F5"/>
                 </a:solidFill>
@@ -15684,72 +16676,95 @@
                 <a:latin typeface="IBM Plex Sans"/>
                 <a:ea typeface="Aptos Display"/>
               </a:rPr>
-              <a:t>PlaceHolder</a:t>
+              <a:t>Questions?</a:t>
             </a:r>
-            <a:endParaRPr lang="en-US" sz="2800" b="0" u="none" strike="noStrike">
-              <a:solidFill>
-                <a:srgbClr val="FFFFFF"/>
-              </a:solidFill>
-              <a:effectLst/>
-              <a:uFillTx/>
-              <a:latin typeface="Arial"/>
-            </a:endParaRPr>
-          </a:p>
-        </p:txBody>
-      </p:sp>
-      <p:sp>
-        <p:nvSpPr>
-          <p:cNvPr id="259" name="Shape 79"/>
-          <p:cNvSpPr/>
-          <p:nvPr/>
-        </p:nvSpPr>
-        <p:spPr>
-          <a:xfrm>
-            <a:off x="576000" y="932400"/>
-            <a:ext cx="914400" cy="360"/>
-          </a:xfrm>
-          <a:prstGeom prst="line">
-            <a:avLst/>
-          </a:prstGeom>
-          <a:ln w="27940">
-            <a:solidFill>
-              <a:srgbClr val="E53935"/>
-            </a:solidFill>
-            <a:round/>
-          </a:ln>
-        </p:spPr>
-        <p:style>
-          <a:lnRef idx="0"/>
-          <a:fillRef idx="0"/>
-          <a:effectRef idx="0"/>
-          <a:fontRef idx="minor"/>
-        </p:style>
-        <p:txBody>
-          <a:bodyPr lIns="90000" tIns="-44640" rIns="90000" bIns="-44640" anchor="t" anchorCtr="1">
-            <a:noAutofit/>
-          </a:bodyPr>
-          <a:p>
-            <a:endParaRPr lang="en-US" sz="1800" b="0" u="none" strike="noStrike">
-              <a:solidFill>
-                <a:srgbClr val="FFFFFF"/>
-              </a:solidFill>
-              <a:effectLst/>
-              <a:uFillTx/>
-              <a:latin typeface="Arial"/>
-            </a:endParaRPr>
-          </a:p>
-        </p:txBody>
-      </p:sp>
-      <p:sp>
-        <p:nvSpPr>
-          <p:cNvPr id="260" name="Text 11"/>
-          <p:cNvSpPr/>
-          <p:nvPr/>
-        </p:nvSpPr>
-        <p:spPr>
-          <a:xfrm>
-            <a:off x="1627560" y="896040"/>
-            <a:ext cx="8960040" cy="200160"/>
+            <a:endParaRPr lang="en-US" sz="3400" b="0" u="none" strike="noStrike">
+              <a:solidFill>
+                <a:srgbClr val="FFFFFF"/>
+              </a:solidFill>
+              <a:effectLst/>
+              <a:uFillTx/>
+              <a:latin typeface="Arial"/>
+            </a:endParaRPr>
+          </a:p>
+        </p:txBody>
+      </p:sp>
+      <p:sp>
+        <p:nvSpPr>
+          <p:cNvPr id="248" name="Text 22"/>
+          <p:cNvSpPr/>
+          <p:nvPr/>
+        </p:nvSpPr>
+        <p:spPr>
+          <a:xfrm>
+            <a:off x="822960" y="2148840"/>
+            <a:ext cx="364320" cy="364320"/>
+          </a:xfrm>
+          <a:prstGeom prst="ellipse">
+            <a:avLst/>
+          </a:prstGeom>
+          <a:solidFill>
+            <a:srgbClr val="17191C"/>
+          </a:solidFill>
+          <a:ln w="15240">
+            <a:solidFill>
+              <a:srgbClr val="555A60"/>
+            </a:solidFill>
+            <a:round/>
+          </a:ln>
+        </p:spPr>
+        <p:style>
+          <a:lnRef idx="0"/>
+          <a:fillRef idx="0"/>
+          <a:effectRef idx="0"/>
+          <a:fontRef idx="minor"/>
+        </p:style>
+        <p:txBody>
+          <a:bodyPr lIns="720" tIns="720" rIns="720" bIns="720" anchor="ctr">
+            <a:normAutofit/>
+          </a:bodyPr>
+          <a:p>
+            <a:pPr algn="ctr" defTabSz="914400">
+              <a:lnSpc>
+                <a:spcPct val="100000"/>
+              </a:lnSpc>
+              <a:tabLst>
+                <a:tab pos="0" algn="l"/>
+              </a:tabLst>
+            </a:pPr>
+            <a:r>
+              <a:rPr lang="en-US" sz="1800" b="1" u="none" strike="noStrike">
+                <a:solidFill>
+                  <a:srgbClr val="F2F3F5"/>
+                </a:solidFill>
+                <a:effectLst/>
+                <a:uFillTx/>
+                <a:latin typeface="IBM Plex Sans"/>
+                <a:ea typeface="Aptos"/>
+              </a:rPr>
+              <a:t>1</a:t>
+            </a:r>
+            <a:endParaRPr lang="en-US" sz="1800" b="0" u="none" strike="noStrike">
+              <a:solidFill>
+                <a:srgbClr val="FFFFFF"/>
+              </a:solidFill>
+              <a:effectLst/>
+              <a:uFillTx/>
+              <a:latin typeface="Arial"/>
+            </a:endParaRPr>
+          </a:p>
+        </p:txBody>
+      </p:sp>
+      <p:sp>
+        <p:nvSpPr>
+          <p:cNvPr id="249" name="Text 23"/>
+          <p:cNvSpPr/>
+          <p:nvPr/>
+        </p:nvSpPr>
+        <p:spPr>
+          <a:xfrm>
+            <a:off x="1417320" y="2148840"/>
+            <a:ext cx="5759280" cy="336960"/>
           </a:xfrm>
           <a:prstGeom prst="rect">
             <a:avLst/>
@@ -15766,7 +16781,7 @@
           <a:fontRef idx="minor"/>
         </p:style>
         <p:txBody>
-          <a:bodyPr lIns="0" tIns="0" rIns="0" bIns="0" anchor="ctr">
+          <a:bodyPr lIns="720" tIns="720" rIns="720" bIns="720" anchor="ctr">
             <a:normAutofit/>
           </a:bodyPr>
           <a:p>
@@ -15779,28 +16794,478 @@
               </a:tabLst>
             </a:pPr>
             <a:r>
-              <a:rPr lang="en-US" sz="950" b="0" u="none" strike="noStrike">
+              <a:rPr lang="en-US" sz="1800" b="0" u="none" strike="noStrike">
                 <a:solidFill>
-                  <a:srgbClr val="A6AAB0"/>
+                  <a:srgbClr val="D4D6DA"/>
                 </a:solidFill>
                 <a:effectLst/>
                 <a:uFillTx/>
                 <a:latin typeface="IBM Plex Sans"/>
                 <a:ea typeface="Aptos"/>
               </a:rPr>
-              <a:t>Keep the live demo narrow: one environment, one path, one clear conclusion.</a:t>
+              <a:t>Kubernetes relationships are a graph problem.</a:t>
             </a:r>
-            <a:endParaRPr lang="en-US" sz="950" b="0" u="none" strike="noStrike">
-              <a:solidFill>
-                <a:srgbClr val="FFFFFF"/>
-              </a:solidFill>
-              <a:effectLst/>
-              <a:uFillTx/>
-              <a:latin typeface="Arial"/>
-            </a:endParaRPr>
-          </a:p>
-        </p:txBody>
-      </p:sp>
+            <a:endParaRPr lang="en-US" sz="1800" b="0" u="none" strike="noStrike">
+              <a:solidFill>
+                <a:srgbClr val="FFFFFF"/>
+              </a:solidFill>
+              <a:effectLst/>
+              <a:uFillTx/>
+              <a:latin typeface="Arial"/>
+            </a:endParaRPr>
+          </a:p>
+        </p:txBody>
+      </p:sp>
+      <p:sp>
+        <p:nvSpPr>
+          <p:cNvPr id="250" name="Text 24"/>
+          <p:cNvSpPr/>
+          <p:nvPr/>
+        </p:nvSpPr>
+        <p:spPr>
+          <a:xfrm>
+            <a:off x="822960" y="2807280"/>
+            <a:ext cx="364320" cy="364320"/>
+          </a:xfrm>
+          <a:prstGeom prst="ellipse">
+            <a:avLst/>
+          </a:prstGeom>
+          <a:solidFill>
+            <a:srgbClr val="3A1111"/>
+          </a:solidFill>
+          <a:ln w="15240">
+            <a:solidFill>
+              <a:srgbClr val="E53935"/>
+            </a:solidFill>
+            <a:round/>
+          </a:ln>
+        </p:spPr>
+        <p:style>
+          <a:lnRef idx="0"/>
+          <a:fillRef idx="0"/>
+          <a:effectRef idx="0"/>
+          <a:fontRef idx="minor"/>
+        </p:style>
+        <p:txBody>
+          <a:bodyPr lIns="720" tIns="720" rIns="720" bIns="720" anchor="ctr">
+            <a:normAutofit/>
+          </a:bodyPr>
+          <a:p>
+            <a:pPr algn="ctr" defTabSz="914400">
+              <a:lnSpc>
+                <a:spcPct val="100000"/>
+              </a:lnSpc>
+              <a:tabLst>
+                <a:tab pos="0" algn="l"/>
+              </a:tabLst>
+            </a:pPr>
+            <a:r>
+              <a:rPr lang="en-US" sz="1800" b="1" u="none" strike="noStrike">
+                <a:solidFill>
+                  <a:srgbClr val="F2F3F5"/>
+                </a:solidFill>
+                <a:effectLst/>
+                <a:uFillTx/>
+                <a:latin typeface="IBM Plex Sans"/>
+                <a:ea typeface="Aptos"/>
+              </a:rPr>
+              <a:t>2</a:t>
+            </a:r>
+            <a:endParaRPr lang="en-US" sz="1800" b="0" u="none" strike="noStrike">
+              <a:solidFill>
+                <a:srgbClr val="FFFFFF"/>
+              </a:solidFill>
+              <a:effectLst/>
+              <a:uFillTx/>
+              <a:latin typeface="Arial"/>
+            </a:endParaRPr>
+          </a:p>
+        </p:txBody>
+      </p:sp>
+      <p:sp>
+        <p:nvSpPr>
+          <p:cNvPr id="251" name="Text 25"/>
+          <p:cNvSpPr/>
+          <p:nvPr/>
+        </p:nvSpPr>
+        <p:spPr>
+          <a:xfrm>
+            <a:off x="1417320" y="2653920"/>
+            <a:ext cx="5943240" cy="658080"/>
+          </a:xfrm>
+          <a:prstGeom prst="rect">
+            <a:avLst/>
+          </a:prstGeom>
+          <a:noFill/>
+          <a:ln w="0">
+            <a:noFill/>
+          </a:ln>
+        </p:spPr>
+        <p:style>
+          <a:lnRef idx="0"/>
+          <a:fillRef idx="0"/>
+          <a:effectRef idx="0"/>
+          <a:fontRef idx="minor"/>
+        </p:style>
+        <p:txBody>
+          <a:bodyPr lIns="720" tIns="720" rIns="720" bIns="720" anchor="ctr">
+            <a:normAutofit/>
+          </a:bodyPr>
+          <a:p>
+            <a:pPr defTabSz="914400">
+              <a:lnSpc>
+                <a:spcPct val="100000"/>
+              </a:lnSpc>
+              <a:tabLst>
+                <a:tab pos="0" algn="l"/>
+              </a:tabLst>
+            </a:pPr>
+            <a:r>
+              <a:rPr lang="en-US" sz="1800" b="0" u="none" strike="noStrike">
+                <a:solidFill>
+                  <a:srgbClr val="D4D6DA"/>
+                </a:solidFill>
+                <a:effectLst/>
+                <a:uFillTx/>
+                <a:latin typeface="IBM Plex Sans"/>
+                <a:ea typeface="Aptos"/>
+              </a:rPr>
+              <a:t>BloodHound-Kube turns cluster state into OpenGraph data.</a:t>
+            </a:r>
+            <a:endParaRPr lang="en-US" sz="1800" b="0" u="none" strike="noStrike">
+              <a:solidFill>
+                <a:srgbClr val="FFFFFF"/>
+              </a:solidFill>
+              <a:effectLst/>
+              <a:uFillTx/>
+              <a:latin typeface="Arial"/>
+            </a:endParaRPr>
+          </a:p>
+        </p:txBody>
+      </p:sp>
+      <p:sp>
+        <p:nvSpPr>
+          <p:cNvPr id="252" name="Text 26"/>
+          <p:cNvSpPr/>
+          <p:nvPr/>
+        </p:nvSpPr>
+        <p:spPr>
+          <a:xfrm>
+            <a:off x="822960" y="3465720"/>
+            <a:ext cx="364320" cy="364320"/>
+          </a:xfrm>
+          <a:prstGeom prst="ellipse">
+            <a:avLst/>
+          </a:prstGeom>
+          <a:solidFill>
+            <a:srgbClr val="17191C"/>
+          </a:solidFill>
+          <a:ln w="15240">
+            <a:solidFill>
+              <a:srgbClr val="555A60"/>
+            </a:solidFill>
+            <a:round/>
+          </a:ln>
+        </p:spPr>
+        <p:style>
+          <a:lnRef idx="0"/>
+          <a:fillRef idx="0"/>
+          <a:effectRef idx="0"/>
+          <a:fontRef idx="minor"/>
+        </p:style>
+        <p:txBody>
+          <a:bodyPr lIns="720" tIns="720" rIns="720" bIns="720" anchor="ctr">
+            <a:normAutofit/>
+          </a:bodyPr>
+          <a:p>
+            <a:pPr algn="ctr" defTabSz="914400">
+              <a:lnSpc>
+                <a:spcPct val="100000"/>
+              </a:lnSpc>
+              <a:tabLst>
+                <a:tab pos="0" algn="l"/>
+              </a:tabLst>
+            </a:pPr>
+            <a:r>
+              <a:rPr lang="en-US" sz="1800" b="1" u="none" strike="noStrike">
+                <a:solidFill>
+                  <a:srgbClr val="F2F3F5"/>
+                </a:solidFill>
+                <a:effectLst/>
+                <a:uFillTx/>
+                <a:latin typeface="IBM Plex Sans"/>
+                <a:ea typeface="Aptos"/>
+              </a:rPr>
+              <a:t>3</a:t>
+            </a:r>
+            <a:endParaRPr lang="en-US" sz="1800" b="0" u="none" strike="noStrike">
+              <a:solidFill>
+                <a:srgbClr val="FFFFFF"/>
+              </a:solidFill>
+              <a:effectLst/>
+              <a:uFillTx/>
+              <a:latin typeface="Arial"/>
+            </a:endParaRPr>
+          </a:p>
+        </p:txBody>
+      </p:sp>
+      <p:sp>
+        <p:nvSpPr>
+          <p:cNvPr id="253" name="Text 27"/>
+          <p:cNvSpPr/>
+          <p:nvPr/>
+        </p:nvSpPr>
+        <p:spPr>
+          <a:xfrm>
+            <a:off x="1417320" y="3312360"/>
+            <a:ext cx="6113880" cy="652320"/>
+          </a:xfrm>
+          <a:prstGeom prst="rect">
+            <a:avLst/>
+          </a:prstGeom>
+          <a:noFill/>
+          <a:ln w="0">
+            <a:noFill/>
+          </a:ln>
+        </p:spPr>
+        <p:style>
+          <a:lnRef idx="0"/>
+          <a:fillRef idx="0"/>
+          <a:effectRef idx="0"/>
+          <a:fontRef idx="minor"/>
+        </p:style>
+        <p:txBody>
+          <a:bodyPr lIns="720" tIns="720" rIns="720" bIns="720" anchor="ctr">
+            <a:normAutofit/>
+          </a:bodyPr>
+          <a:p>
+            <a:pPr defTabSz="914400">
+              <a:lnSpc>
+                <a:spcPct val="100000"/>
+              </a:lnSpc>
+              <a:tabLst>
+                <a:tab pos="0" algn="l"/>
+              </a:tabLst>
+            </a:pPr>
+            <a:r>
+              <a:rPr lang="en-US" sz="1800" b="0" u="none" strike="noStrike">
+                <a:solidFill>
+                  <a:srgbClr val="D4D6DA"/>
+                </a:solidFill>
+                <a:effectLst/>
+                <a:uFillTx/>
+                <a:latin typeface="IBM Plex Sans"/>
+                <a:ea typeface="Aptos"/>
+              </a:rPr>
+              <a:t>Better visibility leads to better, faster, more accurate testing. </a:t>
+            </a:r>
+            <a:endParaRPr lang="en-US" sz="1800" b="0" u="none" strike="noStrike">
+              <a:solidFill>
+                <a:srgbClr val="FFFFFF"/>
+              </a:solidFill>
+              <a:effectLst/>
+              <a:uFillTx/>
+              <a:latin typeface="Arial"/>
+            </a:endParaRPr>
+          </a:p>
+        </p:txBody>
+      </p:sp>
+      <p:sp>
+        <p:nvSpPr>
+          <p:cNvPr id="254" name="Shape 29"/>
+          <p:cNvSpPr/>
+          <p:nvPr/>
+        </p:nvSpPr>
+        <p:spPr>
+          <a:xfrm>
+            <a:off x="861480" y="4312800"/>
+            <a:ext cx="10500480" cy="1715400"/>
+          </a:xfrm>
+          <a:prstGeom prst="roundRect">
+            <a:avLst>
+              <a:gd name="adj" fmla="val 7317"/>
+            </a:avLst>
+          </a:prstGeom>
+          <a:solidFill>
+            <a:srgbClr val="070809"/>
+          </a:solidFill>
+          <a:ln w="12700">
+            <a:solidFill>
+              <a:srgbClr val="555A60">
+                <a:alpha val="88000"/>
+              </a:srgbClr>
+            </a:solidFill>
+            <a:round/>
+          </a:ln>
+        </p:spPr>
+        <p:style>
+          <a:lnRef idx="0"/>
+          <a:fillRef idx="0"/>
+          <a:effectRef idx="0"/>
+          <a:fontRef idx="minor"/>
+        </p:style>
+        <p:txBody>
+          <a:bodyPr lIns="90000" tIns="45000" rIns="90000" bIns="45000" anchor="t">
+            <a:noAutofit/>
+          </a:bodyPr>
+          <a:p>
+            <a:endParaRPr lang="en-US" sz="1800" b="0" u="none" strike="noStrike">
+              <a:solidFill>
+                <a:srgbClr val="FFFFFF"/>
+              </a:solidFill>
+              <a:effectLst/>
+              <a:uFillTx/>
+              <a:latin typeface="Arial"/>
+            </a:endParaRPr>
+          </a:p>
+        </p:txBody>
+      </p:sp>
+      <p:sp>
+        <p:nvSpPr>
+          <p:cNvPr id="255" name="Text 30"/>
+          <p:cNvSpPr/>
+          <p:nvPr/>
+        </p:nvSpPr>
+        <p:spPr>
+          <a:xfrm>
+            <a:off x="1038600" y="4400280"/>
+            <a:ext cx="10110600" cy="619200"/>
+          </a:xfrm>
+          <a:prstGeom prst="rect">
+            <a:avLst/>
+          </a:prstGeom>
+          <a:noFill/>
+          <a:ln w="0">
+            <a:noFill/>
+          </a:ln>
+        </p:spPr>
+        <p:style>
+          <a:lnRef idx="0"/>
+          <a:fillRef idx="0"/>
+          <a:effectRef idx="0"/>
+          <a:fontRef idx="minor"/>
+        </p:style>
+        <p:txBody>
+          <a:bodyPr lIns="0" tIns="0" rIns="0" bIns="0" anchor="ctr">
+            <a:normAutofit/>
+          </a:bodyPr>
+          <a:p>
+            <a:pPr defTabSz="914400">
+              <a:lnSpc>
+                <a:spcPct val="100000"/>
+              </a:lnSpc>
+              <a:tabLst>
+                <a:tab pos="0" algn="l"/>
+              </a:tabLst>
+            </a:pPr>
+            <a:r>
+              <a:rPr lang="en-US" sz="2200" b="0" u="none" strike="noStrike">
+                <a:solidFill>
+                  <a:srgbClr val="E7E7E7"/>
+                </a:solidFill>
+                <a:effectLst/>
+                <a:uFillTx/>
+                <a:latin typeface="IBM Plex Sans"/>
+                <a:ea typeface="DejaVu Sans Mono"/>
+              </a:rPr>
+              <a:t>github.com/HackinAhab/bloodhound-kube</a:t>
+            </a:r>
+            <a:endParaRPr lang="en-US" sz="2200" b="0" u="none" strike="noStrike">
+              <a:solidFill>
+                <a:srgbClr val="FFFFFF"/>
+              </a:solidFill>
+              <a:effectLst/>
+              <a:uFillTx/>
+              <a:latin typeface="Arial"/>
+            </a:endParaRPr>
+          </a:p>
+        </p:txBody>
+      </p:sp>
+      <p:sp>
+        <p:nvSpPr>
+          <p:cNvPr id="256" name="Text 31"/>
+          <p:cNvSpPr/>
+          <p:nvPr/>
+        </p:nvSpPr>
+        <p:spPr>
+          <a:xfrm>
+            <a:off x="1038600" y="5020200"/>
+            <a:ext cx="7835760" cy="469800"/>
+          </a:xfrm>
+          <a:prstGeom prst="rect">
+            <a:avLst/>
+          </a:prstGeom>
+          <a:noFill/>
+          <a:ln w="0">
+            <a:noFill/>
+          </a:ln>
+        </p:spPr>
+        <p:style>
+          <a:lnRef idx="0"/>
+          <a:fillRef idx="0"/>
+          <a:effectRef idx="0"/>
+          <a:fontRef idx="minor"/>
+        </p:style>
+        <p:txBody>
+          <a:bodyPr lIns="0" tIns="0" rIns="0" bIns="0" anchor="ctr">
+            <a:normAutofit/>
+          </a:bodyPr>
+          <a:p>
+            <a:pPr defTabSz="914400">
+              <a:lnSpc>
+                <a:spcPct val="100000"/>
+              </a:lnSpc>
+              <a:tabLst>
+                <a:tab pos="0" algn="l"/>
+              </a:tabLst>
+            </a:pPr>
+            <a:r>
+              <a:rPr lang="en-US" sz="2200" b="0" u="none" strike="noStrike">
+                <a:solidFill>
+                  <a:srgbClr val="E7E7E7"/>
+                </a:solidFill>
+                <a:effectLst/>
+                <a:uFillTx/>
+                <a:latin typeface="IBM Plex Sans"/>
+                <a:ea typeface="DejaVu Sans Mono"/>
+              </a:rPr>
+              <a:t>Open source  |  Contributions and feedback welcome</a:t>
+            </a:r>
+            <a:endParaRPr lang="en-US" sz="2200" b="0" u="none" strike="noStrike">
+              <a:solidFill>
+                <a:srgbClr val="FFFFFF"/>
+              </a:solidFill>
+              <a:effectLst/>
+              <a:uFillTx/>
+              <a:latin typeface="Arial"/>
+            </a:endParaRPr>
+          </a:p>
+        </p:txBody>
+      </p:sp>
+      <p:pic>
+        <p:nvPicPr>
+          <p:cNvPr id="257" name="Picture 243"/>
+          <p:cNvPicPr/>
+          <p:nvPr/>
+        </p:nvPicPr>
+        <p:blipFill>
+          <a:blip r:embed="rId1"/>
+          <a:stretch/>
+        </p:blipFill>
+        <p:spPr>
+          <a:xfrm>
+            <a:off x="7653960" y="640080"/>
+            <a:ext cx="3416760" cy="3416760"/>
+          </a:xfrm>
+          <a:prstGeom prst="rect">
+            <a:avLst/>
+          </a:prstGeom>
+          <a:noFill/>
+          <a:ln w="0">
+            <a:noFill/>
+          </a:ln>
+        </p:spPr>
+      </p:pic>
     </p:spTree>
   </p:cSld>
   <mc:AlternateContent>
